--- a/office/template_A3.pptx
+++ b/office/template_A3.pptx
@@ -156,27 +156,99 @@
   <pc:docChgLst>
     <pc:chgData name="Kazu ENDO" userId="394a0fe494bc10a7" providerId="LiveId" clId="{9B94F21E-C83F-4FE9-9F96-8B842C8D39FE}"/>
     <pc:docChg chg="undo custSel addSld modSld">
-      <pc:chgData name="Kazu ENDO" userId="394a0fe494bc10a7" providerId="LiveId" clId="{9B94F21E-C83F-4FE9-9F96-8B842C8D39FE}" dt="2025-10-10T15:19:49.675" v="467" actId="20577"/>
+      <pc:chgData name="Kazu ENDO" userId="394a0fe494bc10a7" providerId="LiveId" clId="{9B94F21E-C83F-4FE9-9F96-8B842C8D39FE}" dt="2025-10-19T08:07:45.849" v="469" actId="2711"/>
       <pc:docMkLst>
         <pc:docMk/>
       </pc:docMkLst>
-      <pc:sldChg chg="addSp modSp">
-        <pc:chgData name="Kazu ENDO" userId="394a0fe494bc10a7" providerId="LiveId" clId="{9B94F21E-C83F-4FE9-9F96-8B842C8D39FE}" dt="2025-10-10T15:08:09.788" v="1"/>
+      <pc:sldChg chg="addSp modSp mod">
+        <pc:chgData name="Kazu ENDO" userId="394a0fe494bc10a7" providerId="LiveId" clId="{9B94F21E-C83F-4FE9-9F96-8B842C8D39FE}" dt="2025-10-19T08:07:32.438" v="468" actId="2711"/>
         <pc:sldMkLst>
           <pc:docMk/>
           <pc:sldMk cId="1722897886" sldId="268"/>
         </pc:sldMkLst>
-        <pc:spChg chg="add mod">
-          <ac:chgData name="Kazu ENDO" userId="394a0fe494bc10a7" providerId="LiveId" clId="{9B94F21E-C83F-4FE9-9F96-8B842C8D39FE}" dt="2025-10-10T15:08:09.788" v="1"/>
+        <pc:spChg chg="mod">
+          <ac:chgData name="Kazu ENDO" userId="394a0fe494bc10a7" providerId="LiveId" clId="{9B94F21E-C83F-4FE9-9F96-8B842C8D39FE}" dt="2025-10-19T08:07:32.438" v="468" actId="2711"/>
           <ac:spMkLst>
             <pc:docMk/>
             <pc:sldMk cId="1722897886" sldId="268"/>
-            <ac:spMk id="5" creationId="{8EE9C64C-D4A9-6F01-3274-405AA560656D}"/>
+            <ac:spMk id="3" creationId="{79385B11-BDED-DBC4-439A-145AE5182981}"/>
+          </ac:spMkLst>
+        </pc:spChg>
+        <pc:spChg chg="mod">
+          <ac:chgData name="Kazu ENDO" userId="394a0fe494bc10a7" providerId="LiveId" clId="{9B94F21E-C83F-4FE9-9F96-8B842C8D39FE}" dt="2025-10-19T08:07:32.438" v="468" actId="2711"/>
+          <ac:spMkLst>
+            <pc:docMk/>
+            <pc:sldMk cId="1722897886" sldId="268"/>
+            <ac:spMk id="10" creationId="{AB8A27E7-51BF-2A29-FD8A-42B956A90831}"/>
+          </ac:spMkLst>
+        </pc:spChg>
+        <pc:spChg chg="mod">
+          <ac:chgData name="Kazu ENDO" userId="394a0fe494bc10a7" providerId="LiveId" clId="{9B94F21E-C83F-4FE9-9F96-8B842C8D39FE}" dt="2025-10-19T08:07:32.438" v="468" actId="2711"/>
+          <ac:spMkLst>
+            <pc:docMk/>
+            <pc:sldMk cId="1722897886" sldId="268"/>
+            <ac:spMk id="11" creationId="{B321B6B1-79A9-D60A-E619-CA6EBE2CC80C}"/>
+          </ac:spMkLst>
+        </pc:spChg>
+        <pc:spChg chg="mod">
+          <ac:chgData name="Kazu ENDO" userId="394a0fe494bc10a7" providerId="LiveId" clId="{9B94F21E-C83F-4FE9-9F96-8B842C8D39FE}" dt="2025-10-19T08:07:32.438" v="468" actId="2711"/>
+          <ac:spMkLst>
+            <pc:docMk/>
+            <pc:sldMk cId="1722897886" sldId="268"/>
+            <ac:spMk id="21" creationId="{6EDBCBBD-EB53-6CA1-8224-FD0843E89A17}"/>
+          </ac:spMkLst>
+        </pc:spChg>
+        <pc:spChg chg="mod">
+          <ac:chgData name="Kazu ENDO" userId="394a0fe494bc10a7" providerId="LiveId" clId="{9B94F21E-C83F-4FE9-9F96-8B842C8D39FE}" dt="2025-10-19T08:07:32.438" v="468" actId="2711"/>
+          <ac:spMkLst>
+            <pc:docMk/>
+            <pc:sldMk cId="1722897886" sldId="268"/>
+            <ac:spMk id="27" creationId="{406B6F99-708E-1572-4A91-F76CB4C06D78}"/>
+          </ac:spMkLst>
+        </pc:spChg>
+        <pc:spChg chg="mod">
+          <ac:chgData name="Kazu ENDO" userId="394a0fe494bc10a7" providerId="LiveId" clId="{9B94F21E-C83F-4FE9-9F96-8B842C8D39FE}" dt="2025-10-19T08:07:32.438" v="468" actId="2711"/>
+          <ac:spMkLst>
+            <pc:docMk/>
+            <pc:sldMk cId="1722897886" sldId="268"/>
+            <ac:spMk id="28" creationId="{9F385DE7-561A-3DAA-5987-8D94009AE6D0}"/>
+          </ac:spMkLst>
+        </pc:spChg>
+        <pc:spChg chg="mod">
+          <ac:chgData name="Kazu ENDO" userId="394a0fe494bc10a7" providerId="LiveId" clId="{9B94F21E-C83F-4FE9-9F96-8B842C8D39FE}" dt="2025-10-19T08:07:32.438" v="468" actId="2711"/>
+          <ac:spMkLst>
+            <pc:docMk/>
+            <pc:sldMk cId="1722897886" sldId="268"/>
+            <ac:spMk id="30" creationId="{FE778AF4-E733-925A-A5B7-D705D18A824A}"/>
+          </ac:spMkLst>
+        </pc:spChg>
+        <pc:spChg chg="mod">
+          <ac:chgData name="Kazu ENDO" userId="394a0fe494bc10a7" providerId="LiveId" clId="{9B94F21E-C83F-4FE9-9F96-8B842C8D39FE}" dt="2025-10-19T08:07:32.438" v="468" actId="2711"/>
+          <ac:spMkLst>
+            <pc:docMk/>
+            <pc:sldMk cId="1722897886" sldId="268"/>
+            <ac:spMk id="31" creationId="{CD377EBC-612E-F267-FB8A-446FE62E24D5}"/>
+          </ac:spMkLst>
+        </pc:spChg>
+        <pc:spChg chg="mod">
+          <ac:chgData name="Kazu ENDO" userId="394a0fe494bc10a7" providerId="LiveId" clId="{9B94F21E-C83F-4FE9-9F96-8B842C8D39FE}" dt="2025-10-19T08:07:32.438" v="468" actId="2711"/>
+          <ac:spMkLst>
+            <pc:docMk/>
+            <pc:sldMk cId="1722897886" sldId="268"/>
+            <ac:spMk id="61" creationId="{EFF0B73B-0BD7-758C-EB4E-83426A47FB9D}"/>
+          </ac:spMkLst>
+        </pc:spChg>
+        <pc:spChg chg="mod">
+          <ac:chgData name="Kazu ENDO" userId="394a0fe494bc10a7" providerId="LiveId" clId="{9B94F21E-C83F-4FE9-9F96-8B842C8D39FE}" dt="2025-10-19T08:07:32.438" v="468" actId="2711"/>
+          <ac:spMkLst>
+            <pc:docMk/>
+            <pc:sldMk cId="1722897886" sldId="268"/>
+            <ac:spMk id="62" creationId="{614B0383-D3EC-8088-7CB8-756CDC458595}"/>
           </ac:spMkLst>
         </pc:spChg>
       </pc:sldChg>
       <pc:sldChg chg="addSp delSp modSp add mod">
-        <pc:chgData name="Kazu ENDO" userId="394a0fe494bc10a7" providerId="LiveId" clId="{9B94F21E-C83F-4FE9-9F96-8B842C8D39FE}" dt="2025-10-10T15:19:49.675" v="467" actId="20577"/>
+        <pc:chgData name="Kazu ENDO" userId="394a0fe494bc10a7" providerId="LiveId" clId="{9B94F21E-C83F-4FE9-9F96-8B842C8D39FE}" dt="2025-10-19T08:07:45.849" v="469" actId="2711"/>
         <pc:sldMkLst>
           <pc:docMk/>
           <pc:sldMk cId="4166541382" sldId="269"/>
@@ -189,6 +261,22 @@
             <ac:spMk id="2" creationId="{DD95FA49-DF0D-031F-CC3F-1E4899C021DD}"/>
           </ac:spMkLst>
         </pc:spChg>
+        <pc:spChg chg="mod">
+          <ac:chgData name="Kazu ENDO" userId="394a0fe494bc10a7" providerId="LiveId" clId="{9B94F21E-C83F-4FE9-9F96-8B842C8D39FE}" dt="2025-10-19T08:07:45.849" v="469" actId="2711"/>
+          <ac:spMkLst>
+            <pc:docMk/>
+            <pc:sldMk cId="4166541382" sldId="269"/>
+            <ac:spMk id="3" creationId="{82B3DEAF-3265-87BE-2607-8F82FFBD18AF}"/>
+          </ac:spMkLst>
+        </pc:spChg>
+        <pc:spChg chg="mod">
+          <ac:chgData name="Kazu ENDO" userId="394a0fe494bc10a7" providerId="LiveId" clId="{9B94F21E-C83F-4FE9-9F96-8B842C8D39FE}" dt="2025-10-19T08:07:45.849" v="469" actId="2711"/>
+          <ac:spMkLst>
+            <pc:docMk/>
+            <pc:sldMk cId="4166541382" sldId="269"/>
+            <ac:spMk id="4" creationId="{2F3479F8-CA2F-0631-FDD8-7281F7FBEA20}"/>
+          </ac:spMkLst>
+        </pc:spChg>
         <pc:spChg chg="add mod">
           <ac:chgData name="Kazu ENDO" userId="394a0fe494bc10a7" providerId="LiveId" clId="{9B94F21E-C83F-4FE9-9F96-8B842C8D39FE}" dt="2025-10-10T15:15:16.436" v="373" actId="14100"/>
           <ac:spMkLst>
@@ -198,7 +286,7 @@
           </ac:spMkLst>
         </pc:spChg>
         <pc:spChg chg="add mod">
-          <ac:chgData name="Kazu ENDO" userId="394a0fe494bc10a7" providerId="LiveId" clId="{9B94F21E-C83F-4FE9-9F96-8B842C8D39FE}" dt="2025-10-10T15:15:12.298" v="372" actId="1076"/>
+          <ac:chgData name="Kazu ENDO" userId="394a0fe494bc10a7" providerId="LiveId" clId="{9B94F21E-C83F-4FE9-9F96-8B842C8D39FE}" dt="2025-10-19T08:07:45.849" v="469" actId="2711"/>
           <ac:spMkLst>
             <pc:docMk/>
             <pc:sldMk cId="4166541382" sldId="269"/>
@@ -213,70 +301,6 @@
             <ac:spMk id="7" creationId="{11B426EC-4AE7-748C-A000-DF33AB3F8E14}"/>
           </ac:spMkLst>
         </pc:spChg>
-        <pc:spChg chg="del">
-          <ac:chgData name="Kazu ENDO" userId="394a0fe494bc10a7" providerId="LiveId" clId="{9B94F21E-C83F-4FE9-9F96-8B842C8D39FE}" dt="2025-10-10T15:09:34.213" v="3" actId="478"/>
-          <ac:spMkLst>
-            <pc:docMk/>
-            <pc:sldMk cId="4166541382" sldId="269"/>
-            <ac:spMk id="11" creationId="{AA4D2B97-44F4-2E35-89E2-5C7862C9536E}"/>
-          </ac:spMkLst>
-        </pc:spChg>
-        <pc:spChg chg="del">
-          <ac:chgData name="Kazu ENDO" userId="394a0fe494bc10a7" providerId="LiveId" clId="{9B94F21E-C83F-4FE9-9F96-8B842C8D39FE}" dt="2025-10-10T15:09:34.213" v="3" actId="478"/>
-          <ac:spMkLst>
-            <pc:docMk/>
-            <pc:sldMk cId="4166541382" sldId="269"/>
-            <ac:spMk id="12" creationId="{0BB76BAE-152C-35A2-71EE-5A326515F90D}"/>
-          </ac:spMkLst>
-        </pc:spChg>
-        <pc:spChg chg="del">
-          <ac:chgData name="Kazu ENDO" userId="394a0fe494bc10a7" providerId="LiveId" clId="{9B94F21E-C83F-4FE9-9F96-8B842C8D39FE}" dt="2025-10-10T15:09:34.213" v="3" actId="478"/>
-          <ac:spMkLst>
-            <pc:docMk/>
-            <pc:sldMk cId="4166541382" sldId="269"/>
-            <ac:spMk id="14" creationId="{19F9C0D0-8A0F-EA7E-812A-17D1A1CD5867}"/>
-          </ac:spMkLst>
-        </pc:spChg>
-        <pc:spChg chg="del">
-          <ac:chgData name="Kazu ENDO" userId="394a0fe494bc10a7" providerId="LiveId" clId="{9B94F21E-C83F-4FE9-9F96-8B842C8D39FE}" dt="2025-10-10T15:09:34.213" v="3" actId="478"/>
-          <ac:spMkLst>
-            <pc:docMk/>
-            <pc:sldMk cId="4166541382" sldId="269"/>
-            <ac:spMk id="22" creationId="{C66C46B5-971F-B1FF-E127-4BE1E7302D54}"/>
-          </ac:spMkLst>
-        </pc:spChg>
-        <pc:spChg chg="del">
-          <ac:chgData name="Kazu ENDO" userId="394a0fe494bc10a7" providerId="LiveId" clId="{9B94F21E-C83F-4FE9-9F96-8B842C8D39FE}" dt="2025-10-10T15:09:35.894" v="4" actId="478"/>
-          <ac:spMkLst>
-            <pc:docMk/>
-            <pc:sldMk cId="4166541382" sldId="269"/>
-            <ac:spMk id="25" creationId="{23864075-E3EC-78E2-C659-3F32F045C3E2}"/>
-          </ac:spMkLst>
-        </pc:spChg>
-        <pc:spChg chg="del">
-          <ac:chgData name="Kazu ENDO" userId="394a0fe494bc10a7" providerId="LiveId" clId="{9B94F21E-C83F-4FE9-9F96-8B842C8D39FE}" dt="2025-10-10T15:09:37.333" v="5" actId="478"/>
-          <ac:spMkLst>
-            <pc:docMk/>
-            <pc:sldMk cId="4166541382" sldId="269"/>
-            <ac:spMk id="27" creationId="{067D3074-391F-C855-99A3-8760FF748D9D}"/>
-          </ac:spMkLst>
-        </pc:spChg>
-        <pc:spChg chg="del">
-          <ac:chgData name="Kazu ENDO" userId="394a0fe494bc10a7" providerId="LiveId" clId="{9B94F21E-C83F-4FE9-9F96-8B842C8D39FE}" dt="2025-10-10T15:09:38.016" v="6" actId="478"/>
-          <ac:spMkLst>
-            <pc:docMk/>
-            <pc:sldMk cId="4166541382" sldId="269"/>
-            <ac:spMk id="28" creationId="{4C059CE3-3B33-55E2-795C-0BD35F54F046}"/>
-          </ac:spMkLst>
-        </pc:spChg>
-        <pc:spChg chg="del mod">
-          <ac:chgData name="Kazu ENDO" userId="394a0fe494bc10a7" providerId="LiveId" clId="{9B94F21E-C83F-4FE9-9F96-8B842C8D39FE}" dt="2025-10-10T15:09:43.421" v="9" actId="478"/>
-          <ac:spMkLst>
-            <pc:docMk/>
-            <pc:sldMk cId="4166541382" sldId="269"/>
-            <ac:spMk id="31" creationId="{57ECA6E2-22BD-4013-D336-F4F20985460E}"/>
-          </ac:spMkLst>
-        </pc:spChg>
         <pc:spChg chg="add mod">
           <ac:chgData name="Kazu ENDO" userId="394a0fe494bc10a7" providerId="LiveId" clId="{9B94F21E-C83F-4FE9-9F96-8B842C8D39FE}" dt="2025-10-10T15:16:01.503" v="378" actId="14100"/>
           <ac:spMkLst>
@@ -286,7 +310,7 @@
           </ac:spMkLst>
         </pc:spChg>
         <pc:spChg chg="add mod">
-          <ac:chgData name="Kazu ENDO" userId="394a0fe494bc10a7" providerId="LiveId" clId="{9B94F21E-C83F-4FE9-9F96-8B842C8D39FE}" dt="2025-10-10T15:11:42.761" v="88" actId="20577"/>
+          <ac:chgData name="Kazu ENDO" userId="394a0fe494bc10a7" providerId="LiveId" clId="{9B94F21E-C83F-4FE9-9F96-8B842C8D39FE}" dt="2025-10-19T08:07:45.849" v="469" actId="2711"/>
           <ac:spMkLst>
             <pc:docMk/>
             <pc:sldMk cId="4166541382" sldId="269"/>
@@ -310,7 +334,7 @@
           </ac:spMkLst>
         </pc:spChg>
         <pc:spChg chg="add mod">
-          <ac:chgData name="Kazu ENDO" userId="394a0fe494bc10a7" providerId="LiveId" clId="{9B94F21E-C83F-4FE9-9F96-8B842C8D39FE}" dt="2025-10-10T15:19:05.297" v="426" actId="14100"/>
+          <ac:chgData name="Kazu ENDO" userId="394a0fe494bc10a7" providerId="LiveId" clId="{9B94F21E-C83F-4FE9-9F96-8B842C8D39FE}" dt="2025-10-19T08:07:45.849" v="469" actId="2711"/>
           <ac:spMkLst>
             <pc:docMk/>
             <pc:sldMk cId="4166541382" sldId="269"/>
@@ -342,7 +366,7 @@
           </ac:spMkLst>
         </pc:spChg>
         <pc:spChg chg="add mod">
-          <ac:chgData name="Kazu ENDO" userId="394a0fe494bc10a7" providerId="LiveId" clId="{9B94F21E-C83F-4FE9-9F96-8B842C8D39FE}" dt="2025-10-10T15:17:49.078" v="410" actId="20577"/>
+          <ac:chgData name="Kazu ENDO" userId="394a0fe494bc10a7" providerId="LiveId" clId="{9B94F21E-C83F-4FE9-9F96-8B842C8D39FE}" dt="2025-10-19T08:07:45.849" v="469" actId="2711"/>
           <ac:spMkLst>
             <pc:docMk/>
             <pc:sldMk cId="4166541382" sldId="269"/>
@@ -373,14 +397,6 @@
             <ac:spMk id="44" creationId="{3320D914-393F-27B3-1714-C29D919223C2}"/>
           </ac:spMkLst>
         </pc:spChg>
-        <pc:spChg chg="del">
-          <ac:chgData name="Kazu ENDO" userId="394a0fe494bc10a7" providerId="LiveId" clId="{9B94F21E-C83F-4FE9-9F96-8B842C8D39FE}" dt="2025-10-10T15:09:34.213" v="3" actId="478"/>
-          <ac:spMkLst>
-            <pc:docMk/>
-            <pc:sldMk cId="4166541382" sldId="269"/>
-            <ac:spMk id="46" creationId="{4DFDDCE1-85EC-CFA5-72DC-7B17B9EADEF0}"/>
-          </ac:spMkLst>
-        </pc:spChg>
         <pc:spChg chg="add mod">
           <ac:chgData name="Kazu ENDO" userId="394a0fe494bc10a7" providerId="LiveId" clId="{9B94F21E-C83F-4FE9-9F96-8B842C8D39FE}" dt="2025-10-10T15:17:03.710" v="385" actId="1076"/>
           <ac:spMkLst>
@@ -398,27 +414,11 @@
           </ac:spMkLst>
         </pc:spChg>
         <pc:spChg chg="add mod">
-          <ac:chgData name="Kazu ENDO" userId="394a0fe494bc10a7" providerId="LiveId" clId="{9B94F21E-C83F-4FE9-9F96-8B842C8D39FE}" dt="2025-10-10T15:18:01.016" v="417" actId="20577"/>
+          <ac:chgData name="Kazu ENDO" userId="394a0fe494bc10a7" providerId="LiveId" clId="{9B94F21E-C83F-4FE9-9F96-8B842C8D39FE}" dt="2025-10-19T08:07:45.849" v="469" actId="2711"/>
           <ac:spMkLst>
             <pc:docMk/>
             <pc:sldMk cId="4166541382" sldId="269"/>
             <ac:spMk id="49" creationId="{4DA52F9D-7D04-4C45-EE7B-95BAB4D9B0E1}"/>
-          </ac:spMkLst>
-        </pc:spChg>
-        <pc:spChg chg="del">
-          <ac:chgData name="Kazu ENDO" userId="394a0fe494bc10a7" providerId="LiveId" clId="{9B94F21E-C83F-4FE9-9F96-8B842C8D39FE}" dt="2025-10-10T15:09:34.213" v="3" actId="478"/>
-          <ac:spMkLst>
-            <pc:docMk/>
-            <pc:sldMk cId="4166541382" sldId="269"/>
-            <ac:spMk id="50" creationId="{59E1C3E9-7824-4905-0443-43CBC5FB2CCA}"/>
-          </ac:spMkLst>
-        </pc:spChg>
-        <pc:spChg chg="del">
-          <ac:chgData name="Kazu ENDO" userId="394a0fe494bc10a7" providerId="LiveId" clId="{9B94F21E-C83F-4FE9-9F96-8B842C8D39FE}" dt="2025-10-10T15:09:34.213" v="3" actId="478"/>
-          <ac:spMkLst>
-            <pc:docMk/>
-            <pc:sldMk cId="4166541382" sldId="269"/>
-            <ac:spMk id="52" creationId="{4DA30D7B-BE0C-0FE0-D5E9-36FE787AF31A}"/>
           </ac:spMkLst>
         </pc:spChg>
         <pc:spChg chg="add mod">
@@ -438,7 +438,7 @@
           </ac:spMkLst>
         </pc:spChg>
         <pc:spChg chg="add mod">
-          <ac:chgData name="Kazu ENDO" userId="394a0fe494bc10a7" providerId="LiveId" clId="{9B94F21E-C83F-4FE9-9F96-8B842C8D39FE}" dt="2025-10-10T15:17:13.535" v="387" actId="1076"/>
+          <ac:chgData name="Kazu ENDO" userId="394a0fe494bc10a7" providerId="LiveId" clId="{9B94F21E-C83F-4FE9-9F96-8B842C8D39FE}" dt="2025-10-19T08:07:45.849" v="469" actId="2711"/>
           <ac:spMkLst>
             <pc:docMk/>
             <pc:sldMk cId="4166541382" sldId="269"/>
@@ -446,7 +446,7 @@
           </ac:spMkLst>
         </pc:spChg>
         <pc:spChg chg="add mod">
-          <ac:chgData name="Kazu ENDO" userId="394a0fe494bc10a7" providerId="LiveId" clId="{9B94F21E-C83F-4FE9-9F96-8B842C8D39FE}" dt="2025-10-10T15:17:13.535" v="387" actId="1076"/>
+          <ac:chgData name="Kazu ENDO" userId="394a0fe494bc10a7" providerId="LiveId" clId="{9B94F21E-C83F-4FE9-9F96-8B842C8D39FE}" dt="2025-10-19T08:07:45.849" v="469" actId="2711"/>
           <ac:spMkLst>
             <pc:docMk/>
             <pc:sldMk cId="4166541382" sldId="269"/>
@@ -459,86 +459,6 @@
             <pc:docMk/>
             <pc:sldMk cId="4166541382" sldId="269"/>
             <ac:spMk id="59" creationId="{108359C1-B652-91C3-1906-6F501E202463}"/>
-          </ac:spMkLst>
-        </pc:spChg>
-        <pc:spChg chg="del">
-          <ac:chgData name="Kazu ENDO" userId="394a0fe494bc10a7" providerId="LiveId" clId="{9B94F21E-C83F-4FE9-9F96-8B842C8D39FE}" dt="2025-10-10T15:09:34.213" v="3" actId="478"/>
-          <ac:spMkLst>
-            <pc:docMk/>
-            <pc:sldMk cId="4166541382" sldId="269"/>
-            <ac:spMk id="60" creationId="{5298FA52-0A36-B582-23C8-7E4C51CD33FA}"/>
-          </ac:spMkLst>
-        </pc:spChg>
-        <pc:spChg chg="del">
-          <ac:chgData name="Kazu ENDO" userId="394a0fe494bc10a7" providerId="LiveId" clId="{9B94F21E-C83F-4FE9-9F96-8B842C8D39FE}" dt="2025-10-10T15:09:34.213" v="3" actId="478"/>
-          <ac:spMkLst>
-            <pc:docMk/>
-            <pc:sldMk cId="4166541382" sldId="269"/>
-            <ac:spMk id="61" creationId="{59C604A2-6E34-05D0-C39B-9FAA37DDD98B}"/>
-          </ac:spMkLst>
-        </pc:spChg>
-        <pc:spChg chg="del mod">
-          <ac:chgData name="Kazu ENDO" userId="394a0fe494bc10a7" providerId="LiveId" clId="{9B94F21E-C83F-4FE9-9F96-8B842C8D39FE}" dt="2025-10-10T15:09:47.242" v="11" actId="478"/>
-          <ac:spMkLst>
-            <pc:docMk/>
-            <pc:sldMk cId="4166541382" sldId="269"/>
-            <ac:spMk id="62" creationId="{7ACD6991-8790-EC19-0B63-E295EBD7B666}"/>
-          </ac:spMkLst>
-        </pc:spChg>
-        <pc:spChg chg="del">
-          <ac:chgData name="Kazu ENDO" userId="394a0fe494bc10a7" providerId="LiveId" clId="{9B94F21E-C83F-4FE9-9F96-8B842C8D39FE}" dt="2025-10-10T15:09:34.213" v="3" actId="478"/>
-          <ac:spMkLst>
-            <pc:docMk/>
-            <pc:sldMk cId="4166541382" sldId="269"/>
-            <ac:spMk id="63" creationId="{A99CB0B2-5C84-279B-371A-51ADFDC8E4B1}"/>
-          </ac:spMkLst>
-        </pc:spChg>
-        <pc:spChg chg="add mod">
-          <ac:chgData name="Kazu ENDO" userId="394a0fe494bc10a7" providerId="LiveId" clId="{9B94F21E-C83F-4FE9-9F96-8B842C8D39FE}" dt="2025-10-10T15:17:15.006" v="388"/>
-          <ac:spMkLst>
-            <pc:docMk/>
-            <pc:sldMk cId="4166541382" sldId="269"/>
-            <ac:spMk id="64" creationId="{96BD008D-3E74-CFBF-D9F6-57164C18A91A}"/>
-          </ac:spMkLst>
-        </pc:spChg>
-        <pc:spChg chg="add mod">
-          <ac:chgData name="Kazu ENDO" userId="394a0fe494bc10a7" providerId="LiveId" clId="{9B94F21E-C83F-4FE9-9F96-8B842C8D39FE}" dt="2025-10-10T15:17:15.006" v="388"/>
-          <ac:spMkLst>
-            <pc:docMk/>
-            <pc:sldMk cId="4166541382" sldId="269"/>
-            <ac:spMk id="65" creationId="{DFD3DAB6-1EB8-C05F-4DDA-FE27DCD701ED}"/>
-          </ac:spMkLst>
-        </pc:spChg>
-        <pc:spChg chg="add mod">
-          <ac:chgData name="Kazu ENDO" userId="394a0fe494bc10a7" providerId="LiveId" clId="{9B94F21E-C83F-4FE9-9F96-8B842C8D39FE}" dt="2025-10-10T15:17:15.006" v="388"/>
-          <ac:spMkLst>
-            <pc:docMk/>
-            <pc:sldMk cId="4166541382" sldId="269"/>
-            <ac:spMk id="66" creationId="{8DCCBBE1-AD1C-17EF-9CD8-AF6D23AC7F74}"/>
-          </ac:spMkLst>
-        </pc:spChg>
-        <pc:spChg chg="add mod">
-          <ac:chgData name="Kazu ENDO" userId="394a0fe494bc10a7" providerId="LiveId" clId="{9B94F21E-C83F-4FE9-9F96-8B842C8D39FE}" dt="2025-10-10T15:17:15.006" v="388"/>
-          <ac:spMkLst>
-            <pc:docMk/>
-            <pc:sldMk cId="4166541382" sldId="269"/>
-            <ac:spMk id="67" creationId="{2E7F97D0-4481-9B4C-5202-14C9C355969E}"/>
-          </ac:spMkLst>
-        </pc:spChg>
-        <pc:spChg chg="add mod">
-          <ac:chgData name="Kazu ENDO" userId="394a0fe494bc10a7" providerId="LiveId" clId="{9B94F21E-C83F-4FE9-9F96-8B842C8D39FE}" dt="2025-10-10T15:17:15.006" v="388"/>
-          <ac:spMkLst>
-            <pc:docMk/>
-            <pc:sldMk cId="4166541382" sldId="269"/>
-            <ac:spMk id="68" creationId="{46858566-B2A9-6F6F-7A5E-10367027BC11}"/>
-          </ac:spMkLst>
-        </pc:spChg>
-        <pc:spChg chg="add mod">
-          <ac:chgData name="Kazu ENDO" userId="394a0fe494bc10a7" providerId="LiveId" clId="{9B94F21E-C83F-4FE9-9F96-8B842C8D39FE}" dt="2025-10-10T15:17:15.006" v="388"/>
-          <ac:spMkLst>
-            <pc:docMk/>
-            <pc:sldMk cId="4166541382" sldId="269"/>
-            <ac:spMk id="69" creationId="{FBFF8336-C616-A5B4-DAF2-94977B68F386}"/>
           </ac:spMkLst>
         </pc:spChg>
         <pc:spChg chg="add mod">
@@ -558,7 +478,7 @@
           </ac:spMkLst>
         </pc:spChg>
         <pc:spChg chg="add mod">
-          <ac:chgData name="Kazu ENDO" userId="394a0fe494bc10a7" providerId="LiveId" clId="{9B94F21E-C83F-4FE9-9F96-8B842C8D39FE}" dt="2025-10-10T15:19:49.675" v="467" actId="20577"/>
+          <ac:chgData name="Kazu ENDO" userId="394a0fe494bc10a7" providerId="LiveId" clId="{9B94F21E-C83F-4FE9-9F96-8B842C8D39FE}" dt="2025-10-19T08:07:45.849" v="469" actId="2711"/>
           <ac:spMkLst>
             <pc:docMk/>
             <pc:sldMk cId="4166541382" sldId="269"/>
@@ -689,7 +609,7 @@
           <a:p>
             <a:fld id="{66111EFB-F628-40F9-BEA8-8B741629A066}" type="datetimeFigureOut">
               <a:rPr kumimoji="1" lang="ja-JP" altLang="en-US" smtClean="0"/>
-              <a:t>2025/10/11</a:t>
+              <a:t>2025/10/19</a:t>
             </a:fld>
             <a:endParaRPr kumimoji="1" lang="ja-JP" altLang="en-US"/>
           </a:p>
@@ -882,7 +802,7 @@
           <a:p>
             <a:fld id="{471714D2-F2A7-4A29-BCB6-C0D2D9AA6AE5}" type="datetimeFigureOut">
               <a:rPr kumimoji="1" lang="ja-JP" altLang="en-US" smtClean="0"/>
-              <a:t>2025/10/11</a:t>
+              <a:t>2025/10/19</a:t>
             </a:fld>
             <a:endParaRPr kumimoji="1" lang="ja-JP" altLang="en-US"/>
           </a:p>
@@ -2943,10 +2863,16 @@
           <a:lstStyle/>
           <a:p>
             <a:r>
-              <a:rPr lang="ja-JP" altLang="en-US"/>
+              <a:rPr lang="ja-JP" altLang="en-US">
+                <a:latin typeface="BIZ UDPゴシック" panose="020B0400000000000000" pitchFamily="50" charset="-128"/>
+                <a:ea typeface="BIZ UDPゴシック" panose="020B0400000000000000" pitchFamily="50" charset="-128"/>
+              </a:rPr>
               <a:t>出所：</a:t>
             </a:r>
-            <a:endParaRPr lang="ja-JP" altLang="en-US" dirty="0"/>
+            <a:endParaRPr lang="ja-JP" altLang="en-US" dirty="0">
+              <a:latin typeface="BIZ UDPゴシック" panose="020B0400000000000000" pitchFamily="50" charset="-128"/>
+              <a:ea typeface="BIZ UDPゴシック" panose="020B0400000000000000" pitchFamily="50" charset="-128"/>
+            </a:endParaRPr>
           </a:p>
         </p:txBody>
       </p:sp>
@@ -2981,14 +2907,20 @@
               <a:buChar char="ü"/>
             </a:pPr>
             <a:fld id="{DCB5AA93-092B-49A1-87A7-3C88D5F38AD7}" type="slidenum">
-              <a:rPr lang="ja-JP" altLang="en-US" smtClean="0"/>
+              <a:rPr lang="ja-JP" altLang="en-US" smtClean="0">
+                <a:latin typeface="BIZ UDPゴシック" panose="020B0400000000000000" pitchFamily="50" charset="-128"/>
+                <a:ea typeface="BIZ UDPゴシック" panose="020B0400000000000000" pitchFamily="50" charset="-128"/>
+              </a:rPr>
               <a:pPr marL="171450" indent="-171450">
                 <a:buFont typeface="Wingdings" panose="05000000000000000000" pitchFamily="2" charset="2"/>
                 <a:buChar char="ü"/>
               </a:pPr>
               <a:t>1</a:t>
             </a:fld>
-            <a:endParaRPr lang="ja-JP" altLang="en-US"/>
+            <a:endParaRPr lang="ja-JP" altLang="en-US">
+              <a:latin typeface="BIZ UDPゴシック" panose="020B0400000000000000" pitchFamily="50" charset="-128"/>
+              <a:ea typeface="BIZ UDPゴシック" panose="020B0400000000000000" pitchFamily="50" charset="-128"/>
+            </a:endParaRPr>
           </a:p>
         </p:txBody>
       </p:sp>
@@ -3101,8 +3033,8 @@
                 <a:solidFill>
                   <a:schemeClr val="bg1"/>
                 </a:solidFill>
-                <a:latin typeface="メイリオ" panose="020B0604030504040204" pitchFamily="50" charset="-128"/>
-                <a:ea typeface="メイリオ" panose="020B0604030504040204" pitchFamily="50" charset="-128"/>
+                <a:latin typeface="BIZ UDPゴシック" panose="020B0400000000000000" pitchFamily="50" charset="-128"/>
+                <a:ea typeface="BIZ UDPゴシック" panose="020B0400000000000000" pitchFamily="50" charset="-128"/>
               </a:rPr>
               <a:t>計画の甘さ</a:t>
             </a:r>
@@ -3110,8 +3042,8 @@
               <a:solidFill>
                 <a:schemeClr val="bg1"/>
               </a:solidFill>
-              <a:latin typeface="メイリオ" panose="020B0604030504040204" pitchFamily="50" charset="-128"/>
-              <a:ea typeface="メイリオ" panose="020B0604030504040204" pitchFamily="50" charset="-128"/>
+              <a:latin typeface="BIZ UDPゴシック" panose="020B0400000000000000" pitchFamily="50" charset="-128"/>
+              <a:ea typeface="BIZ UDPゴシック" panose="020B0400000000000000" pitchFamily="50" charset="-128"/>
             </a:endParaRPr>
           </a:p>
         </p:txBody>
@@ -3175,8 +3107,8 @@
                     <a:lumOff val="25000"/>
                   </a:schemeClr>
                 </a:solidFill>
-                <a:latin typeface="メイリオ" panose="020B0604030504040204" pitchFamily="50" charset="-128"/>
-                <a:ea typeface="メイリオ" panose="020B0604030504040204" pitchFamily="50" charset="-128"/>
+                <a:latin typeface="BIZ UDPゴシック" panose="020B0400000000000000" pitchFamily="50" charset="-128"/>
+                <a:ea typeface="BIZ UDPゴシック" panose="020B0400000000000000" pitchFamily="50" charset="-128"/>
               </a:rPr>
               <a:t>予算</a:t>
             </a:r>
@@ -3187,8 +3119,8 @@
                   <a:lumOff val="25000"/>
                 </a:schemeClr>
               </a:solidFill>
-              <a:latin typeface="メイリオ" panose="020B0604030504040204" pitchFamily="50" charset="-128"/>
-              <a:ea typeface="メイリオ" panose="020B0604030504040204" pitchFamily="50" charset="-128"/>
+              <a:latin typeface="BIZ UDPゴシック" panose="020B0400000000000000" pitchFamily="50" charset="-128"/>
+              <a:ea typeface="BIZ UDPゴシック" panose="020B0400000000000000" pitchFamily="50" charset="-128"/>
             </a:endParaRPr>
           </a:p>
         </p:txBody>
@@ -3252,8 +3184,8 @@
                     <a:lumOff val="25000"/>
                   </a:schemeClr>
                 </a:solidFill>
-                <a:latin typeface="メイリオ" panose="020B0604030504040204" pitchFamily="50" charset="-128"/>
-                <a:ea typeface="メイリオ" panose="020B0604030504040204" pitchFamily="50" charset="-128"/>
+                <a:latin typeface="BIZ UDPゴシック" panose="020B0400000000000000" pitchFamily="50" charset="-128"/>
+                <a:ea typeface="BIZ UDPゴシック" panose="020B0400000000000000" pitchFamily="50" charset="-128"/>
               </a:rPr>
               <a:t>スケジュール</a:t>
             </a:r>
@@ -3275,7 +3207,7 @@
         <p:spPr>
           <a:xfrm>
             <a:off x="3107633" y="1757162"/>
-            <a:ext cx="4567851" cy="861774"/>
+            <a:ext cx="4567851" cy="646331"/>
           </a:xfrm>
           <a:prstGeom prst="rect">
             <a:avLst/>
@@ -3294,28 +3226,28 @@
             </a:pPr>
             <a:r>
               <a:rPr kumimoji="1" lang="ja-JP" altLang="en-US" sz="1400" dirty="0">
-                <a:latin typeface="メイリオ" panose="020B0604030504040204" pitchFamily="50" charset="-128"/>
-                <a:ea typeface="メイリオ" panose="020B0604030504040204" pitchFamily="50" charset="-128"/>
+                <a:latin typeface="BIZ UDPゴシック" panose="020B0400000000000000" pitchFamily="50" charset="-128"/>
+                <a:ea typeface="BIZ UDPゴシック" panose="020B0400000000000000" pitchFamily="50" charset="-128"/>
               </a:rPr>
               <a:t>初期見積もりが荒い </a:t>
             </a:r>
             <a:r>
               <a:rPr kumimoji="1" lang="en-US" altLang="ja-JP" sz="1400" dirty="0">
-                <a:latin typeface="メイリオ" panose="020B0604030504040204" pitchFamily="50" charset="-128"/>
-                <a:ea typeface="メイリオ" panose="020B0604030504040204" pitchFamily="50" charset="-128"/>
+                <a:latin typeface="BIZ UDPゴシック" panose="020B0400000000000000" pitchFamily="50" charset="-128"/>
+                <a:ea typeface="BIZ UDPゴシック" panose="020B0400000000000000" pitchFamily="50" charset="-128"/>
               </a:rPr>
               <a:t>(</a:t>
             </a:r>
             <a:r>
               <a:rPr kumimoji="1" lang="ja-JP" altLang="en-US" sz="1400" dirty="0">
-                <a:latin typeface="メイリオ" panose="020B0604030504040204" pitchFamily="50" charset="-128"/>
-                <a:ea typeface="メイリオ" panose="020B0604030504040204" pitchFamily="50" charset="-128"/>
+                <a:latin typeface="BIZ UDPゴシック" panose="020B0400000000000000" pitchFamily="50" charset="-128"/>
+                <a:ea typeface="BIZ UDPゴシック" panose="020B0400000000000000" pitchFamily="50" charset="-128"/>
               </a:rPr>
               <a:t>概算だけでスタートしている</a:t>
             </a:r>
             <a:endParaRPr kumimoji="1" lang="en-US" altLang="ja-JP" sz="1400" dirty="0">
-              <a:latin typeface="メイリオ" panose="020B0604030504040204" pitchFamily="50" charset="-128"/>
-              <a:ea typeface="メイリオ" panose="020B0604030504040204" pitchFamily="50" charset="-128"/>
+              <a:latin typeface="BIZ UDPゴシック" panose="020B0400000000000000" pitchFamily="50" charset="-128"/>
+              <a:ea typeface="BIZ UDPゴシック" panose="020B0400000000000000" pitchFamily="50" charset="-128"/>
             </a:endParaRPr>
           </a:p>
           <a:p>
@@ -3325,14 +3257,14 @@
             </a:pPr>
             <a:r>
               <a:rPr lang="ja-JP" altLang="en-US" sz="1400" dirty="0">
-                <a:latin typeface="メイリオ" panose="020B0604030504040204" pitchFamily="50" charset="-128"/>
-                <a:ea typeface="メイリオ" panose="020B0604030504040204" pitchFamily="50" charset="-128"/>
+                <a:latin typeface="BIZ UDPゴシック" panose="020B0400000000000000" pitchFamily="50" charset="-128"/>
+                <a:ea typeface="BIZ UDPゴシック" panose="020B0400000000000000" pitchFamily="50" charset="-128"/>
               </a:rPr>
               <a:t>承認者との金額感認識がズレている</a:t>
             </a:r>
             <a:endParaRPr lang="en-US" altLang="ja-JP" sz="1400" dirty="0">
-              <a:latin typeface="メイリオ" panose="020B0604030504040204" pitchFamily="50" charset="-128"/>
-              <a:ea typeface="メイリオ" panose="020B0604030504040204" pitchFamily="50" charset="-128"/>
+              <a:latin typeface="BIZ UDPゴシック" panose="020B0400000000000000" pitchFamily="50" charset="-128"/>
+              <a:ea typeface="BIZ UDPゴシック" panose="020B0400000000000000" pitchFamily="50" charset="-128"/>
             </a:endParaRPr>
           </a:p>
           <a:p>
@@ -3342,42 +3274,42 @@
             </a:pPr>
             <a:r>
               <a:rPr lang="ja-JP" altLang="en-US" sz="1400" dirty="0">
-                <a:latin typeface="メイリオ" panose="020B0604030504040204" pitchFamily="50" charset="-128"/>
-                <a:ea typeface="メイリオ" panose="020B0604030504040204" pitchFamily="50" charset="-128"/>
+                <a:latin typeface="BIZ UDPゴシック" panose="020B0400000000000000" pitchFamily="50" charset="-128"/>
+                <a:ea typeface="BIZ UDPゴシック" panose="020B0400000000000000" pitchFamily="50" charset="-128"/>
               </a:rPr>
               <a:t>外部コスト </a:t>
             </a:r>
             <a:r>
               <a:rPr lang="en-US" altLang="ja-JP" sz="1400" dirty="0">
-                <a:latin typeface="メイリオ" panose="020B0604030504040204" pitchFamily="50" charset="-128"/>
-                <a:ea typeface="メイリオ" panose="020B0604030504040204" pitchFamily="50" charset="-128"/>
+                <a:latin typeface="BIZ UDPゴシック" panose="020B0400000000000000" pitchFamily="50" charset="-128"/>
+                <a:ea typeface="BIZ UDPゴシック" panose="020B0400000000000000" pitchFamily="50" charset="-128"/>
               </a:rPr>
               <a:t>(</a:t>
             </a:r>
             <a:r>
               <a:rPr lang="ja-JP" altLang="en-US" sz="1400" dirty="0">
-                <a:latin typeface="メイリオ" panose="020B0604030504040204" pitchFamily="50" charset="-128"/>
-                <a:ea typeface="メイリオ" panose="020B0604030504040204" pitchFamily="50" charset="-128"/>
+                <a:latin typeface="BIZ UDPゴシック" panose="020B0400000000000000" pitchFamily="50" charset="-128"/>
+                <a:ea typeface="BIZ UDPゴシック" panose="020B0400000000000000" pitchFamily="50" charset="-128"/>
               </a:rPr>
               <a:t>外注費・印刷費</a:t>
             </a:r>
             <a:r>
               <a:rPr lang="en-US" altLang="ja-JP" sz="1400" dirty="0">
-                <a:latin typeface="メイリオ" panose="020B0604030504040204" pitchFamily="50" charset="-128"/>
-                <a:ea typeface="メイリオ" panose="020B0604030504040204" pitchFamily="50" charset="-128"/>
+                <a:latin typeface="BIZ UDPゴシック" panose="020B0400000000000000" pitchFamily="50" charset="-128"/>
+                <a:ea typeface="BIZ UDPゴシック" panose="020B0400000000000000" pitchFamily="50" charset="-128"/>
               </a:rPr>
               <a:t>)</a:t>
             </a:r>
             <a:r>
               <a:rPr lang="ja-JP" altLang="en-US" sz="1400" dirty="0">
-                <a:latin typeface="メイリオ" panose="020B0604030504040204" pitchFamily="50" charset="-128"/>
-                <a:ea typeface="メイリオ" panose="020B0604030504040204" pitchFamily="50" charset="-128"/>
+                <a:latin typeface="BIZ UDPゴシック" panose="020B0400000000000000" pitchFamily="50" charset="-128"/>
+                <a:ea typeface="BIZ UDPゴシック" panose="020B0400000000000000" pitchFamily="50" charset="-128"/>
               </a:rPr>
               <a:t>の変動を考慮していない</a:t>
             </a:r>
             <a:endParaRPr kumimoji="1" lang="ja-JP" altLang="en-US" sz="1400" dirty="0">
-              <a:latin typeface="メイリオ" panose="020B0604030504040204" pitchFamily="50" charset="-128"/>
-              <a:ea typeface="メイリオ" panose="020B0604030504040204" pitchFamily="50" charset="-128"/>
+              <a:latin typeface="BIZ UDPゴシック" panose="020B0400000000000000" pitchFamily="50" charset="-128"/>
+              <a:ea typeface="BIZ UDPゴシック" panose="020B0400000000000000" pitchFamily="50" charset="-128"/>
             </a:endParaRPr>
           </a:p>
         </p:txBody>
@@ -3416,14 +3348,14 @@
             </a:pPr>
             <a:r>
               <a:rPr kumimoji="1" lang="ja-JP" altLang="en-US" sz="1400" dirty="0">
-                <a:latin typeface="メイリオ" panose="020B0604030504040204" pitchFamily="50" charset="-128"/>
-                <a:ea typeface="メイリオ" panose="020B0604030504040204" pitchFamily="50" charset="-128"/>
+                <a:latin typeface="BIZ UDPゴシック" panose="020B0400000000000000" pitchFamily="50" charset="-128"/>
+                <a:ea typeface="BIZ UDPゴシック" panose="020B0400000000000000" pitchFamily="50" charset="-128"/>
               </a:rPr>
               <a:t>ガントがそもそも作成されていない</a:t>
             </a:r>
             <a:endParaRPr kumimoji="1" lang="en-US" altLang="ja-JP" sz="1400" dirty="0">
-              <a:latin typeface="メイリオ" panose="020B0604030504040204" pitchFamily="50" charset="-128"/>
-              <a:ea typeface="メイリオ" panose="020B0604030504040204" pitchFamily="50" charset="-128"/>
+              <a:latin typeface="BIZ UDPゴシック" panose="020B0400000000000000" pitchFamily="50" charset="-128"/>
+              <a:ea typeface="BIZ UDPゴシック" panose="020B0400000000000000" pitchFamily="50" charset="-128"/>
             </a:endParaRPr>
           </a:p>
           <a:p>
@@ -3433,56 +3365,56 @@
             </a:pPr>
             <a:r>
               <a:rPr lang="ja-JP" altLang="en-US" sz="1400" dirty="0">
-                <a:latin typeface="メイリオ" panose="020B0604030504040204" pitchFamily="50" charset="-128"/>
-                <a:ea typeface="メイリオ" panose="020B0604030504040204" pitchFamily="50" charset="-128"/>
+                <a:latin typeface="BIZ UDPゴシック" panose="020B0400000000000000" pitchFamily="50" charset="-128"/>
+                <a:ea typeface="BIZ UDPゴシック" panose="020B0400000000000000" pitchFamily="50" charset="-128"/>
               </a:rPr>
               <a:t>依存関係</a:t>
             </a:r>
             <a:r>
               <a:rPr lang="en-US" altLang="ja-JP" sz="1400" dirty="0">
-                <a:latin typeface="メイリオ" panose="020B0604030504040204" pitchFamily="50" charset="-128"/>
-                <a:ea typeface="メイリオ" panose="020B0604030504040204" pitchFamily="50" charset="-128"/>
+                <a:latin typeface="BIZ UDPゴシック" panose="020B0400000000000000" pitchFamily="50" charset="-128"/>
+                <a:ea typeface="BIZ UDPゴシック" panose="020B0400000000000000" pitchFamily="50" charset="-128"/>
               </a:rPr>
               <a:t>(</a:t>
             </a:r>
             <a:r>
               <a:rPr lang="ja-JP" altLang="en-US" sz="1400" dirty="0">
-                <a:latin typeface="メイリオ" panose="020B0604030504040204" pitchFamily="50" charset="-128"/>
-                <a:ea typeface="メイリオ" panose="020B0604030504040204" pitchFamily="50" charset="-128"/>
+                <a:latin typeface="BIZ UDPゴシック" panose="020B0400000000000000" pitchFamily="50" charset="-128"/>
+                <a:ea typeface="BIZ UDPゴシック" panose="020B0400000000000000" pitchFamily="50" charset="-128"/>
               </a:rPr>
               <a:t>前工程</a:t>
             </a:r>
             <a:r>
               <a:rPr lang="en-US" altLang="ja-JP" sz="1400" dirty="0">
-                <a:latin typeface="メイリオ" panose="020B0604030504040204" pitchFamily="50" charset="-128"/>
-                <a:ea typeface="メイリオ" panose="020B0604030504040204" pitchFamily="50" charset="-128"/>
+                <a:latin typeface="BIZ UDPゴシック" panose="020B0400000000000000" pitchFamily="50" charset="-128"/>
+                <a:ea typeface="BIZ UDPゴシック" panose="020B0400000000000000" pitchFamily="50" charset="-128"/>
               </a:rPr>
               <a:t>/</a:t>
             </a:r>
             <a:r>
               <a:rPr lang="ja-JP" altLang="en-US" sz="1400" dirty="0">
-                <a:latin typeface="メイリオ" panose="020B0604030504040204" pitchFamily="50" charset="-128"/>
-                <a:ea typeface="メイリオ" panose="020B0604030504040204" pitchFamily="50" charset="-128"/>
+                <a:latin typeface="BIZ UDPゴシック" panose="020B0400000000000000" pitchFamily="50" charset="-128"/>
+                <a:ea typeface="BIZ UDPゴシック" panose="020B0400000000000000" pitchFamily="50" charset="-128"/>
               </a:rPr>
               <a:t>後工程</a:t>
             </a:r>
             <a:r>
               <a:rPr lang="en-US" altLang="ja-JP" sz="1400" dirty="0">
-                <a:latin typeface="メイリオ" panose="020B0604030504040204" pitchFamily="50" charset="-128"/>
-                <a:ea typeface="メイリオ" panose="020B0604030504040204" pitchFamily="50" charset="-128"/>
+                <a:latin typeface="BIZ UDPゴシック" panose="020B0400000000000000" pitchFamily="50" charset="-128"/>
+                <a:ea typeface="BIZ UDPゴシック" panose="020B0400000000000000" pitchFamily="50" charset="-128"/>
               </a:rPr>
               <a:t>)</a:t>
             </a:r>
             <a:r>
               <a:rPr lang="ja-JP" altLang="en-US" sz="1400" dirty="0">
-                <a:latin typeface="メイリオ" panose="020B0604030504040204" pitchFamily="50" charset="-128"/>
-                <a:ea typeface="メイリオ" panose="020B0604030504040204" pitchFamily="50" charset="-128"/>
+                <a:latin typeface="BIZ UDPゴシック" panose="020B0400000000000000" pitchFamily="50" charset="-128"/>
+                <a:ea typeface="BIZ UDPゴシック" panose="020B0400000000000000" pitchFamily="50" charset="-128"/>
               </a:rPr>
               <a:t>が整理されていない</a:t>
             </a:r>
             <a:endParaRPr lang="en-US" altLang="ja-JP" sz="1400" dirty="0">
-              <a:latin typeface="メイリオ" panose="020B0604030504040204" pitchFamily="50" charset="-128"/>
-              <a:ea typeface="メイリオ" panose="020B0604030504040204" pitchFamily="50" charset="-128"/>
+              <a:latin typeface="BIZ UDPゴシック" panose="020B0400000000000000" pitchFamily="50" charset="-128"/>
+              <a:ea typeface="BIZ UDPゴシック" panose="020B0400000000000000" pitchFamily="50" charset="-128"/>
             </a:endParaRPr>
           </a:p>
           <a:p>
@@ -3492,8 +3424,8 @@
             </a:pPr>
             <a:r>
               <a:rPr kumimoji="1" lang="ja-JP" altLang="en-US" sz="1400" dirty="0">
-                <a:latin typeface="メイリオ" panose="020B0604030504040204" pitchFamily="50" charset="-128"/>
-                <a:ea typeface="メイリオ" panose="020B0604030504040204" pitchFamily="50" charset="-128"/>
+                <a:latin typeface="BIZ UDPゴシック" panose="020B0400000000000000" pitchFamily="50" charset="-128"/>
+                <a:ea typeface="BIZ UDPゴシック" panose="020B0400000000000000" pitchFamily="50" charset="-128"/>
               </a:rPr>
               <a:t>クリティカルパスが不明</a:t>
             </a:r>
@@ -3609,8 +3541,8 @@
                 <a:solidFill>
                   <a:schemeClr val="bg1"/>
                 </a:solidFill>
-                <a:latin typeface="メイリオ" panose="020B0604030504040204" pitchFamily="50" charset="-128"/>
-                <a:ea typeface="メイリオ" panose="020B0604030504040204" pitchFamily="50" charset="-128"/>
+                <a:latin typeface="BIZ UDPゴシック" panose="020B0400000000000000" pitchFamily="50" charset="-128"/>
+                <a:ea typeface="BIZ UDPゴシック" panose="020B0400000000000000" pitchFamily="50" charset="-128"/>
               </a:rPr>
               <a:t>進行管理の</a:t>
             </a:r>
@@ -3618,8 +3550,8 @@
               <a:solidFill>
                 <a:schemeClr val="bg1"/>
               </a:solidFill>
-              <a:latin typeface="メイリオ" panose="020B0604030504040204" pitchFamily="50" charset="-128"/>
-              <a:ea typeface="メイリオ" panose="020B0604030504040204" pitchFamily="50" charset="-128"/>
+              <a:latin typeface="BIZ UDPゴシック" panose="020B0400000000000000" pitchFamily="50" charset="-128"/>
+              <a:ea typeface="BIZ UDPゴシック" panose="020B0400000000000000" pitchFamily="50" charset="-128"/>
             </a:endParaRPr>
           </a:p>
           <a:p>
@@ -3629,8 +3561,8 @@
                 <a:solidFill>
                   <a:schemeClr val="bg1"/>
                 </a:solidFill>
-                <a:latin typeface="メイリオ" panose="020B0604030504040204" pitchFamily="50" charset="-128"/>
-                <a:ea typeface="メイリオ" panose="020B0604030504040204" pitchFamily="50" charset="-128"/>
+                <a:latin typeface="BIZ UDPゴシック" panose="020B0400000000000000" pitchFamily="50" charset="-128"/>
+                <a:ea typeface="BIZ UDPゴシック" panose="020B0400000000000000" pitchFamily="50" charset="-128"/>
               </a:rPr>
               <a:t>不備</a:t>
             </a:r>
@@ -3638,8 +3570,8 @@
               <a:solidFill>
                 <a:schemeClr val="bg1"/>
               </a:solidFill>
-              <a:latin typeface="メイリオ" panose="020B0604030504040204" pitchFamily="50" charset="-128"/>
-              <a:ea typeface="メイリオ" panose="020B0604030504040204" pitchFamily="50" charset="-128"/>
+              <a:latin typeface="BIZ UDPゴシック" panose="020B0400000000000000" pitchFamily="50" charset="-128"/>
+              <a:ea typeface="BIZ UDPゴシック" panose="020B0400000000000000" pitchFamily="50" charset="-128"/>
             </a:endParaRPr>
           </a:p>
         </p:txBody>
@@ -3703,8 +3635,8 @@
                     <a:lumOff val="25000"/>
                   </a:schemeClr>
                 </a:solidFill>
-                <a:latin typeface="メイリオ" panose="020B0604030504040204" pitchFamily="50" charset="-128"/>
-                <a:ea typeface="メイリオ" panose="020B0604030504040204" pitchFamily="50" charset="-128"/>
+                <a:latin typeface="BIZ UDPゴシック" panose="020B0400000000000000" pitchFamily="50" charset="-128"/>
+                <a:ea typeface="BIZ UDPゴシック" panose="020B0400000000000000" pitchFamily="50" charset="-128"/>
               </a:rPr>
               <a:t>複数人の進行</a:t>
             </a:r>
@@ -3715,8 +3647,8 @@
                   <a:lumOff val="25000"/>
                 </a:schemeClr>
               </a:solidFill>
-              <a:latin typeface="メイリオ" panose="020B0604030504040204" pitchFamily="50" charset="-128"/>
-              <a:ea typeface="メイリオ" panose="020B0604030504040204" pitchFamily="50" charset="-128"/>
+              <a:latin typeface="BIZ UDPゴシック" panose="020B0400000000000000" pitchFamily="50" charset="-128"/>
+              <a:ea typeface="BIZ UDPゴシック" panose="020B0400000000000000" pitchFamily="50" charset="-128"/>
             </a:endParaRPr>
           </a:p>
         </p:txBody>
@@ -3780,8 +3712,8 @@
                     <a:lumOff val="25000"/>
                   </a:schemeClr>
                 </a:solidFill>
-                <a:latin typeface="メイリオ" panose="020B0604030504040204" pitchFamily="50" charset="-128"/>
-                <a:ea typeface="メイリオ" panose="020B0604030504040204" pitchFamily="50" charset="-128"/>
+                <a:latin typeface="BIZ UDPゴシック" panose="020B0400000000000000" pitchFamily="50" charset="-128"/>
+                <a:ea typeface="BIZ UDPゴシック" panose="020B0400000000000000" pitchFamily="50" charset="-128"/>
               </a:rPr>
               <a:t>上司との未共有</a:t>
             </a:r>
@@ -3792,8 +3724,8 @@
                   <a:lumOff val="25000"/>
                 </a:schemeClr>
               </a:solidFill>
-              <a:latin typeface="メイリオ" panose="020B0604030504040204" pitchFamily="50" charset="-128"/>
-              <a:ea typeface="メイリオ" panose="020B0604030504040204" pitchFamily="50" charset="-128"/>
+              <a:latin typeface="BIZ UDPゴシック" panose="020B0400000000000000" pitchFamily="50" charset="-128"/>
+              <a:ea typeface="BIZ UDPゴシック" panose="020B0400000000000000" pitchFamily="50" charset="-128"/>
             </a:endParaRPr>
           </a:p>
         </p:txBody>
@@ -3857,8 +3789,8 @@
                     <a:lumOff val="25000"/>
                   </a:schemeClr>
                 </a:solidFill>
-                <a:latin typeface="メイリオ" panose="020B0604030504040204" pitchFamily="50" charset="-128"/>
-                <a:ea typeface="メイリオ" panose="020B0604030504040204" pitchFamily="50" charset="-128"/>
+                <a:latin typeface="BIZ UDPゴシック" panose="020B0400000000000000" pitchFamily="50" charset="-128"/>
+                <a:ea typeface="BIZ UDPゴシック" panose="020B0400000000000000" pitchFamily="50" charset="-128"/>
               </a:rPr>
               <a:t>時間余裕不足</a:t>
             </a:r>
@@ -3869,8 +3801,8 @@
                   <a:lumOff val="25000"/>
                 </a:schemeClr>
               </a:solidFill>
-              <a:latin typeface="メイリオ" panose="020B0604030504040204" pitchFamily="50" charset="-128"/>
-              <a:ea typeface="メイリオ" panose="020B0604030504040204" pitchFamily="50" charset="-128"/>
+              <a:latin typeface="BIZ UDPゴシック" panose="020B0400000000000000" pitchFamily="50" charset="-128"/>
+              <a:ea typeface="BIZ UDPゴシック" panose="020B0400000000000000" pitchFamily="50" charset="-128"/>
             </a:endParaRPr>
           </a:p>
         </p:txBody>
@@ -3909,14 +3841,14 @@
             </a:pPr>
             <a:r>
               <a:rPr kumimoji="1" lang="ja-JP" altLang="en-US" sz="1400" dirty="0">
-                <a:latin typeface="メイリオ" panose="020B0604030504040204" pitchFamily="50" charset="-128"/>
-                <a:ea typeface="メイリオ" panose="020B0604030504040204" pitchFamily="50" charset="-128"/>
+                <a:latin typeface="BIZ UDPゴシック" panose="020B0400000000000000" pitchFamily="50" charset="-128"/>
+                <a:ea typeface="BIZ UDPゴシック" panose="020B0400000000000000" pitchFamily="50" charset="-128"/>
               </a:rPr>
               <a:t>品質基準が人によって違う</a:t>
             </a:r>
             <a:endParaRPr kumimoji="1" lang="en-US" altLang="ja-JP" sz="1400" dirty="0">
-              <a:latin typeface="メイリオ" panose="020B0604030504040204" pitchFamily="50" charset="-128"/>
-              <a:ea typeface="メイリオ" panose="020B0604030504040204" pitchFamily="50" charset="-128"/>
+              <a:latin typeface="BIZ UDPゴシック" panose="020B0400000000000000" pitchFamily="50" charset="-128"/>
+              <a:ea typeface="BIZ UDPゴシック" panose="020B0400000000000000" pitchFamily="50" charset="-128"/>
             </a:endParaRPr>
           </a:p>
           <a:p>
@@ -3926,14 +3858,14 @@
             </a:pPr>
             <a:r>
               <a:rPr lang="ja-JP" altLang="en-US" sz="1400" dirty="0">
-                <a:latin typeface="メイリオ" panose="020B0604030504040204" pitchFamily="50" charset="-128"/>
-                <a:ea typeface="メイリオ" panose="020B0604030504040204" pitchFamily="50" charset="-128"/>
+                <a:latin typeface="BIZ UDPゴシック" panose="020B0400000000000000" pitchFamily="50" charset="-128"/>
+                <a:ea typeface="BIZ UDPゴシック" panose="020B0400000000000000" pitchFamily="50" charset="-128"/>
               </a:rPr>
               <a:t>作業分担があいまい</a:t>
             </a:r>
             <a:endParaRPr lang="en-US" altLang="ja-JP" sz="1400" dirty="0">
-              <a:latin typeface="メイリオ" panose="020B0604030504040204" pitchFamily="50" charset="-128"/>
-              <a:ea typeface="メイリオ" panose="020B0604030504040204" pitchFamily="50" charset="-128"/>
+              <a:latin typeface="BIZ UDPゴシック" panose="020B0400000000000000" pitchFamily="50" charset="-128"/>
+              <a:ea typeface="BIZ UDPゴシック" panose="020B0400000000000000" pitchFamily="50" charset="-128"/>
             </a:endParaRPr>
           </a:p>
           <a:p>
@@ -3943,8 +3875,8 @@
             </a:pPr>
             <a:r>
               <a:rPr kumimoji="1" lang="ja-JP" altLang="en-US" sz="1400" dirty="0">
-                <a:latin typeface="メイリオ" panose="020B0604030504040204" pitchFamily="50" charset="-128"/>
-                <a:ea typeface="メイリオ" panose="020B0604030504040204" pitchFamily="50" charset="-128"/>
+                <a:latin typeface="BIZ UDPゴシック" panose="020B0400000000000000" pitchFamily="50" charset="-128"/>
+                <a:ea typeface="BIZ UDPゴシック" panose="020B0400000000000000" pitchFamily="50" charset="-128"/>
               </a:rPr>
               <a:t>他メンバーの進捗が見えない</a:t>
             </a:r>
@@ -3985,14 +3917,14 @@
             </a:pPr>
             <a:r>
               <a:rPr kumimoji="1" lang="ja-JP" altLang="en-US" sz="1400" dirty="0">
-                <a:latin typeface="メイリオ" panose="020B0604030504040204" pitchFamily="50" charset="-128"/>
-                <a:ea typeface="メイリオ" panose="020B0604030504040204" pitchFamily="50" charset="-128"/>
+                <a:latin typeface="BIZ UDPゴシック" panose="020B0400000000000000" pitchFamily="50" charset="-128"/>
+                <a:ea typeface="BIZ UDPゴシック" panose="020B0400000000000000" pitchFamily="50" charset="-128"/>
               </a:rPr>
               <a:t>上司が多忙すぎて進捗報告の場がない</a:t>
             </a:r>
             <a:endParaRPr kumimoji="1" lang="en-US" altLang="ja-JP" sz="1400" dirty="0">
-              <a:latin typeface="メイリオ" panose="020B0604030504040204" pitchFamily="50" charset="-128"/>
-              <a:ea typeface="メイリオ" panose="020B0604030504040204" pitchFamily="50" charset="-128"/>
+              <a:latin typeface="BIZ UDPゴシック" panose="020B0400000000000000" pitchFamily="50" charset="-128"/>
+              <a:ea typeface="BIZ UDPゴシック" panose="020B0400000000000000" pitchFamily="50" charset="-128"/>
             </a:endParaRPr>
           </a:p>
           <a:p>
@@ -4002,14 +3934,14 @@
             </a:pPr>
             <a:r>
               <a:rPr lang="ja-JP" altLang="en-US" sz="1400" dirty="0">
-                <a:latin typeface="メイリオ" panose="020B0604030504040204" pitchFamily="50" charset="-128"/>
-                <a:ea typeface="メイリオ" panose="020B0604030504040204" pitchFamily="50" charset="-128"/>
+                <a:latin typeface="BIZ UDPゴシック" panose="020B0400000000000000" pitchFamily="50" charset="-128"/>
+                <a:ea typeface="BIZ UDPゴシック" panose="020B0400000000000000" pitchFamily="50" charset="-128"/>
               </a:rPr>
               <a:t>方針変更が突然発生</a:t>
             </a:r>
             <a:endParaRPr lang="en-US" altLang="ja-JP" sz="1400" dirty="0">
-              <a:latin typeface="メイリオ" panose="020B0604030504040204" pitchFamily="50" charset="-128"/>
-              <a:ea typeface="メイリオ" panose="020B0604030504040204" pitchFamily="50" charset="-128"/>
+              <a:latin typeface="BIZ UDPゴシック" panose="020B0400000000000000" pitchFamily="50" charset="-128"/>
+              <a:ea typeface="BIZ UDPゴシック" panose="020B0400000000000000" pitchFamily="50" charset="-128"/>
             </a:endParaRPr>
           </a:p>
           <a:p>
@@ -4019,8 +3951,8 @@
             </a:pPr>
             <a:r>
               <a:rPr kumimoji="1" lang="ja-JP" altLang="en-US" sz="1400" dirty="0">
-                <a:latin typeface="メイリオ" panose="020B0604030504040204" pitchFamily="50" charset="-128"/>
-                <a:ea typeface="メイリオ" panose="020B0604030504040204" pitchFamily="50" charset="-128"/>
+                <a:latin typeface="BIZ UDPゴシック" panose="020B0400000000000000" pitchFamily="50" charset="-128"/>
+                <a:ea typeface="BIZ UDPゴシック" panose="020B0400000000000000" pitchFamily="50" charset="-128"/>
               </a:rPr>
               <a:t>判断が必要なポイントが共有されていない</a:t>
             </a:r>
@@ -4061,14 +3993,14 @@
             </a:pPr>
             <a:r>
               <a:rPr lang="ja-JP" altLang="en-US" sz="1400" dirty="0">
-                <a:latin typeface="メイリオ" panose="020B0604030504040204" pitchFamily="50" charset="-128"/>
-                <a:ea typeface="メイリオ" panose="020B0604030504040204" pitchFamily="50" charset="-128"/>
+                <a:latin typeface="BIZ UDPゴシック" panose="020B0400000000000000" pitchFamily="50" charset="-128"/>
+                <a:ea typeface="BIZ UDPゴシック" panose="020B0400000000000000" pitchFamily="50" charset="-128"/>
               </a:rPr>
               <a:t>スケジュールが納期から逆算されていない</a:t>
             </a:r>
             <a:endParaRPr lang="en-US" altLang="ja-JP" sz="1400" dirty="0">
-              <a:latin typeface="メイリオ" panose="020B0604030504040204" pitchFamily="50" charset="-128"/>
-              <a:ea typeface="メイリオ" panose="020B0604030504040204" pitchFamily="50" charset="-128"/>
+              <a:latin typeface="BIZ UDPゴシック" panose="020B0400000000000000" pitchFamily="50" charset="-128"/>
+              <a:ea typeface="BIZ UDPゴシック" panose="020B0400000000000000" pitchFamily="50" charset="-128"/>
             </a:endParaRPr>
           </a:p>
           <a:p>
@@ -4078,14 +4010,14 @@
             </a:pPr>
             <a:r>
               <a:rPr kumimoji="1" lang="ja-JP" altLang="en-US" sz="1400" dirty="0">
-                <a:latin typeface="メイリオ" panose="020B0604030504040204" pitchFamily="50" charset="-128"/>
-                <a:ea typeface="メイリオ" panose="020B0604030504040204" pitchFamily="50" charset="-128"/>
+                <a:latin typeface="BIZ UDPゴシック" panose="020B0400000000000000" pitchFamily="50" charset="-128"/>
+                <a:ea typeface="BIZ UDPゴシック" panose="020B0400000000000000" pitchFamily="50" charset="-128"/>
               </a:rPr>
               <a:t>想定外タスクが入る余地がない</a:t>
             </a:r>
             <a:endParaRPr kumimoji="1" lang="en-US" altLang="ja-JP" sz="1400" dirty="0">
-              <a:latin typeface="メイリオ" panose="020B0604030504040204" pitchFamily="50" charset="-128"/>
-              <a:ea typeface="メイリオ" panose="020B0604030504040204" pitchFamily="50" charset="-128"/>
+              <a:latin typeface="BIZ UDPゴシック" panose="020B0400000000000000" pitchFamily="50" charset="-128"/>
+              <a:ea typeface="BIZ UDPゴシック" panose="020B0400000000000000" pitchFamily="50" charset="-128"/>
             </a:endParaRPr>
           </a:p>
           <a:p>
@@ -4095,14 +4027,14 @@
             </a:pPr>
             <a:r>
               <a:rPr lang="ja-JP" altLang="en-US" sz="1400" dirty="0">
-                <a:latin typeface="メイリオ" panose="020B0604030504040204" pitchFamily="50" charset="-128"/>
-                <a:ea typeface="メイリオ" panose="020B0604030504040204" pitchFamily="50" charset="-128"/>
+                <a:latin typeface="BIZ UDPゴシック" panose="020B0400000000000000" pitchFamily="50" charset="-128"/>
+                <a:ea typeface="BIZ UDPゴシック" panose="020B0400000000000000" pitchFamily="50" charset="-128"/>
               </a:rPr>
               <a:t>レビューや修正の時間が計画されていない</a:t>
             </a:r>
             <a:endParaRPr kumimoji="1" lang="ja-JP" altLang="en-US" sz="1400" dirty="0">
-              <a:latin typeface="メイリオ" panose="020B0604030504040204" pitchFamily="50" charset="-128"/>
-              <a:ea typeface="メイリオ" panose="020B0604030504040204" pitchFamily="50" charset="-128"/>
+              <a:latin typeface="BIZ UDPゴシック" panose="020B0400000000000000" pitchFamily="50" charset="-128"/>
+              <a:ea typeface="BIZ UDPゴシック" panose="020B0400000000000000" pitchFamily="50" charset="-128"/>
             </a:endParaRPr>
           </a:p>
         </p:txBody>
@@ -4216,8 +4148,8 @@
                 <a:solidFill>
                   <a:schemeClr val="bg1"/>
                 </a:solidFill>
-                <a:latin typeface="メイリオ" panose="020B0604030504040204" pitchFamily="50" charset="-128"/>
-                <a:ea typeface="メイリオ" panose="020B0604030504040204" pitchFamily="50" charset="-128"/>
+                <a:latin typeface="BIZ UDPゴシック" panose="020B0400000000000000" pitchFamily="50" charset="-128"/>
+                <a:ea typeface="BIZ UDPゴシック" panose="020B0400000000000000" pitchFamily="50" charset="-128"/>
               </a:rPr>
               <a:t>外部要因</a:t>
             </a:r>
@@ -4225,8 +4157,8 @@
               <a:solidFill>
                 <a:schemeClr val="bg1"/>
               </a:solidFill>
-              <a:latin typeface="メイリオ" panose="020B0604030504040204" pitchFamily="50" charset="-128"/>
-              <a:ea typeface="メイリオ" panose="020B0604030504040204" pitchFamily="50" charset="-128"/>
+              <a:latin typeface="BIZ UDPゴシック" panose="020B0400000000000000" pitchFamily="50" charset="-128"/>
+              <a:ea typeface="BIZ UDPゴシック" panose="020B0400000000000000" pitchFamily="50" charset="-128"/>
             </a:endParaRPr>
           </a:p>
         </p:txBody>
@@ -4290,8 +4222,8 @@
                     <a:lumOff val="25000"/>
                   </a:schemeClr>
                 </a:solidFill>
-                <a:latin typeface="メイリオ" panose="020B0604030504040204" pitchFamily="50" charset="-128"/>
-                <a:ea typeface="メイリオ" panose="020B0604030504040204" pitchFamily="50" charset="-128"/>
+                <a:latin typeface="BIZ UDPゴシック" panose="020B0400000000000000" pitchFamily="50" charset="-128"/>
+                <a:ea typeface="BIZ UDPゴシック" panose="020B0400000000000000" pitchFamily="50" charset="-128"/>
               </a:rPr>
               <a:t>外部依存</a:t>
             </a:r>
@@ -4302,8 +4234,8 @@
                   <a:lumOff val="25000"/>
                 </a:schemeClr>
               </a:solidFill>
-              <a:latin typeface="メイリオ" panose="020B0604030504040204" pitchFamily="50" charset="-128"/>
-              <a:ea typeface="メイリオ" panose="020B0604030504040204" pitchFamily="50" charset="-128"/>
+              <a:latin typeface="BIZ UDPゴシック" panose="020B0400000000000000" pitchFamily="50" charset="-128"/>
+              <a:ea typeface="BIZ UDPゴシック" panose="020B0400000000000000" pitchFamily="50" charset="-128"/>
             </a:endParaRPr>
           </a:p>
         </p:txBody>
@@ -4367,8 +4299,8 @@
                     <a:lumOff val="25000"/>
                   </a:schemeClr>
                 </a:solidFill>
-                <a:latin typeface="メイリオ" panose="020B0604030504040204" pitchFamily="50" charset="-128"/>
-                <a:ea typeface="メイリオ" panose="020B0604030504040204" pitchFamily="50" charset="-128"/>
+                <a:latin typeface="BIZ UDPゴシック" panose="020B0400000000000000" pitchFamily="50" charset="-128"/>
+                <a:ea typeface="BIZ UDPゴシック" panose="020B0400000000000000" pitchFamily="50" charset="-128"/>
               </a:rPr>
               <a:t>判断停滞</a:t>
             </a:r>
@@ -4409,14 +4341,14 @@
             </a:pPr>
             <a:r>
               <a:rPr kumimoji="1" lang="ja-JP" altLang="en-US" sz="1400" dirty="0">
-                <a:latin typeface="メイリオ" panose="020B0604030504040204" pitchFamily="50" charset="-128"/>
-                <a:ea typeface="メイリオ" panose="020B0604030504040204" pitchFamily="50" charset="-128"/>
+                <a:latin typeface="BIZ UDPゴシック" panose="020B0400000000000000" pitchFamily="50" charset="-128"/>
+                <a:ea typeface="BIZ UDPゴシック" panose="020B0400000000000000" pitchFamily="50" charset="-128"/>
               </a:rPr>
               <a:t>他部署に依頼しているタスクの遅延</a:t>
             </a:r>
             <a:endParaRPr kumimoji="1" lang="en-US" altLang="ja-JP" sz="1400" dirty="0">
-              <a:latin typeface="メイリオ" panose="020B0604030504040204" pitchFamily="50" charset="-128"/>
-              <a:ea typeface="メイリオ" panose="020B0604030504040204" pitchFamily="50" charset="-128"/>
+              <a:latin typeface="BIZ UDPゴシック" panose="020B0400000000000000" pitchFamily="50" charset="-128"/>
+              <a:ea typeface="BIZ UDPゴシック" panose="020B0400000000000000" pitchFamily="50" charset="-128"/>
             </a:endParaRPr>
           </a:p>
           <a:p>
@@ -4426,14 +4358,14 @@
             </a:pPr>
             <a:r>
               <a:rPr lang="ja-JP" altLang="en-US" sz="1400" dirty="0">
-                <a:latin typeface="メイリオ" panose="020B0604030504040204" pitchFamily="50" charset="-128"/>
-                <a:ea typeface="メイリオ" panose="020B0604030504040204" pitchFamily="50" charset="-128"/>
+                <a:latin typeface="BIZ UDPゴシック" panose="020B0400000000000000" pitchFamily="50" charset="-128"/>
+                <a:ea typeface="BIZ UDPゴシック" panose="020B0400000000000000" pitchFamily="50" charset="-128"/>
               </a:rPr>
               <a:t>外注先の進捗確認ができていない</a:t>
             </a:r>
             <a:endParaRPr lang="en-US" altLang="ja-JP" sz="1400" dirty="0">
-              <a:latin typeface="メイリオ" panose="020B0604030504040204" pitchFamily="50" charset="-128"/>
-              <a:ea typeface="メイリオ" panose="020B0604030504040204" pitchFamily="50" charset="-128"/>
+              <a:latin typeface="BIZ UDPゴシック" panose="020B0400000000000000" pitchFamily="50" charset="-128"/>
+              <a:ea typeface="BIZ UDPゴシック" panose="020B0400000000000000" pitchFamily="50" charset="-128"/>
             </a:endParaRPr>
           </a:p>
           <a:p>
@@ -4443,8 +4375,8 @@
             </a:pPr>
             <a:r>
               <a:rPr kumimoji="1" lang="ja-JP" altLang="en-US" sz="1400" dirty="0">
-                <a:latin typeface="メイリオ" panose="020B0604030504040204" pitchFamily="50" charset="-128"/>
-                <a:ea typeface="メイリオ" panose="020B0604030504040204" pitchFamily="50" charset="-128"/>
+                <a:latin typeface="BIZ UDPゴシック" panose="020B0400000000000000" pitchFamily="50" charset="-128"/>
+                <a:ea typeface="BIZ UDPゴシック" panose="020B0400000000000000" pitchFamily="50" charset="-128"/>
               </a:rPr>
               <a:t>依存タスクの影響範囲が把握できていない</a:t>
             </a:r>
@@ -4485,14 +4417,14 @@
             </a:pPr>
             <a:r>
               <a:rPr lang="ja-JP" altLang="en-US" sz="1400" dirty="0">
-                <a:latin typeface="メイリオ" panose="020B0604030504040204" pitchFamily="50" charset="-128"/>
-                <a:ea typeface="メイリオ" panose="020B0604030504040204" pitchFamily="50" charset="-128"/>
+                <a:latin typeface="BIZ UDPゴシック" panose="020B0400000000000000" pitchFamily="50" charset="-128"/>
+                <a:ea typeface="BIZ UDPゴシック" panose="020B0400000000000000" pitchFamily="50" charset="-128"/>
               </a:rPr>
               <a:t>決済者が不在で承認が止まる</a:t>
             </a:r>
             <a:endParaRPr lang="en-US" altLang="ja-JP" sz="1400" dirty="0">
-              <a:latin typeface="メイリオ" panose="020B0604030504040204" pitchFamily="50" charset="-128"/>
-              <a:ea typeface="メイリオ" panose="020B0604030504040204" pitchFamily="50" charset="-128"/>
+              <a:latin typeface="BIZ UDPゴシック" panose="020B0400000000000000" pitchFamily="50" charset="-128"/>
+              <a:ea typeface="BIZ UDPゴシック" panose="020B0400000000000000" pitchFamily="50" charset="-128"/>
             </a:endParaRPr>
           </a:p>
           <a:p>
@@ -4502,14 +4434,14 @@
             </a:pPr>
             <a:r>
               <a:rPr kumimoji="1" lang="ja-JP" altLang="en-US" sz="1400" dirty="0">
-                <a:latin typeface="メイリオ" panose="020B0604030504040204" pitchFamily="50" charset="-128"/>
-                <a:ea typeface="メイリオ" panose="020B0604030504040204" pitchFamily="50" charset="-128"/>
+                <a:latin typeface="BIZ UDPゴシック" panose="020B0400000000000000" pitchFamily="50" charset="-128"/>
+                <a:ea typeface="BIZ UDPゴシック" panose="020B0400000000000000" pitchFamily="50" charset="-128"/>
               </a:rPr>
               <a:t>承認依頼が「ふわっと」出されている</a:t>
             </a:r>
             <a:endParaRPr kumimoji="1" lang="en-US" altLang="ja-JP" sz="1400" dirty="0">
-              <a:latin typeface="メイリオ" panose="020B0604030504040204" pitchFamily="50" charset="-128"/>
-              <a:ea typeface="メイリオ" panose="020B0604030504040204" pitchFamily="50" charset="-128"/>
+              <a:latin typeface="BIZ UDPゴシック" panose="020B0400000000000000" pitchFamily="50" charset="-128"/>
+              <a:ea typeface="BIZ UDPゴシック" panose="020B0400000000000000" pitchFamily="50" charset="-128"/>
             </a:endParaRPr>
           </a:p>
           <a:p>
@@ -4519,14 +4451,14 @@
             </a:pPr>
             <a:r>
               <a:rPr lang="ja-JP" altLang="en-US" sz="1400" dirty="0">
-                <a:latin typeface="メイリオ" panose="020B0604030504040204" pitchFamily="50" charset="-128"/>
-                <a:ea typeface="メイリオ" panose="020B0604030504040204" pitchFamily="50" charset="-128"/>
+                <a:latin typeface="BIZ UDPゴシック" panose="020B0400000000000000" pitchFamily="50" charset="-128"/>
+                <a:ea typeface="BIZ UDPゴシック" panose="020B0400000000000000" pitchFamily="50" charset="-128"/>
               </a:rPr>
               <a:t>判断材料が揃っていないまま依頼している</a:t>
             </a:r>
             <a:endParaRPr lang="en-US" altLang="ja-JP" sz="1400" dirty="0">
-              <a:latin typeface="メイリオ" panose="020B0604030504040204" pitchFamily="50" charset="-128"/>
-              <a:ea typeface="メイリオ" panose="020B0604030504040204" pitchFamily="50" charset="-128"/>
+              <a:latin typeface="BIZ UDPゴシック" panose="020B0400000000000000" pitchFamily="50" charset="-128"/>
+              <a:ea typeface="BIZ UDPゴシック" panose="020B0400000000000000" pitchFamily="50" charset="-128"/>
             </a:endParaRPr>
           </a:p>
         </p:txBody>
@@ -4640,8 +4572,8 @@
                 <a:solidFill>
                   <a:schemeClr val="bg1"/>
                 </a:solidFill>
-                <a:latin typeface="メイリオ" panose="020B0604030504040204" pitchFamily="50" charset="-128"/>
-                <a:ea typeface="メイリオ" panose="020B0604030504040204" pitchFamily="50" charset="-128"/>
+                <a:latin typeface="BIZ UDPゴシック" panose="020B0400000000000000" pitchFamily="50" charset="-128"/>
+                <a:ea typeface="BIZ UDPゴシック" panose="020B0400000000000000" pitchFamily="50" charset="-128"/>
               </a:rPr>
               <a:t>関係の不整合</a:t>
             </a:r>
@@ -4649,8 +4581,8 @@
               <a:solidFill>
                 <a:schemeClr val="bg1"/>
               </a:solidFill>
-              <a:latin typeface="メイリオ" panose="020B0604030504040204" pitchFamily="50" charset="-128"/>
-              <a:ea typeface="メイリオ" panose="020B0604030504040204" pitchFamily="50" charset="-128"/>
+              <a:latin typeface="BIZ UDPゴシック" panose="020B0400000000000000" pitchFamily="50" charset="-128"/>
+              <a:ea typeface="BIZ UDPゴシック" panose="020B0400000000000000" pitchFamily="50" charset="-128"/>
             </a:endParaRPr>
           </a:p>
         </p:txBody>
@@ -4714,8 +4646,8 @@
                     <a:lumOff val="25000"/>
                   </a:schemeClr>
                 </a:solidFill>
-                <a:latin typeface="メイリオ" panose="020B0604030504040204" pitchFamily="50" charset="-128"/>
-                <a:ea typeface="メイリオ" panose="020B0604030504040204" pitchFamily="50" charset="-128"/>
+                <a:latin typeface="BIZ UDPゴシック" panose="020B0400000000000000" pitchFamily="50" charset="-128"/>
+                <a:ea typeface="BIZ UDPゴシック" panose="020B0400000000000000" pitchFamily="50" charset="-128"/>
               </a:rPr>
               <a:t>情報非対称</a:t>
             </a:r>
@@ -4726,8 +4658,8 @@
                   <a:lumOff val="25000"/>
                 </a:schemeClr>
               </a:solidFill>
-              <a:latin typeface="メイリオ" panose="020B0604030504040204" pitchFamily="50" charset="-128"/>
-              <a:ea typeface="メイリオ" panose="020B0604030504040204" pitchFamily="50" charset="-128"/>
+              <a:latin typeface="BIZ UDPゴシック" panose="020B0400000000000000" pitchFamily="50" charset="-128"/>
+              <a:ea typeface="BIZ UDPゴシック" panose="020B0400000000000000" pitchFamily="50" charset="-128"/>
             </a:endParaRPr>
           </a:p>
         </p:txBody>
@@ -4791,8 +4723,8 @@
                     <a:lumOff val="25000"/>
                   </a:schemeClr>
                 </a:solidFill>
-                <a:latin typeface="メイリオ" panose="020B0604030504040204" pitchFamily="50" charset="-128"/>
-                <a:ea typeface="メイリオ" panose="020B0604030504040204" pitchFamily="50" charset="-128"/>
+                <a:latin typeface="BIZ UDPゴシック" panose="020B0400000000000000" pitchFamily="50" charset="-128"/>
+                <a:ea typeface="BIZ UDPゴシック" panose="020B0400000000000000" pitchFamily="50" charset="-128"/>
               </a:rPr>
               <a:t>ステークホルダー変更</a:t>
             </a:r>
@@ -4858,8 +4790,8 @@
                     <a:lumOff val="25000"/>
                   </a:schemeClr>
                 </a:solidFill>
-                <a:latin typeface="メイリオ" panose="020B0604030504040204" pitchFamily="50" charset="-128"/>
-                <a:ea typeface="メイリオ" panose="020B0604030504040204" pitchFamily="50" charset="-128"/>
+                <a:latin typeface="BIZ UDPゴシック" panose="020B0400000000000000" pitchFamily="50" charset="-128"/>
+                <a:ea typeface="BIZ UDPゴシック" panose="020B0400000000000000" pitchFamily="50" charset="-128"/>
               </a:rPr>
               <a:t>認識ズレ</a:t>
             </a:r>
@@ -4870,8 +4802,8 @@
                   <a:lumOff val="25000"/>
                 </a:schemeClr>
               </a:solidFill>
-              <a:latin typeface="メイリオ" panose="020B0604030504040204" pitchFamily="50" charset="-128"/>
-              <a:ea typeface="メイリオ" panose="020B0604030504040204" pitchFamily="50" charset="-128"/>
+              <a:latin typeface="BIZ UDPゴシック" panose="020B0400000000000000" pitchFamily="50" charset="-128"/>
+              <a:ea typeface="BIZ UDPゴシック" panose="020B0400000000000000" pitchFamily="50" charset="-128"/>
             </a:endParaRPr>
           </a:p>
         </p:txBody>
@@ -4910,14 +4842,14 @@
             </a:pPr>
             <a:r>
               <a:rPr kumimoji="1" lang="ja-JP" altLang="en-US" sz="1400" dirty="0">
-                <a:latin typeface="メイリオ" panose="020B0604030504040204" pitchFamily="50" charset="-128"/>
-                <a:ea typeface="メイリオ" panose="020B0604030504040204" pitchFamily="50" charset="-128"/>
+                <a:latin typeface="BIZ UDPゴシック" panose="020B0400000000000000" pitchFamily="50" charset="-128"/>
+                <a:ea typeface="BIZ UDPゴシック" panose="020B0400000000000000" pitchFamily="50" charset="-128"/>
               </a:rPr>
               <a:t>非公式なやりとりが一部でしか共有されていない</a:t>
             </a:r>
             <a:endParaRPr kumimoji="1" lang="en-US" altLang="ja-JP" sz="1400" dirty="0">
-              <a:latin typeface="メイリオ" panose="020B0604030504040204" pitchFamily="50" charset="-128"/>
-              <a:ea typeface="メイリオ" panose="020B0604030504040204" pitchFamily="50" charset="-128"/>
+              <a:latin typeface="BIZ UDPゴシック" panose="020B0400000000000000" pitchFamily="50" charset="-128"/>
+              <a:ea typeface="BIZ UDPゴシック" panose="020B0400000000000000" pitchFamily="50" charset="-128"/>
             </a:endParaRPr>
           </a:p>
           <a:p>
@@ -4927,14 +4859,14 @@
             </a:pPr>
             <a:r>
               <a:rPr lang="ja-JP" altLang="en-US" sz="1400" dirty="0">
-                <a:latin typeface="メイリオ" panose="020B0604030504040204" pitchFamily="50" charset="-128"/>
-                <a:ea typeface="メイリオ" panose="020B0604030504040204" pitchFamily="50" charset="-128"/>
+                <a:latin typeface="BIZ UDPゴシック" panose="020B0400000000000000" pitchFamily="50" charset="-128"/>
+                <a:ea typeface="BIZ UDPゴシック" panose="020B0400000000000000" pitchFamily="50" charset="-128"/>
               </a:rPr>
               <a:t>最新資料が全員に行きわたっていない</a:t>
             </a:r>
             <a:endParaRPr lang="en-US" altLang="ja-JP" sz="1400" dirty="0">
-              <a:latin typeface="メイリオ" panose="020B0604030504040204" pitchFamily="50" charset="-128"/>
-              <a:ea typeface="メイリオ" panose="020B0604030504040204" pitchFamily="50" charset="-128"/>
+              <a:latin typeface="BIZ UDPゴシック" panose="020B0400000000000000" pitchFamily="50" charset="-128"/>
+              <a:ea typeface="BIZ UDPゴシック" panose="020B0400000000000000" pitchFamily="50" charset="-128"/>
             </a:endParaRPr>
           </a:p>
           <a:p>
@@ -4944,8 +4876,8 @@
             </a:pPr>
             <a:r>
               <a:rPr kumimoji="1" lang="ja-JP" altLang="en-US" sz="1400" dirty="0">
-                <a:latin typeface="メイリオ" panose="020B0604030504040204" pitchFamily="50" charset="-128"/>
-                <a:ea typeface="メイリオ" panose="020B0604030504040204" pitchFamily="50" charset="-128"/>
+                <a:latin typeface="BIZ UDPゴシック" panose="020B0400000000000000" pitchFamily="50" charset="-128"/>
+                <a:ea typeface="BIZ UDPゴシック" panose="020B0400000000000000" pitchFamily="50" charset="-128"/>
               </a:rPr>
               <a:t>部署間の情報共有が弱い</a:t>
             </a:r>
@@ -4986,14 +4918,14 @@
             </a:pPr>
             <a:r>
               <a:rPr kumimoji="1" lang="ja-JP" altLang="en-US" sz="1400" dirty="0">
-                <a:latin typeface="メイリオ" panose="020B0604030504040204" pitchFamily="50" charset="-128"/>
-                <a:ea typeface="メイリオ" panose="020B0604030504040204" pitchFamily="50" charset="-128"/>
+                <a:latin typeface="BIZ UDPゴシック" panose="020B0400000000000000" pitchFamily="50" charset="-128"/>
+                <a:ea typeface="BIZ UDPゴシック" panose="020B0400000000000000" pitchFamily="50" charset="-128"/>
               </a:rPr>
               <a:t>担当者が交代して情報が引き継がれていない</a:t>
             </a:r>
             <a:endParaRPr kumimoji="1" lang="en-US" altLang="ja-JP" sz="1400" dirty="0">
-              <a:latin typeface="メイリオ" panose="020B0604030504040204" pitchFamily="50" charset="-128"/>
-              <a:ea typeface="メイリオ" panose="020B0604030504040204" pitchFamily="50" charset="-128"/>
+              <a:latin typeface="BIZ UDPゴシック" panose="020B0400000000000000" pitchFamily="50" charset="-128"/>
+              <a:ea typeface="BIZ UDPゴシック" panose="020B0400000000000000" pitchFamily="50" charset="-128"/>
             </a:endParaRPr>
           </a:p>
           <a:p>
@@ -5003,14 +4935,14 @@
             </a:pPr>
             <a:r>
               <a:rPr lang="ja-JP" altLang="en-US" sz="1400" dirty="0">
-                <a:latin typeface="メイリオ" panose="020B0604030504040204" pitchFamily="50" charset="-128"/>
-                <a:ea typeface="メイリオ" panose="020B0604030504040204" pitchFamily="50" charset="-128"/>
+                <a:latin typeface="BIZ UDPゴシック" panose="020B0400000000000000" pitchFamily="50" charset="-128"/>
+                <a:ea typeface="BIZ UDPゴシック" panose="020B0400000000000000" pitchFamily="50" charset="-128"/>
               </a:rPr>
               <a:t>意思決定者が変わり、方針が変化</a:t>
             </a:r>
             <a:endParaRPr kumimoji="1" lang="ja-JP" altLang="en-US" sz="1400" dirty="0">
-              <a:latin typeface="メイリオ" panose="020B0604030504040204" pitchFamily="50" charset="-128"/>
-              <a:ea typeface="メイリオ" panose="020B0604030504040204" pitchFamily="50" charset="-128"/>
+              <a:latin typeface="BIZ UDPゴシック" panose="020B0400000000000000" pitchFamily="50" charset="-128"/>
+              <a:ea typeface="BIZ UDPゴシック" panose="020B0400000000000000" pitchFamily="50" charset="-128"/>
             </a:endParaRPr>
           </a:p>
         </p:txBody>
@@ -5049,14 +4981,14 @@
             </a:pPr>
             <a:r>
               <a:rPr lang="ja-JP" altLang="en-US" sz="1400" dirty="0">
-                <a:latin typeface="メイリオ" panose="020B0604030504040204" pitchFamily="50" charset="-128"/>
-                <a:ea typeface="メイリオ" panose="020B0604030504040204" pitchFamily="50" charset="-128"/>
+                <a:latin typeface="BIZ UDPゴシック" panose="020B0400000000000000" pitchFamily="50" charset="-128"/>
+                <a:ea typeface="BIZ UDPゴシック" panose="020B0400000000000000" pitchFamily="50" charset="-128"/>
               </a:rPr>
               <a:t>成果物の完成イメージがズレている</a:t>
             </a:r>
             <a:endParaRPr lang="en-US" altLang="ja-JP" sz="1400" dirty="0">
-              <a:latin typeface="メイリオ" panose="020B0604030504040204" pitchFamily="50" charset="-128"/>
-              <a:ea typeface="メイリオ" panose="020B0604030504040204" pitchFamily="50" charset="-128"/>
+              <a:latin typeface="BIZ UDPゴシック" panose="020B0400000000000000" pitchFamily="50" charset="-128"/>
+              <a:ea typeface="BIZ UDPゴシック" panose="020B0400000000000000" pitchFamily="50" charset="-128"/>
             </a:endParaRPr>
           </a:p>
           <a:p>
@@ -5066,14 +4998,14 @@
             </a:pPr>
             <a:r>
               <a:rPr lang="ja-JP" altLang="en-US" sz="1400" dirty="0">
-                <a:latin typeface="メイリオ" panose="020B0604030504040204" pitchFamily="50" charset="-128"/>
-                <a:ea typeface="メイリオ" panose="020B0604030504040204" pitchFamily="50" charset="-128"/>
+                <a:latin typeface="BIZ UDPゴシック" panose="020B0400000000000000" pitchFamily="50" charset="-128"/>
+                <a:ea typeface="BIZ UDPゴシック" panose="020B0400000000000000" pitchFamily="50" charset="-128"/>
               </a:rPr>
               <a:t>依頼者と実行者で「どこまでやるか」がズレている</a:t>
             </a:r>
             <a:endParaRPr lang="en-US" altLang="ja-JP" sz="1400" dirty="0">
-              <a:latin typeface="メイリオ" panose="020B0604030504040204" pitchFamily="50" charset="-128"/>
-              <a:ea typeface="メイリオ" panose="020B0604030504040204" pitchFamily="50" charset="-128"/>
+              <a:latin typeface="BIZ UDPゴシック" panose="020B0400000000000000" pitchFamily="50" charset="-128"/>
+              <a:ea typeface="BIZ UDPゴシック" panose="020B0400000000000000" pitchFamily="50" charset="-128"/>
             </a:endParaRPr>
           </a:p>
           <a:p>
@@ -5083,8 +5015,8 @@
             </a:pPr>
             <a:r>
               <a:rPr lang="ja-JP" altLang="en-US" sz="1400" dirty="0">
-                <a:latin typeface="メイリオ" panose="020B0604030504040204" pitchFamily="50" charset="-128"/>
-                <a:ea typeface="メイリオ" panose="020B0604030504040204" pitchFamily="50" charset="-128"/>
+                <a:latin typeface="BIZ UDPゴシック" panose="020B0400000000000000" pitchFamily="50" charset="-128"/>
+                <a:ea typeface="BIZ UDPゴシック" panose="020B0400000000000000" pitchFamily="50" charset="-128"/>
               </a:rPr>
               <a:t>途中で方針がかわったのに共有されていない</a:t>
             </a:r>
@@ -5146,8 +5078,8 @@
                 <a:solidFill>
                   <a:schemeClr val="bg1"/>
                 </a:solidFill>
-                <a:latin typeface="メイリオ" panose="020B0604030504040204" pitchFamily="50" charset="-128"/>
-                <a:ea typeface="メイリオ" panose="020B0604030504040204" pitchFamily="50" charset="-128"/>
+                <a:latin typeface="BIZ UDPゴシック" panose="020B0400000000000000" pitchFamily="50" charset="-128"/>
+                <a:ea typeface="BIZ UDPゴシック" panose="020B0400000000000000" pitchFamily="50" charset="-128"/>
               </a:rPr>
               <a:t>背景・おきがちな状況例</a:t>
             </a:r>
@@ -5188,14 +5120,14 @@
             </a:pPr>
             <a:r>
               <a:rPr kumimoji="1" lang="ja-JP" altLang="en-US" sz="1400" dirty="0">
-                <a:latin typeface="メイリオ" panose="020B0604030504040204" pitchFamily="50" charset="-128"/>
-                <a:ea typeface="メイリオ" panose="020B0604030504040204" pitchFamily="50" charset="-128"/>
+                <a:latin typeface="BIZ UDPゴシック" panose="020B0400000000000000" pitchFamily="50" charset="-128"/>
+                <a:ea typeface="BIZ UDPゴシック" panose="020B0400000000000000" pitchFamily="50" charset="-128"/>
               </a:rPr>
               <a:t>初期段階で予算根拠を文書化・明文化する</a:t>
             </a:r>
             <a:endParaRPr kumimoji="1" lang="en-US" altLang="ja-JP" sz="1400" dirty="0">
-              <a:latin typeface="メイリオ" panose="020B0604030504040204" pitchFamily="50" charset="-128"/>
-              <a:ea typeface="メイリオ" panose="020B0604030504040204" pitchFamily="50" charset="-128"/>
+              <a:latin typeface="BIZ UDPゴシック" panose="020B0400000000000000" pitchFamily="50" charset="-128"/>
+              <a:ea typeface="BIZ UDPゴシック" panose="020B0400000000000000" pitchFamily="50" charset="-128"/>
             </a:endParaRPr>
           </a:p>
           <a:p>
@@ -5205,14 +5137,14 @@
             </a:pPr>
             <a:r>
               <a:rPr lang="ja-JP" altLang="en-US" sz="1400" dirty="0">
-                <a:latin typeface="メイリオ" panose="020B0604030504040204" pitchFamily="50" charset="-128"/>
-                <a:ea typeface="メイリオ" panose="020B0604030504040204" pitchFamily="50" charset="-128"/>
+                <a:latin typeface="BIZ UDPゴシック" panose="020B0400000000000000" pitchFamily="50" charset="-128"/>
+                <a:ea typeface="BIZ UDPゴシック" panose="020B0400000000000000" pitchFamily="50" charset="-128"/>
               </a:rPr>
               <a:t>承認時に金額帯・前提条件を口頭でも確認する</a:t>
             </a:r>
             <a:endParaRPr lang="en-US" altLang="ja-JP" sz="1400" dirty="0">
-              <a:latin typeface="メイリオ" panose="020B0604030504040204" pitchFamily="50" charset="-128"/>
-              <a:ea typeface="メイリオ" panose="020B0604030504040204" pitchFamily="50" charset="-128"/>
+              <a:latin typeface="BIZ UDPゴシック" panose="020B0400000000000000" pitchFamily="50" charset="-128"/>
+              <a:ea typeface="BIZ UDPゴシック" panose="020B0400000000000000" pitchFamily="50" charset="-128"/>
             </a:endParaRPr>
           </a:p>
           <a:p>
@@ -5222,8 +5154,8 @@
             </a:pPr>
             <a:r>
               <a:rPr kumimoji="1" lang="ja-JP" altLang="en-US" sz="1400" dirty="0">
-                <a:latin typeface="メイリオ" panose="020B0604030504040204" pitchFamily="50" charset="-128"/>
-                <a:ea typeface="メイリオ" panose="020B0604030504040204" pitchFamily="50" charset="-128"/>
+                <a:latin typeface="BIZ UDPゴシック" panose="020B0400000000000000" pitchFamily="50" charset="-128"/>
+                <a:ea typeface="BIZ UDPゴシック" panose="020B0400000000000000" pitchFamily="50" charset="-128"/>
               </a:rPr>
               <a:t>見積取得時に変更リスクを明示・予備費を設定</a:t>
             </a:r>
@@ -5264,21 +5196,21 @@
             </a:pPr>
             <a:r>
               <a:rPr kumimoji="1" lang="en-US" altLang="ja-JP" sz="1400" dirty="0">
-                <a:latin typeface="メイリオ" panose="020B0604030504040204" pitchFamily="50" charset="-128"/>
-                <a:ea typeface="メイリオ" panose="020B0604030504040204" pitchFamily="50" charset="-128"/>
+                <a:latin typeface="BIZ UDPゴシック" panose="020B0400000000000000" pitchFamily="50" charset="-128"/>
+                <a:ea typeface="BIZ UDPゴシック" panose="020B0400000000000000" pitchFamily="50" charset="-128"/>
               </a:rPr>
               <a:t>WBS</a:t>
             </a:r>
             <a:r>
               <a:rPr kumimoji="1" lang="ja-JP" altLang="en-US" sz="1400" dirty="0">
-                <a:latin typeface="メイリオ" panose="020B0604030504040204" pitchFamily="50" charset="-128"/>
-                <a:ea typeface="メイリオ" panose="020B0604030504040204" pitchFamily="50" charset="-128"/>
+                <a:latin typeface="BIZ UDPゴシック" panose="020B0400000000000000" pitchFamily="50" charset="-128"/>
+                <a:ea typeface="BIZ UDPゴシック" panose="020B0400000000000000" pitchFamily="50" charset="-128"/>
               </a:rPr>
               <a:t>・ガントをかならず作成</a:t>
             </a:r>
             <a:endParaRPr kumimoji="1" lang="en-US" altLang="ja-JP" sz="1400" dirty="0">
-              <a:latin typeface="メイリオ" panose="020B0604030504040204" pitchFamily="50" charset="-128"/>
-              <a:ea typeface="メイリオ" panose="020B0604030504040204" pitchFamily="50" charset="-128"/>
+              <a:latin typeface="BIZ UDPゴシック" panose="020B0400000000000000" pitchFamily="50" charset="-128"/>
+              <a:ea typeface="BIZ UDPゴシック" panose="020B0400000000000000" pitchFamily="50" charset="-128"/>
             </a:endParaRPr>
           </a:p>
           <a:p>
@@ -5288,14 +5220,14 @@
             </a:pPr>
             <a:r>
               <a:rPr lang="ja-JP" altLang="en-US" sz="1400" dirty="0">
-                <a:latin typeface="メイリオ" panose="020B0604030504040204" pitchFamily="50" charset="-128"/>
-                <a:ea typeface="メイリオ" panose="020B0604030504040204" pitchFamily="50" charset="-128"/>
+                <a:latin typeface="BIZ UDPゴシック" panose="020B0400000000000000" pitchFamily="50" charset="-128"/>
+                <a:ea typeface="BIZ UDPゴシック" panose="020B0400000000000000" pitchFamily="50" charset="-128"/>
               </a:rPr>
               <a:t>依存関係を洗い出し、影響範囲を確認</a:t>
             </a:r>
             <a:endParaRPr lang="en-US" altLang="ja-JP" sz="1400" dirty="0">
-              <a:latin typeface="メイリオ" panose="020B0604030504040204" pitchFamily="50" charset="-128"/>
-              <a:ea typeface="メイリオ" panose="020B0604030504040204" pitchFamily="50" charset="-128"/>
+              <a:latin typeface="BIZ UDPゴシック" panose="020B0400000000000000" pitchFamily="50" charset="-128"/>
+              <a:ea typeface="BIZ UDPゴシック" panose="020B0400000000000000" pitchFamily="50" charset="-128"/>
             </a:endParaRPr>
           </a:p>
           <a:p>
@@ -5305,8 +5237,8 @@
             </a:pPr>
             <a:r>
               <a:rPr kumimoji="1" lang="ja-JP" altLang="en-US" sz="1400" dirty="0">
-                <a:latin typeface="メイリオ" panose="020B0604030504040204" pitchFamily="50" charset="-128"/>
-                <a:ea typeface="メイリオ" panose="020B0604030504040204" pitchFamily="50" charset="-128"/>
+                <a:latin typeface="BIZ UDPゴシック" panose="020B0400000000000000" pitchFamily="50" charset="-128"/>
+                <a:ea typeface="BIZ UDPゴシック" panose="020B0400000000000000" pitchFamily="50" charset="-128"/>
               </a:rPr>
               <a:t>重要タスクの納期逆算・重点化</a:t>
             </a:r>
@@ -5347,14 +5279,14 @@
             </a:pPr>
             <a:r>
               <a:rPr lang="ja-JP" altLang="en-US" sz="1400" dirty="0">
-                <a:latin typeface="メイリオ" panose="020B0604030504040204" pitchFamily="50" charset="-128"/>
-                <a:ea typeface="メイリオ" panose="020B0604030504040204" pitchFamily="50" charset="-128"/>
+                <a:latin typeface="BIZ UDPゴシック" panose="020B0400000000000000" pitchFamily="50" charset="-128"/>
+                <a:ea typeface="BIZ UDPゴシック" panose="020B0400000000000000" pitchFamily="50" charset="-128"/>
               </a:rPr>
               <a:t>品質定義を明文化</a:t>
             </a:r>
             <a:endParaRPr lang="en-US" altLang="ja-JP" sz="1400" dirty="0">
-              <a:latin typeface="メイリオ" panose="020B0604030504040204" pitchFamily="50" charset="-128"/>
-              <a:ea typeface="メイリオ" panose="020B0604030504040204" pitchFamily="50" charset="-128"/>
+              <a:latin typeface="BIZ UDPゴシック" panose="020B0400000000000000" pitchFamily="50" charset="-128"/>
+              <a:ea typeface="BIZ UDPゴシック" panose="020B0400000000000000" pitchFamily="50" charset="-128"/>
             </a:endParaRPr>
           </a:p>
           <a:p>
@@ -5364,14 +5296,14 @@
             </a:pPr>
             <a:r>
               <a:rPr kumimoji="1" lang="ja-JP" altLang="en-US" sz="1400" dirty="0">
-                <a:latin typeface="メイリオ" panose="020B0604030504040204" pitchFamily="50" charset="-128"/>
-                <a:ea typeface="メイリオ" panose="020B0604030504040204" pitchFamily="50" charset="-128"/>
+                <a:latin typeface="BIZ UDPゴシック" panose="020B0400000000000000" pitchFamily="50" charset="-128"/>
+                <a:ea typeface="BIZ UDPゴシック" panose="020B0400000000000000" pitchFamily="50" charset="-128"/>
               </a:rPr>
               <a:t>タスクごとの責任者・アウトプット定義を共有</a:t>
             </a:r>
             <a:endParaRPr kumimoji="1" lang="en-US" altLang="ja-JP" sz="1400" dirty="0">
-              <a:latin typeface="メイリオ" panose="020B0604030504040204" pitchFamily="50" charset="-128"/>
-              <a:ea typeface="メイリオ" panose="020B0604030504040204" pitchFamily="50" charset="-128"/>
+              <a:latin typeface="BIZ UDPゴシック" panose="020B0400000000000000" pitchFamily="50" charset="-128"/>
+              <a:ea typeface="BIZ UDPゴシック" panose="020B0400000000000000" pitchFamily="50" charset="-128"/>
             </a:endParaRPr>
           </a:p>
           <a:p>
@@ -5381,28 +5313,28 @@
             </a:pPr>
             <a:r>
               <a:rPr lang="ja-JP" altLang="en-US" sz="1400" dirty="0">
-                <a:latin typeface="メイリオ" panose="020B0604030504040204" pitchFamily="50" charset="-128"/>
-                <a:ea typeface="メイリオ" panose="020B0604030504040204" pitchFamily="50" charset="-128"/>
+                <a:latin typeface="BIZ UDPゴシック" panose="020B0400000000000000" pitchFamily="50" charset="-128"/>
+                <a:ea typeface="BIZ UDPゴシック" panose="020B0400000000000000" pitchFamily="50" charset="-128"/>
               </a:rPr>
               <a:t>進捗共有</a:t>
             </a:r>
             <a:r>
               <a:rPr lang="en-US" altLang="ja-JP" sz="1400" dirty="0">
-                <a:latin typeface="メイリオ" panose="020B0604030504040204" pitchFamily="50" charset="-128"/>
-                <a:ea typeface="メイリオ" panose="020B0604030504040204" pitchFamily="50" charset="-128"/>
+                <a:latin typeface="BIZ UDPゴシック" panose="020B0400000000000000" pitchFamily="50" charset="-128"/>
+                <a:ea typeface="BIZ UDPゴシック" panose="020B0400000000000000" pitchFamily="50" charset="-128"/>
               </a:rPr>
               <a:t>MTG</a:t>
             </a:r>
             <a:r>
               <a:rPr lang="ja-JP" altLang="en-US" sz="1400" dirty="0">
-                <a:latin typeface="メイリオ" panose="020B0604030504040204" pitchFamily="50" charset="-128"/>
-                <a:ea typeface="メイリオ" panose="020B0604030504040204" pitchFamily="50" charset="-128"/>
+                <a:latin typeface="BIZ UDPゴシック" panose="020B0400000000000000" pitchFamily="50" charset="-128"/>
+                <a:ea typeface="BIZ UDPゴシック" panose="020B0400000000000000" pitchFamily="50" charset="-128"/>
               </a:rPr>
               <a:t>・可視化ツールを活用</a:t>
             </a:r>
             <a:endParaRPr kumimoji="1" lang="ja-JP" altLang="en-US" sz="1400" dirty="0">
-              <a:latin typeface="メイリオ" panose="020B0604030504040204" pitchFamily="50" charset="-128"/>
-              <a:ea typeface="メイリオ" panose="020B0604030504040204" pitchFamily="50" charset="-128"/>
+              <a:latin typeface="BIZ UDPゴシック" panose="020B0400000000000000" pitchFamily="50" charset="-128"/>
+              <a:ea typeface="BIZ UDPゴシック" panose="020B0400000000000000" pitchFamily="50" charset="-128"/>
             </a:endParaRPr>
           </a:p>
         </p:txBody>
@@ -5441,14 +5373,14 @@
             </a:pPr>
             <a:r>
               <a:rPr kumimoji="1" lang="ja-JP" altLang="en-US" sz="1400" dirty="0">
-                <a:latin typeface="メイリオ" panose="020B0604030504040204" pitchFamily="50" charset="-128"/>
-                <a:ea typeface="メイリオ" panose="020B0604030504040204" pitchFamily="50" charset="-128"/>
+                <a:latin typeface="BIZ UDPゴシック" panose="020B0400000000000000" pitchFamily="50" charset="-128"/>
+                <a:ea typeface="BIZ UDPゴシック" panose="020B0400000000000000" pitchFamily="50" charset="-128"/>
               </a:rPr>
               <a:t>定例時間を確保・短時間でも定期報告ルール化</a:t>
             </a:r>
             <a:endParaRPr kumimoji="1" lang="en-US" altLang="ja-JP" sz="1400" dirty="0">
-              <a:latin typeface="メイリオ" panose="020B0604030504040204" pitchFamily="50" charset="-128"/>
-              <a:ea typeface="メイリオ" panose="020B0604030504040204" pitchFamily="50" charset="-128"/>
+              <a:latin typeface="BIZ UDPゴシック" panose="020B0400000000000000" pitchFamily="50" charset="-128"/>
+              <a:ea typeface="BIZ UDPゴシック" panose="020B0400000000000000" pitchFamily="50" charset="-128"/>
             </a:endParaRPr>
           </a:p>
           <a:p>
@@ -5458,14 +5390,14 @@
             </a:pPr>
             <a:r>
               <a:rPr lang="ja-JP" altLang="en-US" sz="1400" dirty="0">
-                <a:latin typeface="メイリオ" panose="020B0604030504040204" pitchFamily="50" charset="-128"/>
-                <a:ea typeface="メイリオ" panose="020B0604030504040204" pitchFamily="50" charset="-128"/>
+                <a:latin typeface="BIZ UDPゴシック" panose="020B0400000000000000" pitchFamily="50" charset="-128"/>
+                <a:ea typeface="BIZ UDPゴシック" panose="020B0400000000000000" pitchFamily="50" charset="-128"/>
               </a:rPr>
               <a:t>仮方針・前提条件の確認を行う</a:t>
             </a:r>
             <a:endParaRPr lang="en-US" altLang="ja-JP" sz="1400" dirty="0">
-              <a:latin typeface="メイリオ" panose="020B0604030504040204" pitchFamily="50" charset="-128"/>
-              <a:ea typeface="メイリオ" panose="020B0604030504040204" pitchFamily="50" charset="-128"/>
+              <a:latin typeface="BIZ UDPゴシック" panose="020B0400000000000000" pitchFamily="50" charset="-128"/>
+              <a:ea typeface="BIZ UDPゴシック" panose="020B0400000000000000" pitchFamily="50" charset="-128"/>
             </a:endParaRPr>
           </a:p>
           <a:p>
@@ -5475,8 +5407,8 @@
             </a:pPr>
             <a:r>
               <a:rPr kumimoji="1" lang="ja-JP" altLang="en-US" sz="1400" dirty="0">
-                <a:latin typeface="メイリオ" panose="020B0604030504040204" pitchFamily="50" charset="-128"/>
-                <a:ea typeface="メイリオ" panose="020B0604030504040204" pitchFamily="50" charset="-128"/>
+                <a:latin typeface="BIZ UDPゴシック" panose="020B0400000000000000" pitchFamily="50" charset="-128"/>
+                <a:ea typeface="BIZ UDPゴシック" panose="020B0400000000000000" pitchFamily="50" charset="-128"/>
               </a:rPr>
               <a:t>判断ポイントを意思決定リストとして見える化</a:t>
             </a:r>
@@ -5517,14 +5449,14 @@
             </a:pPr>
             <a:r>
               <a:rPr lang="ja-JP" altLang="en-US" sz="1400" dirty="0">
-                <a:latin typeface="メイリオ" panose="020B0604030504040204" pitchFamily="50" charset="-128"/>
-                <a:ea typeface="メイリオ" panose="020B0604030504040204" pitchFamily="50" charset="-128"/>
+                <a:latin typeface="BIZ UDPゴシック" panose="020B0400000000000000" pitchFamily="50" charset="-128"/>
+                <a:ea typeface="BIZ UDPゴシック" panose="020B0400000000000000" pitchFamily="50" charset="-128"/>
               </a:rPr>
               <a:t>納期逆算 → 余白設定を必ずおこなう</a:t>
             </a:r>
             <a:endParaRPr lang="en-US" altLang="ja-JP" sz="1400" dirty="0">
-              <a:latin typeface="メイリオ" panose="020B0604030504040204" pitchFamily="50" charset="-128"/>
-              <a:ea typeface="メイリオ" panose="020B0604030504040204" pitchFamily="50" charset="-128"/>
+              <a:latin typeface="BIZ UDPゴシック" panose="020B0400000000000000" pitchFamily="50" charset="-128"/>
+              <a:ea typeface="BIZ UDPゴシック" panose="020B0400000000000000" pitchFamily="50" charset="-128"/>
             </a:endParaRPr>
           </a:p>
           <a:p>
@@ -5534,14 +5466,14 @@
             </a:pPr>
             <a:r>
               <a:rPr kumimoji="1" lang="ja-JP" altLang="en-US" sz="1400" dirty="0">
-                <a:latin typeface="メイリオ" panose="020B0604030504040204" pitchFamily="50" charset="-128"/>
-                <a:ea typeface="メイリオ" panose="020B0604030504040204" pitchFamily="50" charset="-128"/>
+                <a:latin typeface="BIZ UDPゴシック" panose="020B0400000000000000" pitchFamily="50" charset="-128"/>
+                <a:ea typeface="BIZ UDPゴシック" panose="020B0400000000000000" pitchFamily="50" charset="-128"/>
               </a:rPr>
               <a:t>バッファ確認・常に余裕を意識</a:t>
             </a:r>
             <a:endParaRPr kumimoji="1" lang="en-US" altLang="ja-JP" sz="1400" dirty="0">
-              <a:latin typeface="メイリオ" panose="020B0604030504040204" pitchFamily="50" charset="-128"/>
-              <a:ea typeface="メイリオ" panose="020B0604030504040204" pitchFamily="50" charset="-128"/>
+              <a:latin typeface="BIZ UDPゴシック" panose="020B0400000000000000" pitchFamily="50" charset="-128"/>
+              <a:ea typeface="BIZ UDPゴシック" panose="020B0400000000000000" pitchFamily="50" charset="-128"/>
             </a:endParaRPr>
           </a:p>
           <a:p>
@@ -5551,14 +5483,14 @@
             </a:pPr>
             <a:r>
               <a:rPr lang="ja-JP" altLang="en-US" sz="1400" dirty="0">
-                <a:latin typeface="メイリオ" panose="020B0604030504040204" pitchFamily="50" charset="-128"/>
-                <a:ea typeface="メイリオ" panose="020B0604030504040204" pitchFamily="50" charset="-128"/>
+                <a:latin typeface="BIZ UDPゴシック" panose="020B0400000000000000" pitchFamily="50" charset="-128"/>
+                <a:ea typeface="BIZ UDPゴシック" panose="020B0400000000000000" pitchFamily="50" charset="-128"/>
               </a:rPr>
               <a:t>レビュー・修正フェーズをスケジュールに明記</a:t>
             </a:r>
             <a:endParaRPr kumimoji="1" lang="ja-JP" altLang="en-US" sz="1400" dirty="0">
-              <a:latin typeface="メイリオ" panose="020B0604030504040204" pitchFamily="50" charset="-128"/>
-              <a:ea typeface="メイリオ" panose="020B0604030504040204" pitchFamily="50" charset="-128"/>
+              <a:latin typeface="BIZ UDPゴシック" panose="020B0400000000000000" pitchFamily="50" charset="-128"/>
+              <a:ea typeface="BIZ UDPゴシック" panose="020B0400000000000000" pitchFamily="50" charset="-128"/>
             </a:endParaRPr>
           </a:p>
         </p:txBody>
@@ -5597,28 +5529,28 @@
             </a:pPr>
             <a:r>
               <a:rPr kumimoji="1" lang="ja-JP" altLang="en-US" sz="1400" dirty="0">
-                <a:latin typeface="メイリオ" panose="020B0604030504040204" pitchFamily="50" charset="-128"/>
-                <a:ea typeface="メイリオ" panose="020B0604030504040204" pitchFamily="50" charset="-128"/>
+                <a:latin typeface="BIZ UDPゴシック" panose="020B0400000000000000" pitchFamily="50" charset="-128"/>
+                <a:ea typeface="BIZ UDPゴシック" panose="020B0400000000000000" pitchFamily="50" charset="-128"/>
               </a:rPr>
               <a:t>前倒しで依頼 </a:t>
             </a:r>
             <a:r>
               <a:rPr kumimoji="1" lang="en-US" altLang="ja-JP" sz="1400" dirty="0">
-                <a:latin typeface="メイリオ" panose="020B0604030504040204" pitchFamily="50" charset="-128"/>
-                <a:ea typeface="メイリオ" panose="020B0604030504040204" pitchFamily="50" charset="-128"/>
+                <a:latin typeface="BIZ UDPゴシック" panose="020B0400000000000000" pitchFamily="50" charset="-128"/>
+                <a:ea typeface="BIZ UDPゴシック" panose="020B0400000000000000" pitchFamily="50" charset="-128"/>
               </a:rPr>
               <a:t>+ </a:t>
             </a:r>
             <a:r>
               <a:rPr kumimoji="1" lang="ja-JP" altLang="en-US" sz="1400" dirty="0">
-                <a:latin typeface="メイリオ" panose="020B0604030504040204" pitchFamily="50" charset="-128"/>
-                <a:ea typeface="メイリオ" panose="020B0604030504040204" pitchFamily="50" charset="-128"/>
+                <a:latin typeface="BIZ UDPゴシック" panose="020B0400000000000000" pitchFamily="50" charset="-128"/>
+                <a:ea typeface="BIZ UDPゴシック" panose="020B0400000000000000" pitchFamily="50" charset="-128"/>
               </a:rPr>
               <a:t>フォロー頻度を高めに設定</a:t>
             </a:r>
             <a:endParaRPr kumimoji="1" lang="en-US" altLang="ja-JP" sz="1400" dirty="0">
-              <a:latin typeface="メイリオ" panose="020B0604030504040204" pitchFamily="50" charset="-128"/>
-              <a:ea typeface="メイリオ" panose="020B0604030504040204" pitchFamily="50" charset="-128"/>
+              <a:latin typeface="BIZ UDPゴシック" panose="020B0400000000000000" pitchFamily="50" charset="-128"/>
+              <a:ea typeface="BIZ UDPゴシック" panose="020B0400000000000000" pitchFamily="50" charset="-128"/>
             </a:endParaRPr>
           </a:p>
           <a:p>
@@ -5628,28 +5560,28 @@
             </a:pPr>
             <a:r>
               <a:rPr lang="ja-JP" altLang="en-US" sz="1400" dirty="0">
-                <a:latin typeface="メイリオ" panose="020B0604030504040204" pitchFamily="50" charset="-128"/>
-                <a:ea typeface="メイリオ" panose="020B0604030504040204" pitchFamily="50" charset="-128"/>
+                <a:latin typeface="BIZ UDPゴシック" panose="020B0400000000000000" pitchFamily="50" charset="-128"/>
+                <a:ea typeface="BIZ UDPゴシック" panose="020B0400000000000000" pitchFamily="50" charset="-128"/>
               </a:rPr>
               <a:t>定例進捗の確認 </a:t>
             </a:r>
             <a:r>
               <a:rPr lang="en-US" altLang="ja-JP" sz="1400" dirty="0">
-                <a:latin typeface="メイリオ" panose="020B0604030504040204" pitchFamily="50" charset="-128"/>
-                <a:ea typeface="メイリオ" panose="020B0604030504040204" pitchFamily="50" charset="-128"/>
+                <a:latin typeface="BIZ UDPゴシック" panose="020B0400000000000000" pitchFamily="50" charset="-128"/>
+                <a:ea typeface="BIZ UDPゴシック" panose="020B0400000000000000" pitchFamily="50" charset="-128"/>
               </a:rPr>
               <a:t>+ </a:t>
             </a:r>
             <a:r>
               <a:rPr lang="ja-JP" altLang="en-US" sz="1400" dirty="0">
-                <a:latin typeface="メイリオ" panose="020B0604030504040204" pitchFamily="50" charset="-128"/>
-                <a:ea typeface="メイリオ" panose="020B0604030504040204" pitchFamily="50" charset="-128"/>
+                <a:latin typeface="BIZ UDPゴシック" panose="020B0400000000000000" pitchFamily="50" charset="-128"/>
+                <a:ea typeface="BIZ UDPゴシック" panose="020B0400000000000000" pitchFamily="50" charset="-128"/>
               </a:rPr>
               <a:t>途中成果の中間レビュー</a:t>
             </a:r>
             <a:endParaRPr lang="en-US" altLang="ja-JP" sz="1400" dirty="0">
-              <a:latin typeface="メイリオ" panose="020B0604030504040204" pitchFamily="50" charset="-128"/>
-              <a:ea typeface="メイリオ" panose="020B0604030504040204" pitchFamily="50" charset="-128"/>
+              <a:latin typeface="BIZ UDPゴシック" panose="020B0400000000000000" pitchFamily="50" charset="-128"/>
+              <a:ea typeface="BIZ UDPゴシック" panose="020B0400000000000000" pitchFamily="50" charset="-128"/>
             </a:endParaRPr>
           </a:p>
           <a:p>
@@ -5659,22 +5591,22 @@
             </a:pPr>
             <a:r>
               <a:rPr kumimoji="1" lang="ja-JP" altLang="en-US" sz="1400" dirty="0">
-                <a:latin typeface="メイリオ" panose="020B0604030504040204" pitchFamily="50" charset="-128"/>
-                <a:ea typeface="メイリオ" panose="020B0604030504040204" pitchFamily="50" charset="-128"/>
+                <a:latin typeface="BIZ UDPゴシック" panose="020B0400000000000000" pitchFamily="50" charset="-128"/>
+                <a:ea typeface="BIZ UDPゴシック" panose="020B0400000000000000" pitchFamily="50" charset="-128"/>
               </a:rPr>
               <a:t>依存マトリクスの作成 </a:t>
             </a:r>
             <a:r>
               <a:rPr kumimoji="1" lang="en-US" altLang="ja-JP" sz="1400" dirty="0">
-                <a:latin typeface="メイリオ" panose="020B0604030504040204" pitchFamily="50" charset="-128"/>
-                <a:ea typeface="メイリオ" panose="020B0604030504040204" pitchFamily="50" charset="-128"/>
+                <a:latin typeface="BIZ UDPゴシック" panose="020B0400000000000000" pitchFamily="50" charset="-128"/>
+                <a:ea typeface="BIZ UDPゴシック" panose="020B0400000000000000" pitchFamily="50" charset="-128"/>
               </a:rPr>
               <a:t>+ </a:t>
             </a:r>
             <a:r>
               <a:rPr kumimoji="1" lang="ja-JP" altLang="en-US" sz="1400" dirty="0">
-                <a:latin typeface="メイリオ" panose="020B0604030504040204" pitchFamily="50" charset="-128"/>
-                <a:ea typeface="メイリオ" panose="020B0604030504040204" pitchFamily="50" charset="-128"/>
+                <a:latin typeface="BIZ UDPゴシック" panose="020B0400000000000000" pitchFamily="50" charset="-128"/>
+                <a:ea typeface="BIZ UDPゴシック" panose="020B0400000000000000" pitchFamily="50" charset="-128"/>
               </a:rPr>
               <a:t>影響範囲見える化</a:t>
             </a:r>
@@ -5715,28 +5647,28 @@
             </a:pPr>
             <a:r>
               <a:rPr lang="ja-JP" altLang="en-US" sz="1400" dirty="0">
-                <a:latin typeface="メイリオ" panose="020B0604030504040204" pitchFamily="50" charset="-128"/>
-                <a:ea typeface="メイリオ" panose="020B0604030504040204" pitchFamily="50" charset="-128"/>
+                <a:latin typeface="BIZ UDPゴシック" panose="020B0400000000000000" pitchFamily="50" charset="-128"/>
+                <a:ea typeface="BIZ UDPゴシック" panose="020B0400000000000000" pitchFamily="50" charset="-128"/>
               </a:rPr>
               <a:t>承認スケジュール事前確認 </a:t>
             </a:r>
             <a:r>
               <a:rPr lang="en-US" altLang="ja-JP" sz="1400" dirty="0">
-                <a:latin typeface="メイリオ" panose="020B0604030504040204" pitchFamily="50" charset="-128"/>
-                <a:ea typeface="メイリオ" panose="020B0604030504040204" pitchFamily="50" charset="-128"/>
+                <a:latin typeface="BIZ UDPゴシック" panose="020B0400000000000000" pitchFamily="50" charset="-128"/>
+                <a:ea typeface="BIZ UDPゴシック" panose="020B0400000000000000" pitchFamily="50" charset="-128"/>
               </a:rPr>
               <a:t>+ </a:t>
             </a:r>
             <a:r>
               <a:rPr lang="ja-JP" altLang="en-US" sz="1400" dirty="0">
-                <a:latin typeface="メイリオ" panose="020B0604030504040204" pitchFamily="50" charset="-128"/>
-                <a:ea typeface="メイリオ" panose="020B0604030504040204" pitchFamily="50" charset="-128"/>
+                <a:latin typeface="BIZ UDPゴシック" panose="020B0400000000000000" pitchFamily="50" charset="-128"/>
+                <a:ea typeface="BIZ UDPゴシック" panose="020B0400000000000000" pitchFamily="50" charset="-128"/>
               </a:rPr>
               <a:t>代理承認ルート確認</a:t>
             </a:r>
             <a:endParaRPr lang="en-US" altLang="ja-JP" sz="1400" dirty="0">
-              <a:latin typeface="メイリオ" panose="020B0604030504040204" pitchFamily="50" charset="-128"/>
-              <a:ea typeface="メイリオ" panose="020B0604030504040204" pitchFamily="50" charset="-128"/>
+              <a:latin typeface="BIZ UDPゴシック" panose="020B0400000000000000" pitchFamily="50" charset="-128"/>
+              <a:ea typeface="BIZ UDPゴシック" panose="020B0400000000000000" pitchFamily="50" charset="-128"/>
             </a:endParaRPr>
           </a:p>
           <a:p>
@@ -5746,14 +5678,14 @@
             </a:pPr>
             <a:r>
               <a:rPr lang="ja-JP" altLang="en-US" sz="1400" dirty="0">
-                <a:latin typeface="メイリオ" panose="020B0604030504040204" pitchFamily="50" charset="-128"/>
-                <a:ea typeface="メイリオ" panose="020B0604030504040204" pitchFamily="50" charset="-128"/>
+                <a:latin typeface="BIZ UDPゴシック" panose="020B0400000000000000" pitchFamily="50" charset="-128"/>
+                <a:ea typeface="BIZ UDPゴシック" panose="020B0400000000000000" pitchFamily="50" charset="-128"/>
               </a:rPr>
               <a:t>承認依頼時に判断ポイント・締め切りを明記する</a:t>
             </a:r>
             <a:endParaRPr lang="en-US" altLang="ja-JP" sz="1400" dirty="0">
-              <a:latin typeface="メイリオ" panose="020B0604030504040204" pitchFamily="50" charset="-128"/>
-              <a:ea typeface="メイリオ" panose="020B0604030504040204" pitchFamily="50" charset="-128"/>
+              <a:latin typeface="BIZ UDPゴシック" panose="020B0400000000000000" pitchFamily="50" charset="-128"/>
+              <a:ea typeface="BIZ UDPゴシック" panose="020B0400000000000000" pitchFamily="50" charset="-128"/>
             </a:endParaRPr>
           </a:p>
           <a:p>
@@ -5763,42 +5695,42 @@
             </a:pPr>
             <a:r>
               <a:rPr lang="ja-JP" altLang="en-US" sz="1400" dirty="0">
-                <a:latin typeface="メイリオ" panose="020B0604030504040204" pitchFamily="50" charset="-128"/>
-                <a:ea typeface="メイリオ" panose="020B0604030504040204" pitchFamily="50" charset="-128"/>
+                <a:latin typeface="BIZ UDPゴシック" panose="020B0400000000000000" pitchFamily="50" charset="-128"/>
+                <a:ea typeface="BIZ UDPゴシック" panose="020B0400000000000000" pitchFamily="50" charset="-128"/>
               </a:rPr>
               <a:t>判断材料</a:t>
             </a:r>
             <a:r>
               <a:rPr lang="en-US" altLang="ja-JP" sz="1400" dirty="0">
-                <a:latin typeface="メイリオ" panose="020B0604030504040204" pitchFamily="50" charset="-128"/>
-                <a:ea typeface="メイリオ" panose="020B0604030504040204" pitchFamily="50" charset="-128"/>
+                <a:latin typeface="BIZ UDPゴシック" panose="020B0400000000000000" pitchFamily="50" charset="-128"/>
+                <a:ea typeface="BIZ UDPゴシック" panose="020B0400000000000000" pitchFamily="50" charset="-128"/>
               </a:rPr>
               <a:t>(</a:t>
             </a:r>
             <a:r>
               <a:rPr lang="ja-JP" altLang="en-US" sz="1400" dirty="0">
-                <a:latin typeface="メイリオ" panose="020B0604030504040204" pitchFamily="50" charset="-128"/>
-                <a:ea typeface="メイリオ" panose="020B0604030504040204" pitchFamily="50" charset="-128"/>
+                <a:latin typeface="BIZ UDPゴシック" panose="020B0400000000000000" pitchFamily="50" charset="-128"/>
+                <a:ea typeface="BIZ UDPゴシック" panose="020B0400000000000000" pitchFamily="50" charset="-128"/>
               </a:rPr>
               <a:t>選択肢・理由・推奨案</a:t>
             </a:r>
             <a:r>
               <a:rPr lang="en-US" altLang="ja-JP" sz="1400" dirty="0">
-                <a:latin typeface="メイリオ" panose="020B0604030504040204" pitchFamily="50" charset="-128"/>
-                <a:ea typeface="メイリオ" panose="020B0604030504040204" pitchFamily="50" charset="-128"/>
+                <a:latin typeface="BIZ UDPゴシック" panose="020B0400000000000000" pitchFamily="50" charset="-128"/>
+                <a:ea typeface="BIZ UDPゴシック" panose="020B0400000000000000" pitchFamily="50" charset="-128"/>
               </a:rPr>
               <a:t>)</a:t>
             </a:r>
             <a:r>
               <a:rPr lang="ja-JP" altLang="en-US" sz="1400" dirty="0">
-                <a:latin typeface="メイリオ" panose="020B0604030504040204" pitchFamily="50" charset="-128"/>
-                <a:ea typeface="メイリオ" panose="020B0604030504040204" pitchFamily="50" charset="-128"/>
+                <a:latin typeface="BIZ UDPゴシック" panose="020B0400000000000000" pitchFamily="50" charset="-128"/>
+                <a:ea typeface="BIZ UDPゴシック" panose="020B0400000000000000" pitchFamily="50" charset="-128"/>
               </a:rPr>
               <a:t>を整理して依頼</a:t>
             </a:r>
             <a:endParaRPr lang="en-US" altLang="ja-JP" sz="1400" dirty="0">
-              <a:latin typeface="メイリオ" panose="020B0604030504040204" pitchFamily="50" charset="-128"/>
-              <a:ea typeface="メイリオ" panose="020B0604030504040204" pitchFamily="50" charset="-128"/>
+              <a:latin typeface="BIZ UDPゴシック" panose="020B0400000000000000" pitchFamily="50" charset="-128"/>
+              <a:ea typeface="BIZ UDPゴシック" panose="020B0400000000000000" pitchFamily="50" charset="-128"/>
             </a:endParaRPr>
           </a:p>
         </p:txBody>
@@ -5837,28 +5769,28 @@
             </a:pPr>
             <a:r>
               <a:rPr lang="ja-JP" altLang="en-US" sz="1400" dirty="0">
-                <a:latin typeface="メイリオ" panose="020B0604030504040204" pitchFamily="50" charset="-128"/>
-                <a:ea typeface="メイリオ" panose="020B0604030504040204" pitchFamily="50" charset="-128"/>
+                <a:latin typeface="BIZ UDPゴシック" panose="020B0400000000000000" pitchFamily="50" charset="-128"/>
+                <a:ea typeface="BIZ UDPゴシック" panose="020B0400000000000000" pitchFamily="50" charset="-128"/>
               </a:rPr>
               <a:t>完成イメージすり合わせ</a:t>
             </a:r>
             <a:r>
               <a:rPr lang="en-US" altLang="ja-JP" sz="1400" dirty="0">
-                <a:latin typeface="メイリオ" panose="020B0604030504040204" pitchFamily="50" charset="-128"/>
-                <a:ea typeface="メイリオ" panose="020B0604030504040204" pitchFamily="50" charset="-128"/>
+                <a:latin typeface="BIZ UDPゴシック" panose="020B0400000000000000" pitchFamily="50" charset="-128"/>
+                <a:ea typeface="BIZ UDPゴシック" panose="020B0400000000000000" pitchFamily="50" charset="-128"/>
               </a:rPr>
               <a:t>MTG</a:t>
             </a:r>
             <a:r>
               <a:rPr lang="ja-JP" altLang="en-US" sz="1400" dirty="0">
-                <a:latin typeface="メイリオ" panose="020B0604030504040204" pitchFamily="50" charset="-128"/>
-                <a:ea typeface="メイリオ" panose="020B0604030504040204" pitchFamily="50" charset="-128"/>
+                <a:latin typeface="BIZ UDPゴシック" panose="020B0400000000000000" pitchFamily="50" charset="-128"/>
+                <a:ea typeface="BIZ UDPゴシック" panose="020B0400000000000000" pitchFamily="50" charset="-128"/>
               </a:rPr>
               <a:t>を実施</a:t>
             </a:r>
             <a:endParaRPr lang="en-US" altLang="ja-JP" sz="1400" dirty="0">
-              <a:latin typeface="メイリオ" panose="020B0604030504040204" pitchFamily="50" charset="-128"/>
-              <a:ea typeface="メイリオ" panose="020B0604030504040204" pitchFamily="50" charset="-128"/>
+              <a:latin typeface="BIZ UDPゴシック" panose="020B0400000000000000" pitchFamily="50" charset="-128"/>
+              <a:ea typeface="BIZ UDPゴシック" panose="020B0400000000000000" pitchFamily="50" charset="-128"/>
             </a:endParaRPr>
           </a:p>
           <a:p>
@@ -5868,14 +5800,14 @@
             </a:pPr>
             <a:r>
               <a:rPr lang="ja-JP" altLang="en-US" sz="1400" dirty="0">
-                <a:latin typeface="メイリオ" panose="020B0604030504040204" pitchFamily="50" charset="-128"/>
-                <a:ea typeface="メイリオ" panose="020B0604030504040204" pitchFamily="50" charset="-128"/>
+                <a:latin typeface="BIZ UDPゴシック" panose="020B0400000000000000" pitchFamily="50" charset="-128"/>
+                <a:ea typeface="BIZ UDPゴシック" panose="020B0400000000000000" pitchFamily="50" charset="-128"/>
               </a:rPr>
               <a:t>スコープ確認書・合意文書の活用</a:t>
             </a:r>
             <a:endParaRPr lang="en-US" altLang="ja-JP" sz="1400" dirty="0">
-              <a:latin typeface="メイリオ" panose="020B0604030504040204" pitchFamily="50" charset="-128"/>
-              <a:ea typeface="メイリオ" panose="020B0604030504040204" pitchFamily="50" charset="-128"/>
+              <a:latin typeface="BIZ UDPゴシック" panose="020B0400000000000000" pitchFamily="50" charset="-128"/>
+              <a:ea typeface="BIZ UDPゴシック" panose="020B0400000000000000" pitchFamily="50" charset="-128"/>
             </a:endParaRPr>
           </a:p>
           <a:p>
@@ -5885,8 +5817,8 @@
             </a:pPr>
             <a:r>
               <a:rPr lang="ja-JP" altLang="en-US" sz="1400" dirty="0">
-                <a:latin typeface="メイリオ" panose="020B0604030504040204" pitchFamily="50" charset="-128"/>
-                <a:ea typeface="メイリオ" panose="020B0604030504040204" pitchFamily="50" charset="-128"/>
+                <a:latin typeface="BIZ UDPゴシック" panose="020B0400000000000000" pitchFamily="50" charset="-128"/>
+                <a:ea typeface="BIZ UDPゴシック" panose="020B0400000000000000" pitchFamily="50" charset="-128"/>
               </a:rPr>
               <a:t>方針変更があったら即全体共有</a:t>
             </a:r>
@@ -5927,14 +5859,14 @@
             </a:pPr>
             <a:r>
               <a:rPr kumimoji="1" lang="ja-JP" altLang="en-US" sz="1400" dirty="0">
-                <a:latin typeface="メイリオ" panose="020B0604030504040204" pitchFamily="50" charset="-128"/>
-                <a:ea typeface="メイリオ" panose="020B0604030504040204" pitchFamily="50" charset="-128"/>
+                <a:latin typeface="BIZ UDPゴシック" panose="020B0400000000000000" pitchFamily="50" charset="-128"/>
+                <a:ea typeface="BIZ UDPゴシック" panose="020B0400000000000000" pitchFamily="50" charset="-128"/>
               </a:rPr>
               <a:t>引継ぎ内容を整理・文書化・関係者共有</a:t>
             </a:r>
             <a:endParaRPr kumimoji="1" lang="en-US" altLang="ja-JP" sz="1400" dirty="0">
-              <a:latin typeface="メイリオ" panose="020B0604030504040204" pitchFamily="50" charset="-128"/>
-              <a:ea typeface="メイリオ" panose="020B0604030504040204" pitchFamily="50" charset="-128"/>
+              <a:latin typeface="BIZ UDPゴシック" panose="020B0400000000000000" pitchFamily="50" charset="-128"/>
+              <a:ea typeface="BIZ UDPゴシック" panose="020B0400000000000000" pitchFamily="50" charset="-128"/>
             </a:endParaRPr>
           </a:p>
           <a:p>
@@ -5944,14 +5876,14 @@
             </a:pPr>
             <a:r>
               <a:rPr lang="ja-JP" altLang="en-US" sz="1400" dirty="0">
-                <a:latin typeface="メイリオ" panose="020B0604030504040204" pitchFamily="50" charset="-128"/>
-                <a:ea typeface="メイリオ" panose="020B0604030504040204" pitchFamily="50" charset="-128"/>
+                <a:latin typeface="BIZ UDPゴシック" panose="020B0400000000000000" pitchFamily="50" charset="-128"/>
+                <a:ea typeface="BIZ UDPゴシック" panose="020B0400000000000000" pitchFamily="50" charset="-128"/>
               </a:rPr>
               <a:t>ステークホルダー一覧を最新化・定期レビュー</a:t>
             </a:r>
             <a:endParaRPr kumimoji="1" lang="ja-JP" altLang="en-US" sz="1400" dirty="0">
-              <a:latin typeface="メイリオ" panose="020B0604030504040204" pitchFamily="50" charset="-128"/>
-              <a:ea typeface="メイリオ" panose="020B0604030504040204" pitchFamily="50" charset="-128"/>
+              <a:latin typeface="BIZ UDPゴシック" panose="020B0400000000000000" pitchFamily="50" charset="-128"/>
+              <a:ea typeface="BIZ UDPゴシック" panose="020B0400000000000000" pitchFamily="50" charset="-128"/>
             </a:endParaRPr>
           </a:p>
         </p:txBody>
@@ -5990,14 +5922,14 @@
             </a:pPr>
             <a:r>
               <a:rPr lang="ja-JP" altLang="en-US" sz="1400" dirty="0">
-                <a:latin typeface="メイリオ" panose="020B0604030504040204" pitchFamily="50" charset="-128"/>
-                <a:ea typeface="メイリオ" panose="020B0604030504040204" pitchFamily="50" charset="-128"/>
+                <a:latin typeface="BIZ UDPゴシック" panose="020B0400000000000000" pitchFamily="50" charset="-128"/>
+                <a:ea typeface="BIZ UDPゴシック" panose="020B0400000000000000" pitchFamily="50" charset="-128"/>
               </a:rPr>
               <a:t>成果物の完成イメージがズレている</a:t>
             </a:r>
             <a:endParaRPr lang="en-US" altLang="ja-JP" sz="1400" dirty="0">
-              <a:latin typeface="メイリオ" panose="020B0604030504040204" pitchFamily="50" charset="-128"/>
-              <a:ea typeface="メイリオ" panose="020B0604030504040204" pitchFamily="50" charset="-128"/>
+              <a:latin typeface="BIZ UDPゴシック" panose="020B0400000000000000" pitchFamily="50" charset="-128"/>
+              <a:ea typeface="BIZ UDPゴシック" panose="020B0400000000000000" pitchFamily="50" charset="-128"/>
             </a:endParaRPr>
           </a:p>
           <a:p>
@@ -6007,14 +5939,14 @@
             </a:pPr>
             <a:r>
               <a:rPr lang="ja-JP" altLang="en-US" sz="1400" dirty="0">
-                <a:latin typeface="メイリオ" panose="020B0604030504040204" pitchFamily="50" charset="-128"/>
-                <a:ea typeface="メイリオ" panose="020B0604030504040204" pitchFamily="50" charset="-128"/>
+                <a:latin typeface="BIZ UDPゴシック" panose="020B0400000000000000" pitchFamily="50" charset="-128"/>
+                <a:ea typeface="BIZ UDPゴシック" panose="020B0400000000000000" pitchFamily="50" charset="-128"/>
               </a:rPr>
               <a:t>依頼者と実行者で「どこまでやるか」がズレている</a:t>
             </a:r>
             <a:endParaRPr lang="en-US" altLang="ja-JP" sz="1400" dirty="0">
-              <a:latin typeface="メイリオ" panose="020B0604030504040204" pitchFamily="50" charset="-128"/>
-              <a:ea typeface="メイリオ" panose="020B0604030504040204" pitchFamily="50" charset="-128"/>
+              <a:latin typeface="BIZ UDPゴシック" panose="020B0400000000000000" pitchFamily="50" charset="-128"/>
+              <a:ea typeface="BIZ UDPゴシック" panose="020B0400000000000000" pitchFamily="50" charset="-128"/>
             </a:endParaRPr>
           </a:p>
           <a:p>
@@ -6024,8 +5956,8 @@
             </a:pPr>
             <a:r>
               <a:rPr lang="ja-JP" altLang="en-US" sz="1400" dirty="0">
-                <a:latin typeface="メイリオ" panose="020B0604030504040204" pitchFamily="50" charset="-128"/>
-                <a:ea typeface="メイリオ" panose="020B0604030504040204" pitchFamily="50" charset="-128"/>
+                <a:latin typeface="BIZ UDPゴシック" panose="020B0400000000000000" pitchFamily="50" charset="-128"/>
+                <a:ea typeface="BIZ UDPゴシック" panose="020B0400000000000000" pitchFamily="50" charset="-128"/>
               </a:rPr>
               <a:t>途中で方針がかわったのに共有されていない</a:t>
             </a:r>
@@ -6088,8 +6020,8 @@
                 <a:solidFill>
                   <a:schemeClr val="bg1"/>
                 </a:solidFill>
-                <a:latin typeface="メイリオ" panose="020B0604030504040204" pitchFamily="50" charset="-128"/>
-                <a:ea typeface="メイリオ" panose="020B0604030504040204" pitchFamily="50" charset="-128"/>
+                <a:latin typeface="BIZ UDPゴシック" panose="020B0400000000000000" pitchFamily="50" charset="-128"/>
+                <a:ea typeface="BIZ UDPゴシック" panose="020B0400000000000000" pitchFamily="50" charset="-128"/>
               </a:rPr>
               <a:t>対応策・狙い</a:t>
             </a:r>
@@ -6188,10 +6120,16 @@
           <a:lstStyle/>
           <a:p>
             <a:r>
-              <a:rPr lang="ja-JP" altLang="en-US"/>
+              <a:rPr lang="ja-JP" altLang="en-US">
+                <a:latin typeface="BIZ UDPゴシック" panose="020B0400000000000000" pitchFamily="50" charset="-128"/>
+                <a:ea typeface="BIZ UDPゴシック" panose="020B0400000000000000" pitchFamily="50" charset="-128"/>
+              </a:rPr>
               <a:t>出所：</a:t>
             </a:r>
-            <a:endParaRPr lang="ja-JP" altLang="en-US" dirty="0"/>
+            <a:endParaRPr lang="ja-JP" altLang="en-US" dirty="0">
+              <a:latin typeface="BIZ UDPゴシック" panose="020B0400000000000000" pitchFamily="50" charset="-128"/>
+              <a:ea typeface="BIZ UDPゴシック" panose="020B0400000000000000" pitchFamily="50" charset="-128"/>
+            </a:endParaRPr>
           </a:p>
         </p:txBody>
       </p:sp>
@@ -6226,14 +6164,20 @@
               <a:buChar char="ü"/>
             </a:pPr>
             <a:fld id="{DCB5AA93-092B-49A1-87A7-3C88D5F38AD7}" type="slidenum">
-              <a:rPr lang="ja-JP" altLang="en-US" smtClean="0"/>
+              <a:rPr lang="ja-JP" altLang="en-US" smtClean="0">
+                <a:latin typeface="BIZ UDPゴシック" panose="020B0400000000000000" pitchFamily="50" charset="-128"/>
+                <a:ea typeface="BIZ UDPゴシック" panose="020B0400000000000000" pitchFamily="50" charset="-128"/>
+              </a:rPr>
               <a:pPr marL="171450" indent="-171450">
                 <a:buFont typeface="Wingdings" panose="05000000000000000000" pitchFamily="2" charset="2"/>
                 <a:buChar char="ü"/>
               </a:pPr>
               <a:t>2</a:t>
             </a:fld>
-            <a:endParaRPr lang="ja-JP" altLang="en-US"/>
+            <a:endParaRPr lang="ja-JP" altLang="en-US">
+              <a:latin typeface="BIZ UDPゴシック" panose="020B0400000000000000" pitchFamily="50" charset="-128"/>
+              <a:ea typeface="BIZ UDPゴシック" panose="020B0400000000000000" pitchFamily="50" charset="-128"/>
+            </a:endParaRPr>
           </a:p>
         </p:txBody>
       </p:sp>
@@ -6296,8 +6240,8 @@
                     <a:lumOff val="25000"/>
                   </a:schemeClr>
                 </a:solidFill>
-                <a:latin typeface="メイリオ" panose="020B0604030504040204" pitchFamily="50" charset="-128"/>
-                <a:ea typeface="メイリオ" panose="020B0604030504040204" pitchFamily="50" charset="-128"/>
+                <a:latin typeface="BIZ UDPゴシック" panose="020B0400000000000000" pitchFamily="50" charset="-128"/>
+                <a:ea typeface="BIZ UDPゴシック" panose="020B0400000000000000" pitchFamily="50" charset="-128"/>
               </a:rPr>
               <a:t>期間</a:t>
             </a:r>
@@ -6308,8 +6252,8 @@
                   <a:lumOff val="25000"/>
                 </a:schemeClr>
               </a:solidFill>
-              <a:latin typeface="メイリオ" panose="020B0604030504040204" pitchFamily="50" charset="-128"/>
-              <a:ea typeface="メイリオ" panose="020B0604030504040204" pitchFamily="50" charset="-128"/>
+              <a:latin typeface="BIZ UDPゴシック" panose="020B0400000000000000" pitchFamily="50" charset="-128"/>
+              <a:ea typeface="BIZ UDPゴシック" panose="020B0400000000000000" pitchFamily="50" charset="-128"/>
             </a:endParaRPr>
           </a:p>
         </p:txBody>
@@ -6373,8 +6317,8 @@
                     <a:lumOff val="25000"/>
                   </a:schemeClr>
                 </a:solidFill>
-                <a:latin typeface="メイリオ" panose="020B0604030504040204" pitchFamily="50" charset="-128"/>
-                <a:ea typeface="メイリオ" panose="020B0604030504040204" pitchFamily="50" charset="-128"/>
+                <a:latin typeface="BIZ UDPゴシック" panose="020B0400000000000000" pitchFamily="50" charset="-128"/>
+                <a:ea typeface="BIZ UDPゴシック" panose="020B0400000000000000" pitchFamily="50" charset="-128"/>
               </a:rPr>
               <a:t>目的</a:t>
             </a:r>
@@ -6385,8 +6329,8 @@
                   <a:lumOff val="25000"/>
                 </a:schemeClr>
               </a:solidFill>
-              <a:latin typeface="メイリオ" panose="020B0604030504040204" pitchFamily="50" charset="-128"/>
-              <a:ea typeface="メイリオ" panose="020B0604030504040204" pitchFamily="50" charset="-128"/>
+              <a:latin typeface="BIZ UDPゴシック" panose="020B0400000000000000" pitchFamily="50" charset="-128"/>
+              <a:ea typeface="BIZ UDPゴシック" panose="020B0400000000000000" pitchFamily="50" charset="-128"/>
             </a:endParaRPr>
           </a:p>
         </p:txBody>
@@ -6450,8 +6394,8 @@
                     <a:lumOff val="25000"/>
                   </a:schemeClr>
                 </a:solidFill>
-                <a:latin typeface="メイリオ" panose="020B0604030504040204" pitchFamily="50" charset="-128"/>
-                <a:ea typeface="メイリオ" panose="020B0604030504040204" pitchFamily="50" charset="-128"/>
+                <a:latin typeface="BIZ UDPゴシック" panose="020B0400000000000000" pitchFamily="50" charset="-128"/>
+                <a:ea typeface="BIZ UDPゴシック" panose="020B0400000000000000" pitchFamily="50" charset="-128"/>
               </a:rPr>
               <a:t>意思決定</a:t>
             </a:r>
@@ -6462,8 +6406,8 @@
                   <a:lumOff val="25000"/>
                 </a:schemeClr>
               </a:solidFill>
-              <a:latin typeface="メイリオ" panose="020B0604030504040204" pitchFamily="50" charset="-128"/>
-              <a:ea typeface="メイリオ" panose="020B0604030504040204" pitchFamily="50" charset="-128"/>
+              <a:latin typeface="BIZ UDPゴシック" panose="020B0400000000000000" pitchFamily="50" charset="-128"/>
+              <a:ea typeface="BIZ UDPゴシック" panose="020B0400000000000000" pitchFamily="50" charset="-128"/>
             </a:endParaRPr>
           </a:p>
         </p:txBody>
@@ -6527,8 +6471,8 @@
                     <a:lumOff val="25000"/>
                   </a:schemeClr>
                 </a:solidFill>
-                <a:latin typeface="メイリオ" panose="020B0604030504040204" pitchFamily="50" charset="-128"/>
-                <a:ea typeface="メイリオ" panose="020B0604030504040204" pitchFamily="50" charset="-128"/>
+                <a:latin typeface="BIZ UDPゴシック" panose="020B0400000000000000" pitchFamily="50" charset="-128"/>
+                <a:ea typeface="BIZ UDPゴシック" panose="020B0400000000000000" pitchFamily="50" charset="-128"/>
               </a:rPr>
               <a:t>実施内容</a:t>
             </a:r>
@@ -6539,8 +6483,8 @@
                   <a:lumOff val="25000"/>
                 </a:schemeClr>
               </a:solidFill>
-              <a:latin typeface="メイリオ" panose="020B0604030504040204" pitchFamily="50" charset="-128"/>
-              <a:ea typeface="メイリオ" panose="020B0604030504040204" pitchFamily="50" charset="-128"/>
+              <a:latin typeface="BIZ UDPゴシック" panose="020B0400000000000000" pitchFamily="50" charset="-128"/>
+              <a:ea typeface="BIZ UDPゴシック" panose="020B0400000000000000" pitchFamily="50" charset="-128"/>
             </a:endParaRPr>
           </a:p>
         </p:txBody>
@@ -6604,8 +6548,8 @@
                     <a:lumOff val="25000"/>
                   </a:schemeClr>
                 </a:solidFill>
-                <a:latin typeface="メイリオ" panose="020B0604030504040204" pitchFamily="50" charset="-128"/>
-                <a:ea typeface="メイリオ" panose="020B0604030504040204" pitchFamily="50" charset="-128"/>
+                <a:latin typeface="BIZ UDPゴシック" panose="020B0400000000000000" pitchFamily="50" charset="-128"/>
+                <a:ea typeface="BIZ UDPゴシック" panose="020B0400000000000000" pitchFamily="50" charset="-128"/>
               </a:rPr>
               <a:t>成果物</a:t>
             </a:r>
@@ -6616,8 +6560,8 @@
                   <a:lumOff val="25000"/>
                 </a:schemeClr>
               </a:solidFill>
-              <a:latin typeface="メイリオ" panose="020B0604030504040204" pitchFamily="50" charset="-128"/>
-              <a:ea typeface="メイリオ" panose="020B0604030504040204" pitchFamily="50" charset="-128"/>
+              <a:latin typeface="BIZ UDPゴシック" panose="020B0400000000000000" pitchFamily="50" charset="-128"/>
+              <a:ea typeface="BIZ UDPゴシック" panose="020B0400000000000000" pitchFamily="50" charset="-128"/>
             </a:endParaRPr>
           </a:p>
         </p:txBody>
@@ -6680,8 +6624,8 @@
                     <a:lumOff val="25000"/>
                   </a:schemeClr>
                 </a:solidFill>
-                <a:latin typeface="メイリオ" panose="020B0604030504040204" pitchFamily="50" charset="-128"/>
-                <a:ea typeface="メイリオ" panose="020B0604030504040204" pitchFamily="50" charset="-128"/>
+                <a:latin typeface="BIZ UDPゴシック" panose="020B0400000000000000" pitchFamily="50" charset="-128"/>
+                <a:ea typeface="BIZ UDPゴシック" panose="020B0400000000000000" pitchFamily="50" charset="-128"/>
               </a:rPr>
               <a:t>フェーズ</a:t>
             </a:r>
@@ -6693,8 +6637,8 @@
                     <a:lumOff val="25000"/>
                   </a:schemeClr>
                 </a:solidFill>
-                <a:latin typeface="メイリオ" panose="020B0604030504040204" pitchFamily="50" charset="-128"/>
-                <a:ea typeface="メイリオ" panose="020B0604030504040204" pitchFamily="50" charset="-128"/>
+                <a:latin typeface="BIZ UDPゴシック" panose="020B0400000000000000" pitchFamily="50" charset="-128"/>
+                <a:ea typeface="BIZ UDPゴシック" panose="020B0400000000000000" pitchFamily="50" charset="-128"/>
               </a:rPr>
               <a:t> 0</a:t>
             </a:r>
@@ -6709,8 +6653,8 @@
                     <a:lumOff val="25000"/>
                   </a:schemeClr>
                 </a:solidFill>
-                <a:latin typeface="メイリオ" panose="020B0604030504040204" pitchFamily="50" charset="-128"/>
-                <a:ea typeface="メイリオ" panose="020B0604030504040204" pitchFamily="50" charset="-128"/>
+                <a:latin typeface="BIZ UDPゴシック" panose="020B0400000000000000" pitchFamily="50" charset="-128"/>
+                <a:ea typeface="BIZ UDPゴシック" panose="020B0400000000000000" pitchFamily="50" charset="-128"/>
               </a:rPr>
               <a:t>2025/10 – 2025/12</a:t>
             </a:r>
@@ -6721,8 +6665,8 @@
                   <a:lumOff val="25000"/>
                 </a:schemeClr>
               </a:solidFill>
-              <a:latin typeface="メイリオ" panose="020B0604030504040204" pitchFamily="50" charset="-128"/>
-              <a:ea typeface="メイリオ" panose="020B0604030504040204" pitchFamily="50" charset="-128"/>
+              <a:latin typeface="BIZ UDPゴシック" panose="020B0400000000000000" pitchFamily="50" charset="-128"/>
+              <a:ea typeface="BIZ UDPゴシック" panose="020B0400000000000000" pitchFamily="50" charset="-128"/>
             </a:endParaRPr>
           </a:p>
         </p:txBody>
@@ -6781,8 +6725,8 @@
                     <a:lumOff val="25000"/>
                   </a:schemeClr>
                 </a:solidFill>
-                <a:latin typeface="メイリオ" panose="020B0604030504040204" pitchFamily="50" charset="-128"/>
-                <a:ea typeface="メイリオ" panose="020B0604030504040204" pitchFamily="50" charset="-128"/>
+                <a:latin typeface="BIZ UDPゴシック" panose="020B0400000000000000" pitchFamily="50" charset="-128"/>
+                <a:ea typeface="BIZ UDPゴシック" panose="020B0400000000000000" pitchFamily="50" charset="-128"/>
               </a:rPr>
               <a:t>3</a:t>
             </a:r>
@@ -6794,8 +6738,8 @@
                     <a:lumOff val="25000"/>
                   </a:schemeClr>
                 </a:solidFill>
-                <a:latin typeface="メイリオ" panose="020B0604030504040204" pitchFamily="50" charset="-128"/>
-                <a:ea typeface="メイリオ" panose="020B0604030504040204" pitchFamily="50" charset="-128"/>
+                <a:latin typeface="BIZ UDPゴシック" panose="020B0400000000000000" pitchFamily="50" charset="-128"/>
+                <a:ea typeface="BIZ UDPゴシック" panose="020B0400000000000000" pitchFamily="50" charset="-128"/>
               </a:rPr>
               <a:t>か月</a:t>
             </a:r>
@@ -6860,8 +6804,8 @@
                     <a:lumOff val="25000"/>
                   </a:schemeClr>
                 </a:solidFill>
-                <a:latin typeface="メイリオ" panose="020B0604030504040204" pitchFamily="50" charset="-128"/>
-                <a:ea typeface="メイリオ" panose="020B0604030504040204" pitchFamily="50" charset="-128"/>
+                <a:latin typeface="BIZ UDPゴシック" panose="020B0400000000000000" pitchFamily="50" charset="-128"/>
+                <a:ea typeface="BIZ UDPゴシック" panose="020B0400000000000000" pitchFamily="50" charset="-128"/>
               </a:rPr>
               <a:t>マーケティング戦略・戦術の構築</a:t>
             </a:r>
@@ -6872,8 +6816,8 @@
                   <a:lumOff val="25000"/>
                 </a:schemeClr>
               </a:solidFill>
-              <a:latin typeface="メイリオ" panose="020B0604030504040204" pitchFamily="50" charset="-128"/>
-              <a:ea typeface="メイリオ" panose="020B0604030504040204" pitchFamily="50" charset="-128"/>
+              <a:latin typeface="BIZ UDPゴシック" panose="020B0400000000000000" pitchFamily="50" charset="-128"/>
+              <a:ea typeface="BIZ UDPゴシック" panose="020B0400000000000000" pitchFamily="50" charset="-128"/>
             </a:endParaRPr>
           </a:p>
           <a:p>
@@ -6886,8 +6830,8 @@
                     <a:lumOff val="25000"/>
                   </a:schemeClr>
                 </a:solidFill>
-                <a:latin typeface="メイリオ" panose="020B0604030504040204" pitchFamily="50" charset="-128"/>
-                <a:ea typeface="メイリオ" panose="020B0604030504040204" pitchFamily="50" charset="-128"/>
+                <a:latin typeface="BIZ UDPゴシック" panose="020B0400000000000000" pitchFamily="50" charset="-128"/>
+                <a:ea typeface="BIZ UDPゴシック" panose="020B0400000000000000" pitchFamily="50" charset="-128"/>
               </a:rPr>
               <a:t>KGI</a:t>
             </a:r>
@@ -6899,8 +6843,8 @@
                     <a:lumOff val="25000"/>
                   </a:schemeClr>
                 </a:solidFill>
-                <a:latin typeface="メイリオ" panose="020B0604030504040204" pitchFamily="50" charset="-128"/>
-                <a:ea typeface="メイリオ" panose="020B0604030504040204" pitchFamily="50" charset="-128"/>
+                <a:latin typeface="BIZ UDPゴシック" panose="020B0400000000000000" pitchFamily="50" charset="-128"/>
+                <a:ea typeface="BIZ UDPゴシック" panose="020B0400000000000000" pitchFamily="50" charset="-128"/>
               </a:rPr>
               <a:t>・</a:t>
             </a:r>
@@ -6912,8 +6856,8 @@
                     <a:lumOff val="25000"/>
                   </a:schemeClr>
                 </a:solidFill>
-                <a:latin typeface="メイリオ" panose="020B0604030504040204" pitchFamily="50" charset="-128"/>
-                <a:ea typeface="メイリオ" panose="020B0604030504040204" pitchFamily="50" charset="-128"/>
+                <a:latin typeface="BIZ UDPゴシック" panose="020B0400000000000000" pitchFamily="50" charset="-128"/>
+                <a:ea typeface="BIZ UDPゴシック" panose="020B0400000000000000" pitchFamily="50" charset="-128"/>
               </a:rPr>
               <a:t>KPI</a:t>
             </a:r>
@@ -6925,8 +6869,8 @@
                     <a:lumOff val="25000"/>
                   </a:schemeClr>
                 </a:solidFill>
-                <a:latin typeface="メイリオ" panose="020B0604030504040204" pitchFamily="50" charset="-128"/>
-                <a:ea typeface="メイリオ" panose="020B0604030504040204" pitchFamily="50" charset="-128"/>
+                <a:latin typeface="BIZ UDPゴシック" panose="020B0400000000000000" pitchFamily="50" charset="-128"/>
+                <a:ea typeface="BIZ UDPゴシック" panose="020B0400000000000000" pitchFamily="50" charset="-128"/>
               </a:rPr>
               <a:t>設計</a:t>
             </a:r>
@@ -6938,8 +6882,8 @@
                     <a:lumOff val="25000"/>
                   </a:schemeClr>
                 </a:solidFill>
-                <a:latin typeface="メイリオ" panose="020B0604030504040204" pitchFamily="50" charset="-128"/>
-                <a:ea typeface="メイリオ" panose="020B0604030504040204" pitchFamily="50" charset="-128"/>
+                <a:latin typeface="BIZ UDPゴシック" panose="020B0400000000000000" pitchFamily="50" charset="-128"/>
+                <a:ea typeface="BIZ UDPゴシック" panose="020B0400000000000000" pitchFamily="50" charset="-128"/>
               </a:rPr>
               <a:t>/</a:t>
             </a:r>
@@ -6951,8 +6895,8 @@
                     <a:lumOff val="25000"/>
                   </a:schemeClr>
                 </a:solidFill>
-                <a:latin typeface="メイリオ" panose="020B0604030504040204" pitchFamily="50" charset="-128"/>
-                <a:ea typeface="メイリオ" panose="020B0604030504040204" pitchFamily="50" charset="-128"/>
+                <a:latin typeface="BIZ UDPゴシック" panose="020B0400000000000000" pitchFamily="50" charset="-128"/>
+                <a:ea typeface="BIZ UDPゴシック" panose="020B0400000000000000" pitchFamily="50" charset="-128"/>
               </a:rPr>
               <a:t>企画設計</a:t>
             </a:r>
@@ -6964,8 +6908,8 @@
                     <a:lumOff val="25000"/>
                   </a:schemeClr>
                 </a:solidFill>
-                <a:latin typeface="メイリオ" panose="020B0604030504040204" pitchFamily="50" charset="-128"/>
-                <a:ea typeface="メイリオ" panose="020B0604030504040204" pitchFamily="50" charset="-128"/>
+                <a:latin typeface="BIZ UDPゴシック" panose="020B0400000000000000" pitchFamily="50" charset="-128"/>
+                <a:ea typeface="BIZ UDPゴシック" panose="020B0400000000000000" pitchFamily="50" charset="-128"/>
               </a:rPr>
               <a:t>/</a:t>
             </a:r>
@@ -6977,8 +6921,8 @@
                     <a:lumOff val="25000"/>
                   </a:schemeClr>
                 </a:solidFill>
-                <a:latin typeface="メイリオ" panose="020B0604030504040204" pitchFamily="50" charset="-128"/>
-                <a:ea typeface="メイリオ" panose="020B0604030504040204" pitchFamily="50" charset="-128"/>
+                <a:latin typeface="BIZ UDPゴシック" panose="020B0400000000000000" pitchFamily="50" charset="-128"/>
+                <a:ea typeface="BIZ UDPゴシック" panose="020B0400000000000000" pitchFamily="50" charset="-128"/>
               </a:rPr>
               <a:t>検証</a:t>
             </a:r>
@@ -6989,8 +6933,8 @@
                   <a:lumOff val="25000"/>
                 </a:schemeClr>
               </a:solidFill>
-              <a:latin typeface="メイリオ" panose="020B0604030504040204" pitchFamily="50" charset="-128"/>
-              <a:ea typeface="メイリオ" panose="020B0604030504040204" pitchFamily="50" charset="-128"/>
+              <a:latin typeface="BIZ UDPゴシック" panose="020B0400000000000000" pitchFamily="50" charset="-128"/>
+              <a:ea typeface="BIZ UDPゴシック" panose="020B0400000000000000" pitchFamily="50" charset="-128"/>
             </a:endParaRPr>
           </a:p>
         </p:txBody>
@@ -7029,14 +6973,14 @@
             </a:pPr>
             <a:r>
               <a:rPr kumimoji="1" lang="ja-JP" altLang="en-US" sz="1400" dirty="0">
-                <a:latin typeface="メイリオ" panose="020B0604030504040204" pitchFamily="50" charset="-128"/>
-                <a:ea typeface="メイリオ" panose="020B0604030504040204" pitchFamily="50" charset="-128"/>
+                <a:latin typeface="BIZ UDPゴシック" panose="020B0400000000000000" pitchFamily="50" charset="-128"/>
+                <a:ea typeface="BIZ UDPゴシック" panose="020B0400000000000000" pitchFamily="50" charset="-128"/>
               </a:rPr>
               <a:t>ロードマップ</a:t>
             </a:r>
             <a:endParaRPr kumimoji="1" lang="en-US" altLang="ja-JP" sz="1400" dirty="0">
-              <a:latin typeface="メイリオ" panose="020B0604030504040204" pitchFamily="50" charset="-128"/>
-              <a:ea typeface="メイリオ" panose="020B0604030504040204" pitchFamily="50" charset="-128"/>
+              <a:latin typeface="BIZ UDPゴシック" panose="020B0400000000000000" pitchFamily="50" charset="-128"/>
+              <a:ea typeface="BIZ UDPゴシック" panose="020B0400000000000000" pitchFamily="50" charset="-128"/>
             </a:endParaRPr>
           </a:p>
           <a:p>
@@ -7046,14 +6990,14 @@
             </a:pPr>
             <a:r>
               <a:rPr lang="ja-JP" altLang="en-US" sz="1400" dirty="0">
-                <a:latin typeface="メイリオ" panose="020B0604030504040204" pitchFamily="50" charset="-128"/>
-                <a:ea typeface="メイリオ" panose="020B0604030504040204" pitchFamily="50" charset="-128"/>
+                <a:latin typeface="BIZ UDPゴシック" panose="020B0400000000000000" pitchFamily="50" charset="-128"/>
+                <a:ea typeface="BIZ UDPゴシック" panose="020B0400000000000000" pitchFamily="50" charset="-128"/>
               </a:rPr>
               <a:t>施策の方向性</a:t>
             </a:r>
             <a:endParaRPr lang="en-US" altLang="ja-JP" sz="1400" dirty="0">
-              <a:latin typeface="メイリオ" panose="020B0604030504040204" pitchFamily="50" charset="-128"/>
-              <a:ea typeface="メイリオ" panose="020B0604030504040204" pitchFamily="50" charset="-128"/>
+              <a:latin typeface="BIZ UDPゴシック" panose="020B0400000000000000" pitchFamily="50" charset="-128"/>
+              <a:ea typeface="BIZ UDPゴシック" panose="020B0400000000000000" pitchFamily="50" charset="-128"/>
             </a:endParaRPr>
           </a:p>
           <a:p>
@@ -7063,21 +7007,21 @@
             </a:pPr>
             <a:r>
               <a:rPr kumimoji="1" lang="en-US" altLang="ja-JP" sz="1400" dirty="0">
-                <a:latin typeface="メイリオ" panose="020B0604030504040204" pitchFamily="50" charset="-128"/>
-                <a:ea typeface="メイリオ" panose="020B0604030504040204" pitchFamily="50" charset="-128"/>
+                <a:latin typeface="BIZ UDPゴシック" panose="020B0400000000000000" pitchFamily="50" charset="-128"/>
+                <a:ea typeface="BIZ UDPゴシック" panose="020B0400000000000000" pitchFamily="50" charset="-128"/>
               </a:rPr>
               <a:t>KGI/KPI</a:t>
             </a:r>
             <a:r>
               <a:rPr kumimoji="1" lang="ja-JP" altLang="en-US" sz="1400" dirty="0">
-                <a:latin typeface="メイリオ" panose="020B0604030504040204" pitchFamily="50" charset="-128"/>
-                <a:ea typeface="メイリオ" panose="020B0604030504040204" pitchFamily="50" charset="-128"/>
+                <a:latin typeface="BIZ UDPゴシック" panose="020B0400000000000000" pitchFamily="50" charset="-128"/>
+                <a:ea typeface="BIZ UDPゴシック" panose="020B0400000000000000" pitchFamily="50" charset="-128"/>
               </a:rPr>
               <a:t>の設計・評価指標</a:t>
             </a:r>
             <a:endParaRPr kumimoji="1" lang="en-US" altLang="ja-JP" sz="1400" dirty="0">
-              <a:latin typeface="メイリオ" panose="020B0604030504040204" pitchFamily="50" charset="-128"/>
-              <a:ea typeface="メイリオ" panose="020B0604030504040204" pitchFamily="50" charset="-128"/>
+              <a:latin typeface="BIZ UDPゴシック" panose="020B0400000000000000" pitchFamily="50" charset="-128"/>
+              <a:ea typeface="BIZ UDPゴシック" panose="020B0400000000000000" pitchFamily="50" charset="-128"/>
             </a:endParaRPr>
           </a:p>
           <a:p>
@@ -7087,14 +7031,14 @@
             </a:pPr>
             <a:r>
               <a:rPr lang="ja-JP" altLang="en-US" sz="1400" dirty="0">
-                <a:latin typeface="メイリオ" panose="020B0604030504040204" pitchFamily="50" charset="-128"/>
-                <a:ea typeface="メイリオ" panose="020B0604030504040204" pitchFamily="50" charset="-128"/>
+                <a:latin typeface="BIZ UDPゴシック" panose="020B0400000000000000" pitchFamily="50" charset="-128"/>
+                <a:ea typeface="BIZ UDPゴシック" panose="020B0400000000000000" pitchFamily="50" charset="-128"/>
               </a:rPr>
               <a:t>検証項目の決定と実行</a:t>
             </a:r>
             <a:endParaRPr kumimoji="1" lang="ja-JP" altLang="en-US" sz="1400" dirty="0">
-              <a:latin typeface="メイリオ" panose="020B0604030504040204" pitchFamily="50" charset="-128"/>
-              <a:ea typeface="メイリオ" panose="020B0604030504040204" pitchFamily="50" charset="-128"/>
+              <a:latin typeface="BIZ UDPゴシック" panose="020B0400000000000000" pitchFamily="50" charset="-128"/>
+              <a:ea typeface="BIZ UDPゴシック" panose="020B0400000000000000" pitchFamily="50" charset="-128"/>
             </a:endParaRPr>
           </a:p>
         </p:txBody>
@@ -7133,14 +7077,14 @@
             </a:pPr>
             <a:r>
               <a:rPr kumimoji="1" lang="ja-JP" altLang="en-US" sz="1400" dirty="0">
-                <a:latin typeface="メイリオ" panose="020B0604030504040204" pitchFamily="50" charset="-128"/>
-                <a:ea typeface="メイリオ" panose="020B0604030504040204" pitchFamily="50" charset="-128"/>
+                <a:latin typeface="BIZ UDPゴシック" panose="020B0400000000000000" pitchFamily="50" charset="-128"/>
+                <a:ea typeface="BIZ UDPゴシック" panose="020B0400000000000000" pitchFamily="50" charset="-128"/>
               </a:rPr>
               <a:t>ロードマップ</a:t>
             </a:r>
             <a:endParaRPr kumimoji="1" lang="en-US" altLang="ja-JP" sz="1400" dirty="0">
-              <a:latin typeface="メイリオ" panose="020B0604030504040204" pitchFamily="50" charset="-128"/>
-              <a:ea typeface="メイリオ" panose="020B0604030504040204" pitchFamily="50" charset="-128"/>
+              <a:latin typeface="BIZ UDPゴシック" panose="020B0400000000000000" pitchFamily="50" charset="-128"/>
+              <a:ea typeface="BIZ UDPゴシック" panose="020B0400000000000000" pitchFamily="50" charset="-128"/>
             </a:endParaRPr>
           </a:p>
           <a:p>
@@ -7150,14 +7094,14 @@
             </a:pPr>
             <a:r>
               <a:rPr lang="ja-JP" altLang="en-US" sz="1400" dirty="0">
-                <a:latin typeface="メイリオ" panose="020B0604030504040204" pitchFamily="50" charset="-128"/>
-                <a:ea typeface="メイリオ" panose="020B0604030504040204" pitchFamily="50" charset="-128"/>
+                <a:latin typeface="BIZ UDPゴシック" panose="020B0400000000000000" pitchFamily="50" charset="-128"/>
+                <a:ea typeface="BIZ UDPゴシック" panose="020B0400000000000000" pitchFamily="50" charset="-128"/>
               </a:rPr>
               <a:t>施策の方向性</a:t>
             </a:r>
             <a:endParaRPr lang="en-US" altLang="ja-JP" sz="1400" dirty="0">
-              <a:latin typeface="メイリオ" panose="020B0604030504040204" pitchFamily="50" charset="-128"/>
-              <a:ea typeface="メイリオ" panose="020B0604030504040204" pitchFamily="50" charset="-128"/>
+              <a:latin typeface="BIZ UDPゴシック" panose="020B0400000000000000" pitchFamily="50" charset="-128"/>
+              <a:ea typeface="BIZ UDPゴシック" panose="020B0400000000000000" pitchFamily="50" charset="-128"/>
             </a:endParaRPr>
           </a:p>
           <a:p>
@@ -7167,21 +7111,21 @@
             </a:pPr>
             <a:r>
               <a:rPr kumimoji="1" lang="en-US" altLang="ja-JP" sz="1400" dirty="0">
-                <a:latin typeface="メイリオ" panose="020B0604030504040204" pitchFamily="50" charset="-128"/>
-                <a:ea typeface="メイリオ" panose="020B0604030504040204" pitchFamily="50" charset="-128"/>
+                <a:latin typeface="BIZ UDPゴシック" panose="020B0400000000000000" pitchFamily="50" charset="-128"/>
+                <a:ea typeface="BIZ UDPゴシック" panose="020B0400000000000000" pitchFamily="50" charset="-128"/>
               </a:rPr>
               <a:t>KGI/KPI</a:t>
             </a:r>
             <a:r>
               <a:rPr kumimoji="1" lang="ja-JP" altLang="en-US" sz="1400" dirty="0">
-                <a:latin typeface="メイリオ" panose="020B0604030504040204" pitchFamily="50" charset="-128"/>
-                <a:ea typeface="メイリオ" panose="020B0604030504040204" pitchFamily="50" charset="-128"/>
+                <a:latin typeface="BIZ UDPゴシック" panose="020B0400000000000000" pitchFamily="50" charset="-128"/>
+                <a:ea typeface="BIZ UDPゴシック" panose="020B0400000000000000" pitchFamily="50" charset="-128"/>
               </a:rPr>
               <a:t>の設計・評価指標</a:t>
             </a:r>
             <a:endParaRPr kumimoji="1" lang="en-US" altLang="ja-JP" sz="1400" dirty="0">
-              <a:latin typeface="メイリオ" panose="020B0604030504040204" pitchFamily="50" charset="-128"/>
-              <a:ea typeface="メイリオ" panose="020B0604030504040204" pitchFamily="50" charset="-128"/>
+              <a:latin typeface="BIZ UDPゴシック" panose="020B0400000000000000" pitchFamily="50" charset="-128"/>
+              <a:ea typeface="BIZ UDPゴシック" panose="020B0400000000000000" pitchFamily="50" charset="-128"/>
             </a:endParaRPr>
           </a:p>
           <a:p>
@@ -7191,14 +7135,14 @@
             </a:pPr>
             <a:r>
               <a:rPr lang="ja-JP" altLang="en-US" sz="1400" dirty="0">
-                <a:latin typeface="メイリオ" panose="020B0604030504040204" pitchFamily="50" charset="-128"/>
-                <a:ea typeface="メイリオ" panose="020B0604030504040204" pitchFamily="50" charset="-128"/>
+                <a:latin typeface="BIZ UDPゴシック" panose="020B0400000000000000" pitchFamily="50" charset="-128"/>
+                <a:ea typeface="BIZ UDPゴシック" panose="020B0400000000000000" pitchFamily="50" charset="-128"/>
               </a:rPr>
               <a:t>検証項目の決定と実行</a:t>
             </a:r>
             <a:endParaRPr kumimoji="1" lang="ja-JP" altLang="en-US" sz="1400" dirty="0">
-              <a:latin typeface="メイリオ" panose="020B0604030504040204" pitchFamily="50" charset="-128"/>
-              <a:ea typeface="メイリオ" panose="020B0604030504040204" pitchFamily="50" charset="-128"/>
+              <a:latin typeface="BIZ UDPゴシック" panose="020B0400000000000000" pitchFamily="50" charset="-128"/>
+              <a:ea typeface="BIZ UDPゴシック" panose="020B0400000000000000" pitchFamily="50" charset="-128"/>
             </a:endParaRPr>
           </a:p>
         </p:txBody>
@@ -7237,14 +7181,14 @@
             </a:pPr>
             <a:r>
               <a:rPr kumimoji="1" lang="ja-JP" altLang="en-US" sz="1400" dirty="0">
-                <a:latin typeface="メイリオ" panose="020B0604030504040204" pitchFamily="50" charset="-128"/>
-                <a:ea typeface="メイリオ" panose="020B0604030504040204" pitchFamily="50" charset="-128"/>
+                <a:latin typeface="BIZ UDPゴシック" panose="020B0400000000000000" pitchFamily="50" charset="-128"/>
+                <a:ea typeface="BIZ UDPゴシック" panose="020B0400000000000000" pitchFamily="50" charset="-128"/>
               </a:rPr>
               <a:t>ロードマップ</a:t>
             </a:r>
             <a:endParaRPr kumimoji="1" lang="en-US" altLang="ja-JP" sz="1400" dirty="0">
-              <a:latin typeface="メイリオ" panose="020B0604030504040204" pitchFamily="50" charset="-128"/>
-              <a:ea typeface="メイリオ" panose="020B0604030504040204" pitchFamily="50" charset="-128"/>
+              <a:latin typeface="BIZ UDPゴシック" panose="020B0400000000000000" pitchFamily="50" charset="-128"/>
+              <a:ea typeface="BIZ UDPゴシック" panose="020B0400000000000000" pitchFamily="50" charset="-128"/>
             </a:endParaRPr>
           </a:p>
           <a:p>
@@ -7254,14 +7198,14 @@
             </a:pPr>
             <a:r>
               <a:rPr lang="ja-JP" altLang="en-US" sz="1400" dirty="0">
-                <a:latin typeface="メイリオ" panose="020B0604030504040204" pitchFamily="50" charset="-128"/>
-                <a:ea typeface="メイリオ" panose="020B0604030504040204" pitchFamily="50" charset="-128"/>
+                <a:latin typeface="BIZ UDPゴシック" panose="020B0400000000000000" pitchFamily="50" charset="-128"/>
+                <a:ea typeface="BIZ UDPゴシック" panose="020B0400000000000000" pitchFamily="50" charset="-128"/>
               </a:rPr>
               <a:t>施策の方向性</a:t>
             </a:r>
             <a:endParaRPr lang="en-US" altLang="ja-JP" sz="1400" dirty="0">
-              <a:latin typeface="メイリオ" panose="020B0604030504040204" pitchFamily="50" charset="-128"/>
-              <a:ea typeface="メイリオ" panose="020B0604030504040204" pitchFamily="50" charset="-128"/>
+              <a:latin typeface="BIZ UDPゴシック" panose="020B0400000000000000" pitchFamily="50" charset="-128"/>
+              <a:ea typeface="BIZ UDPゴシック" panose="020B0400000000000000" pitchFamily="50" charset="-128"/>
             </a:endParaRPr>
           </a:p>
           <a:p>
@@ -7271,21 +7215,21 @@
             </a:pPr>
             <a:r>
               <a:rPr kumimoji="1" lang="en-US" altLang="ja-JP" sz="1400" dirty="0">
-                <a:latin typeface="メイリオ" panose="020B0604030504040204" pitchFamily="50" charset="-128"/>
-                <a:ea typeface="メイリオ" panose="020B0604030504040204" pitchFamily="50" charset="-128"/>
+                <a:latin typeface="BIZ UDPゴシック" panose="020B0400000000000000" pitchFamily="50" charset="-128"/>
+                <a:ea typeface="BIZ UDPゴシック" panose="020B0400000000000000" pitchFamily="50" charset="-128"/>
               </a:rPr>
               <a:t>KGI/KPI</a:t>
             </a:r>
             <a:r>
               <a:rPr kumimoji="1" lang="ja-JP" altLang="en-US" sz="1400" dirty="0">
-                <a:latin typeface="メイリオ" panose="020B0604030504040204" pitchFamily="50" charset="-128"/>
-                <a:ea typeface="メイリオ" panose="020B0604030504040204" pitchFamily="50" charset="-128"/>
+                <a:latin typeface="BIZ UDPゴシック" panose="020B0400000000000000" pitchFamily="50" charset="-128"/>
+                <a:ea typeface="BIZ UDPゴシック" panose="020B0400000000000000" pitchFamily="50" charset="-128"/>
               </a:rPr>
               <a:t>の設計・評価指標</a:t>
             </a:r>
             <a:endParaRPr kumimoji="1" lang="en-US" altLang="ja-JP" sz="1400" dirty="0">
-              <a:latin typeface="メイリオ" panose="020B0604030504040204" pitchFamily="50" charset="-128"/>
-              <a:ea typeface="メイリオ" panose="020B0604030504040204" pitchFamily="50" charset="-128"/>
+              <a:latin typeface="BIZ UDPゴシック" panose="020B0400000000000000" pitchFamily="50" charset="-128"/>
+              <a:ea typeface="BIZ UDPゴシック" panose="020B0400000000000000" pitchFamily="50" charset="-128"/>
             </a:endParaRPr>
           </a:p>
           <a:p>
@@ -7295,14 +7239,14 @@
             </a:pPr>
             <a:r>
               <a:rPr lang="ja-JP" altLang="en-US" sz="1400" dirty="0">
-                <a:latin typeface="メイリオ" panose="020B0604030504040204" pitchFamily="50" charset="-128"/>
-                <a:ea typeface="メイリオ" panose="020B0604030504040204" pitchFamily="50" charset="-128"/>
+                <a:latin typeface="BIZ UDPゴシック" panose="020B0400000000000000" pitchFamily="50" charset="-128"/>
+                <a:ea typeface="BIZ UDPゴシック" panose="020B0400000000000000" pitchFamily="50" charset="-128"/>
               </a:rPr>
               <a:t>検証項目の決定と実行</a:t>
             </a:r>
             <a:endParaRPr kumimoji="1" lang="ja-JP" altLang="en-US" sz="1400" dirty="0">
-              <a:latin typeface="メイリオ" panose="020B0604030504040204" pitchFamily="50" charset="-128"/>
-              <a:ea typeface="メイリオ" panose="020B0604030504040204" pitchFamily="50" charset="-128"/>
+              <a:latin typeface="BIZ UDPゴシック" panose="020B0400000000000000" pitchFamily="50" charset="-128"/>
+              <a:ea typeface="BIZ UDPゴシック" panose="020B0400000000000000" pitchFamily="50" charset="-128"/>
             </a:endParaRPr>
           </a:p>
         </p:txBody>
@@ -7365,8 +7309,8 @@
                     <a:lumOff val="25000"/>
                   </a:schemeClr>
                 </a:solidFill>
-                <a:latin typeface="メイリオ" panose="020B0604030504040204" pitchFamily="50" charset="-128"/>
-                <a:ea typeface="メイリオ" panose="020B0604030504040204" pitchFamily="50" charset="-128"/>
+                <a:latin typeface="BIZ UDPゴシック" panose="020B0400000000000000" pitchFamily="50" charset="-128"/>
+                <a:ea typeface="BIZ UDPゴシック" panose="020B0400000000000000" pitchFamily="50" charset="-128"/>
               </a:rPr>
               <a:t>フェーズ</a:t>
             </a:r>
@@ -7378,8 +7322,8 @@
                     <a:lumOff val="25000"/>
                   </a:schemeClr>
                 </a:solidFill>
-                <a:latin typeface="メイリオ" panose="020B0604030504040204" pitchFamily="50" charset="-128"/>
-                <a:ea typeface="メイリオ" panose="020B0604030504040204" pitchFamily="50" charset="-128"/>
+                <a:latin typeface="BIZ UDPゴシック" panose="020B0400000000000000" pitchFamily="50" charset="-128"/>
+                <a:ea typeface="BIZ UDPゴシック" panose="020B0400000000000000" pitchFamily="50" charset="-128"/>
               </a:rPr>
               <a:t> 1</a:t>
             </a:r>
@@ -7394,8 +7338,8 @@
                     <a:lumOff val="25000"/>
                   </a:schemeClr>
                 </a:solidFill>
-                <a:latin typeface="メイリオ" panose="020B0604030504040204" pitchFamily="50" charset="-128"/>
-                <a:ea typeface="メイリオ" panose="020B0604030504040204" pitchFamily="50" charset="-128"/>
+                <a:latin typeface="BIZ UDPゴシック" panose="020B0400000000000000" pitchFamily="50" charset="-128"/>
+                <a:ea typeface="BIZ UDPゴシック" panose="020B0400000000000000" pitchFamily="50" charset="-128"/>
               </a:rPr>
               <a:t>2026/01 – 2026/03</a:t>
             </a:r>
@@ -7406,8 +7350,8 @@
                   <a:lumOff val="25000"/>
                 </a:schemeClr>
               </a:solidFill>
-              <a:latin typeface="メイリオ" panose="020B0604030504040204" pitchFamily="50" charset="-128"/>
-              <a:ea typeface="メイリオ" panose="020B0604030504040204" pitchFamily="50" charset="-128"/>
+              <a:latin typeface="BIZ UDPゴシック" panose="020B0400000000000000" pitchFamily="50" charset="-128"/>
+              <a:ea typeface="BIZ UDPゴシック" panose="020B0400000000000000" pitchFamily="50" charset="-128"/>
             </a:endParaRPr>
           </a:p>
         </p:txBody>
@@ -7466,8 +7410,8 @@
                     <a:lumOff val="25000"/>
                   </a:schemeClr>
                 </a:solidFill>
-                <a:latin typeface="メイリオ" panose="020B0604030504040204" pitchFamily="50" charset="-128"/>
-                <a:ea typeface="メイリオ" panose="020B0604030504040204" pitchFamily="50" charset="-128"/>
+                <a:latin typeface="BIZ UDPゴシック" panose="020B0400000000000000" pitchFamily="50" charset="-128"/>
+                <a:ea typeface="BIZ UDPゴシック" panose="020B0400000000000000" pitchFamily="50" charset="-128"/>
               </a:rPr>
               <a:t>3</a:t>
             </a:r>
@@ -7479,8 +7423,8 @@
                     <a:lumOff val="25000"/>
                   </a:schemeClr>
                 </a:solidFill>
-                <a:latin typeface="メイリオ" panose="020B0604030504040204" pitchFamily="50" charset="-128"/>
-                <a:ea typeface="メイリオ" panose="020B0604030504040204" pitchFamily="50" charset="-128"/>
+                <a:latin typeface="BIZ UDPゴシック" panose="020B0400000000000000" pitchFamily="50" charset="-128"/>
+                <a:ea typeface="BIZ UDPゴシック" panose="020B0400000000000000" pitchFamily="50" charset="-128"/>
               </a:rPr>
               <a:t>か月</a:t>
             </a:r>
@@ -7545,8 +7489,8 @@
                     <a:lumOff val="25000"/>
                   </a:schemeClr>
                 </a:solidFill>
-                <a:latin typeface="メイリオ" panose="020B0604030504040204" pitchFamily="50" charset="-128"/>
-                <a:ea typeface="メイリオ" panose="020B0604030504040204" pitchFamily="50" charset="-128"/>
+                <a:latin typeface="BIZ UDPゴシック" panose="020B0400000000000000" pitchFamily="50" charset="-128"/>
+                <a:ea typeface="BIZ UDPゴシック" panose="020B0400000000000000" pitchFamily="50" charset="-128"/>
               </a:rPr>
               <a:t>マーケティング戦略・戦術</a:t>
             </a:r>
@@ -7557,8 +7501,8 @@
                   <a:lumOff val="25000"/>
                 </a:schemeClr>
               </a:solidFill>
-              <a:latin typeface="メイリオ" panose="020B0604030504040204" pitchFamily="50" charset="-128"/>
-              <a:ea typeface="メイリオ" panose="020B0604030504040204" pitchFamily="50" charset="-128"/>
+              <a:latin typeface="BIZ UDPゴシック" panose="020B0400000000000000" pitchFamily="50" charset="-128"/>
+              <a:ea typeface="BIZ UDPゴシック" panose="020B0400000000000000" pitchFamily="50" charset="-128"/>
             </a:endParaRPr>
           </a:p>
           <a:p>
@@ -7571,8 +7515,8 @@
                     <a:lumOff val="25000"/>
                   </a:schemeClr>
                 </a:solidFill>
-                <a:latin typeface="メイリオ" panose="020B0604030504040204" pitchFamily="50" charset="-128"/>
-                <a:ea typeface="メイリオ" panose="020B0604030504040204" pitchFamily="50" charset="-128"/>
+                <a:latin typeface="BIZ UDPゴシック" panose="020B0400000000000000" pitchFamily="50" charset="-128"/>
+                <a:ea typeface="BIZ UDPゴシック" panose="020B0400000000000000" pitchFamily="50" charset="-128"/>
               </a:rPr>
               <a:t>KGI</a:t>
             </a:r>
@@ -7584,8 +7528,8 @@
                     <a:lumOff val="25000"/>
                   </a:schemeClr>
                 </a:solidFill>
-                <a:latin typeface="メイリオ" panose="020B0604030504040204" pitchFamily="50" charset="-128"/>
-                <a:ea typeface="メイリオ" panose="020B0604030504040204" pitchFamily="50" charset="-128"/>
+                <a:latin typeface="BIZ UDPゴシック" panose="020B0400000000000000" pitchFamily="50" charset="-128"/>
+                <a:ea typeface="BIZ UDPゴシック" panose="020B0400000000000000" pitchFamily="50" charset="-128"/>
               </a:rPr>
               <a:t>・</a:t>
             </a:r>
@@ -7597,8 +7541,8 @@
                     <a:lumOff val="25000"/>
                   </a:schemeClr>
                 </a:solidFill>
-                <a:latin typeface="メイリオ" panose="020B0604030504040204" pitchFamily="50" charset="-128"/>
-                <a:ea typeface="メイリオ" panose="020B0604030504040204" pitchFamily="50" charset="-128"/>
+                <a:latin typeface="BIZ UDPゴシック" panose="020B0400000000000000" pitchFamily="50" charset="-128"/>
+                <a:ea typeface="BIZ UDPゴシック" panose="020B0400000000000000" pitchFamily="50" charset="-128"/>
               </a:rPr>
               <a:t>KPI</a:t>
             </a:r>
@@ -7610,8 +7554,8 @@
                     <a:lumOff val="25000"/>
                   </a:schemeClr>
                 </a:solidFill>
-                <a:latin typeface="メイリオ" panose="020B0604030504040204" pitchFamily="50" charset="-128"/>
-                <a:ea typeface="メイリオ" panose="020B0604030504040204" pitchFamily="50" charset="-128"/>
+                <a:latin typeface="BIZ UDPゴシック" panose="020B0400000000000000" pitchFamily="50" charset="-128"/>
+                <a:ea typeface="BIZ UDPゴシック" panose="020B0400000000000000" pitchFamily="50" charset="-128"/>
               </a:rPr>
               <a:t>設計</a:t>
             </a:r>
@@ -7623,8 +7567,8 @@
                     <a:lumOff val="25000"/>
                   </a:schemeClr>
                 </a:solidFill>
-                <a:latin typeface="メイリオ" panose="020B0604030504040204" pitchFamily="50" charset="-128"/>
-                <a:ea typeface="メイリオ" panose="020B0604030504040204" pitchFamily="50" charset="-128"/>
+                <a:latin typeface="BIZ UDPゴシック" panose="020B0400000000000000" pitchFamily="50" charset="-128"/>
+                <a:ea typeface="BIZ UDPゴシック" panose="020B0400000000000000" pitchFamily="50" charset="-128"/>
               </a:rPr>
               <a:t>/</a:t>
             </a:r>
@@ -7636,8 +7580,8 @@
                     <a:lumOff val="25000"/>
                   </a:schemeClr>
                 </a:solidFill>
-                <a:latin typeface="メイリオ" panose="020B0604030504040204" pitchFamily="50" charset="-128"/>
-                <a:ea typeface="メイリオ" panose="020B0604030504040204" pitchFamily="50" charset="-128"/>
+                <a:latin typeface="BIZ UDPゴシック" panose="020B0400000000000000" pitchFamily="50" charset="-128"/>
+                <a:ea typeface="BIZ UDPゴシック" panose="020B0400000000000000" pitchFamily="50" charset="-128"/>
               </a:rPr>
               <a:t>企画設計</a:t>
             </a:r>
@@ -7649,8 +7593,8 @@
                     <a:lumOff val="25000"/>
                   </a:schemeClr>
                 </a:solidFill>
-                <a:latin typeface="メイリオ" panose="020B0604030504040204" pitchFamily="50" charset="-128"/>
-                <a:ea typeface="メイリオ" panose="020B0604030504040204" pitchFamily="50" charset="-128"/>
+                <a:latin typeface="BIZ UDPゴシック" panose="020B0400000000000000" pitchFamily="50" charset="-128"/>
+                <a:ea typeface="BIZ UDPゴシック" panose="020B0400000000000000" pitchFamily="50" charset="-128"/>
               </a:rPr>
               <a:t>/</a:t>
             </a:r>
@@ -7662,8 +7606,8 @@
                     <a:lumOff val="25000"/>
                   </a:schemeClr>
                 </a:solidFill>
-                <a:latin typeface="メイリオ" panose="020B0604030504040204" pitchFamily="50" charset="-128"/>
-                <a:ea typeface="メイリオ" panose="020B0604030504040204" pitchFamily="50" charset="-128"/>
+                <a:latin typeface="BIZ UDPゴシック" panose="020B0400000000000000" pitchFamily="50" charset="-128"/>
+                <a:ea typeface="BIZ UDPゴシック" panose="020B0400000000000000" pitchFamily="50" charset="-128"/>
               </a:rPr>
               <a:t>検証</a:t>
             </a:r>
@@ -7674,8 +7618,8 @@
                   <a:lumOff val="25000"/>
                 </a:schemeClr>
               </a:solidFill>
-              <a:latin typeface="メイリオ" panose="020B0604030504040204" pitchFamily="50" charset="-128"/>
-              <a:ea typeface="メイリオ" panose="020B0604030504040204" pitchFamily="50" charset="-128"/>
+              <a:latin typeface="BIZ UDPゴシック" panose="020B0400000000000000" pitchFamily="50" charset="-128"/>
+              <a:ea typeface="BIZ UDPゴシック" panose="020B0400000000000000" pitchFamily="50" charset="-128"/>
             </a:endParaRPr>
           </a:p>
         </p:txBody>
@@ -7714,14 +7658,14 @@
             </a:pPr>
             <a:r>
               <a:rPr kumimoji="1" lang="ja-JP" altLang="en-US" sz="1400" dirty="0">
-                <a:latin typeface="メイリオ" panose="020B0604030504040204" pitchFamily="50" charset="-128"/>
-                <a:ea typeface="メイリオ" panose="020B0604030504040204" pitchFamily="50" charset="-128"/>
+                <a:latin typeface="BIZ UDPゴシック" panose="020B0400000000000000" pitchFamily="50" charset="-128"/>
+                <a:ea typeface="BIZ UDPゴシック" panose="020B0400000000000000" pitchFamily="50" charset="-128"/>
               </a:rPr>
               <a:t>ロードマップ</a:t>
             </a:r>
             <a:endParaRPr kumimoji="1" lang="en-US" altLang="ja-JP" sz="1400" dirty="0">
-              <a:latin typeface="メイリオ" panose="020B0604030504040204" pitchFamily="50" charset="-128"/>
-              <a:ea typeface="メイリオ" panose="020B0604030504040204" pitchFamily="50" charset="-128"/>
+              <a:latin typeface="BIZ UDPゴシック" panose="020B0400000000000000" pitchFamily="50" charset="-128"/>
+              <a:ea typeface="BIZ UDPゴシック" panose="020B0400000000000000" pitchFamily="50" charset="-128"/>
             </a:endParaRPr>
           </a:p>
           <a:p>
@@ -7731,14 +7675,14 @@
             </a:pPr>
             <a:r>
               <a:rPr lang="ja-JP" altLang="en-US" sz="1400" dirty="0">
-                <a:latin typeface="メイリオ" panose="020B0604030504040204" pitchFamily="50" charset="-128"/>
-                <a:ea typeface="メイリオ" panose="020B0604030504040204" pitchFamily="50" charset="-128"/>
+                <a:latin typeface="BIZ UDPゴシック" panose="020B0400000000000000" pitchFamily="50" charset="-128"/>
+                <a:ea typeface="BIZ UDPゴシック" panose="020B0400000000000000" pitchFamily="50" charset="-128"/>
               </a:rPr>
               <a:t>施策の方向性</a:t>
             </a:r>
             <a:endParaRPr lang="en-US" altLang="ja-JP" sz="1400" dirty="0">
-              <a:latin typeface="メイリオ" panose="020B0604030504040204" pitchFamily="50" charset="-128"/>
-              <a:ea typeface="メイリオ" panose="020B0604030504040204" pitchFamily="50" charset="-128"/>
+              <a:latin typeface="BIZ UDPゴシック" panose="020B0400000000000000" pitchFamily="50" charset="-128"/>
+              <a:ea typeface="BIZ UDPゴシック" panose="020B0400000000000000" pitchFamily="50" charset="-128"/>
             </a:endParaRPr>
           </a:p>
           <a:p>
@@ -7748,21 +7692,21 @@
             </a:pPr>
             <a:r>
               <a:rPr kumimoji="1" lang="en-US" altLang="ja-JP" sz="1400" dirty="0">
-                <a:latin typeface="メイリオ" panose="020B0604030504040204" pitchFamily="50" charset="-128"/>
-                <a:ea typeface="メイリオ" panose="020B0604030504040204" pitchFamily="50" charset="-128"/>
+                <a:latin typeface="BIZ UDPゴシック" panose="020B0400000000000000" pitchFamily="50" charset="-128"/>
+                <a:ea typeface="BIZ UDPゴシック" panose="020B0400000000000000" pitchFamily="50" charset="-128"/>
               </a:rPr>
               <a:t>KGI/KPI</a:t>
             </a:r>
             <a:r>
               <a:rPr kumimoji="1" lang="ja-JP" altLang="en-US" sz="1400" dirty="0">
-                <a:latin typeface="メイリオ" panose="020B0604030504040204" pitchFamily="50" charset="-128"/>
-                <a:ea typeface="メイリオ" panose="020B0604030504040204" pitchFamily="50" charset="-128"/>
+                <a:latin typeface="BIZ UDPゴシック" panose="020B0400000000000000" pitchFamily="50" charset="-128"/>
+                <a:ea typeface="BIZ UDPゴシック" panose="020B0400000000000000" pitchFamily="50" charset="-128"/>
               </a:rPr>
               <a:t>の設計・評価指標</a:t>
             </a:r>
             <a:endParaRPr kumimoji="1" lang="en-US" altLang="ja-JP" sz="1400" dirty="0">
-              <a:latin typeface="メイリオ" panose="020B0604030504040204" pitchFamily="50" charset="-128"/>
-              <a:ea typeface="メイリオ" panose="020B0604030504040204" pitchFamily="50" charset="-128"/>
+              <a:latin typeface="BIZ UDPゴシック" panose="020B0400000000000000" pitchFamily="50" charset="-128"/>
+              <a:ea typeface="BIZ UDPゴシック" panose="020B0400000000000000" pitchFamily="50" charset="-128"/>
             </a:endParaRPr>
           </a:p>
           <a:p>
@@ -7772,14 +7716,14 @@
             </a:pPr>
             <a:r>
               <a:rPr lang="ja-JP" altLang="en-US" sz="1400" dirty="0">
-                <a:latin typeface="メイリオ" panose="020B0604030504040204" pitchFamily="50" charset="-128"/>
-                <a:ea typeface="メイリオ" panose="020B0604030504040204" pitchFamily="50" charset="-128"/>
+                <a:latin typeface="BIZ UDPゴシック" panose="020B0400000000000000" pitchFamily="50" charset="-128"/>
+                <a:ea typeface="BIZ UDPゴシック" panose="020B0400000000000000" pitchFamily="50" charset="-128"/>
               </a:rPr>
               <a:t>検証項目の決定と実行</a:t>
             </a:r>
             <a:endParaRPr kumimoji="1" lang="ja-JP" altLang="en-US" sz="1400" dirty="0">
-              <a:latin typeface="メイリオ" panose="020B0604030504040204" pitchFamily="50" charset="-128"/>
-              <a:ea typeface="メイリオ" panose="020B0604030504040204" pitchFamily="50" charset="-128"/>
+              <a:latin typeface="BIZ UDPゴシック" panose="020B0400000000000000" pitchFamily="50" charset="-128"/>
+              <a:ea typeface="BIZ UDPゴシック" panose="020B0400000000000000" pitchFamily="50" charset="-128"/>
             </a:endParaRPr>
           </a:p>
         </p:txBody>
@@ -7818,14 +7762,14 @@
             </a:pPr>
             <a:r>
               <a:rPr kumimoji="1" lang="ja-JP" altLang="en-US" sz="1400" dirty="0">
-                <a:latin typeface="メイリオ" panose="020B0604030504040204" pitchFamily="50" charset="-128"/>
-                <a:ea typeface="メイリオ" panose="020B0604030504040204" pitchFamily="50" charset="-128"/>
+                <a:latin typeface="BIZ UDPゴシック" panose="020B0400000000000000" pitchFamily="50" charset="-128"/>
+                <a:ea typeface="BIZ UDPゴシック" panose="020B0400000000000000" pitchFamily="50" charset="-128"/>
               </a:rPr>
               <a:t>ロードマップ</a:t>
             </a:r>
             <a:endParaRPr kumimoji="1" lang="en-US" altLang="ja-JP" sz="1400" dirty="0">
-              <a:latin typeface="メイリオ" panose="020B0604030504040204" pitchFamily="50" charset="-128"/>
-              <a:ea typeface="メイリオ" panose="020B0604030504040204" pitchFamily="50" charset="-128"/>
+              <a:latin typeface="BIZ UDPゴシック" panose="020B0400000000000000" pitchFamily="50" charset="-128"/>
+              <a:ea typeface="BIZ UDPゴシック" panose="020B0400000000000000" pitchFamily="50" charset="-128"/>
             </a:endParaRPr>
           </a:p>
           <a:p>
@@ -7835,14 +7779,14 @@
             </a:pPr>
             <a:r>
               <a:rPr lang="ja-JP" altLang="en-US" sz="1400" dirty="0">
-                <a:latin typeface="メイリオ" panose="020B0604030504040204" pitchFamily="50" charset="-128"/>
-                <a:ea typeface="メイリオ" panose="020B0604030504040204" pitchFamily="50" charset="-128"/>
+                <a:latin typeface="BIZ UDPゴシック" panose="020B0400000000000000" pitchFamily="50" charset="-128"/>
+                <a:ea typeface="BIZ UDPゴシック" panose="020B0400000000000000" pitchFamily="50" charset="-128"/>
               </a:rPr>
               <a:t>施策の方向性</a:t>
             </a:r>
             <a:endParaRPr lang="en-US" altLang="ja-JP" sz="1400" dirty="0">
-              <a:latin typeface="メイリオ" panose="020B0604030504040204" pitchFamily="50" charset="-128"/>
-              <a:ea typeface="メイリオ" panose="020B0604030504040204" pitchFamily="50" charset="-128"/>
+              <a:latin typeface="BIZ UDPゴシック" panose="020B0400000000000000" pitchFamily="50" charset="-128"/>
+              <a:ea typeface="BIZ UDPゴシック" panose="020B0400000000000000" pitchFamily="50" charset="-128"/>
             </a:endParaRPr>
           </a:p>
           <a:p>
@@ -7852,21 +7796,21 @@
             </a:pPr>
             <a:r>
               <a:rPr kumimoji="1" lang="en-US" altLang="ja-JP" sz="1400" dirty="0">
-                <a:latin typeface="メイリオ" panose="020B0604030504040204" pitchFamily="50" charset="-128"/>
-                <a:ea typeface="メイリオ" panose="020B0604030504040204" pitchFamily="50" charset="-128"/>
+                <a:latin typeface="BIZ UDPゴシック" panose="020B0400000000000000" pitchFamily="50" charset="-128"/>
+                <a:ea typeface="BIZ UDPゴシック" panose="020B0400000000000000" pitchFamily="50" charset="-128"/>
               </a:rPr>
               <a:t>KGI/KPI</a:t>
             </a:r>
             <a:r>
               <a:rPr kumimoji="1" lang="ja-JP" altLang="en-US" sz="1400" dirty="0">
-                <a:latin typeface="メイリオ" panose="020B0604030504040204" pitchFamily="50" charset="-128"/>
-                <a:ea typeface="メイリオ" panose="020B0604030504040204" pitchFamily="50" charset="-128"/>
+                <a:latin typeface="BIZ UDPゴシック" panose="020B0400000000000000" pitchFamily="50" charset="-128"/>
+                <a:ea typeface="BIZ UDPゴシック" panose="020B0400000000000000" pitchFamily="50" charset="-128"/>
               </a:rPr>
               <a:t>の設計・評価指標</a:t>
             </a:r>
             <a:endParaRPr kumimoji="1" lang="en-US" altLang="ja-JP" sz="1400" dirty="0">
-              <a:latin typeface="メイリオ" panose="020B0604030504040204" pitchFamily="50" charset="-128"/>
-              <a:ea typeface="メイリオ" panose="020B0604030504040204" pitchFamily="50" charset="-128"/>
+              <a:latin typeface="BIZ UDPゴシック" panose="020B0400000000000000" pitchFamily="50" charset="-128"/>
+              <a:ea typeface="BIZ UDPゴシック" panose="020B0400000000000000" pitchFamily="50" charset="-128"/>
             </a:endParaRPr>
           </a:p>
           <a:p>
@@ -7876,14 +7820,14 @@
             </a:pPr>
             <a:r>
               <a:rPr lang="ja-JP" altLang="en-US" sz="1400" dirty="0">
-                <a:latin typeface="メイリオ" panose="020B0604030504040204" pitchFamily="50" charset="-128"/>
-                <a:ea typeface="メイリオ" panose="020B0604030504040204" pitchFamily="50" charset="-128"/>
+                <a:latin typeface="BIZ UDPゴシック" panose="020B0400000000000000" pitchFamily="50" charset="-128"/>
+                <a:ea typeface="BIZ UDPゴシック" panose="020B0400000000000000" pitchFamily="50" charset="-128"/>
               </a:rPr>
               <a:t>検証項目の決定と実行</a:t>
             </a:r>
             <a:endParaRPr kumimoji="1" lang="ja-JP" altLang="en-US" sz="1400" dirty="0">
-              <a:latin typeface="メイリオ" panose="020B0604030504040204" pitchFamily="50" charset="-128"/>
-              <a:ea typeface="メイリオ" panose="020B0604030504040204" pitchFamily="50" charset="-128"/>
+              <a:latin typeface="BIZ UDPゴシック" panose="020B0400000000000000" pitchFamily="50" charset="-128"/>
+              <a:ea typeface="BIZ UDPゴシック" panose="020B0400000000000000" pitchFamily="50" charset="-128"/>
             </a:endParaRPr>
           </a:p>
         </p:txBody>
@@ -7922,14 +7866,14 @@
             </a:pPr>
             <a:r>
               <a:rPr kumimoji="1" lang="ja-JP" altLang="en-US" sz="1400" dirty="0">
-                <a:latin typeface="メイリオ" panose="020B0604030504040204" pitchFamily="50" charset="-128"/>
-                <a:ea typeface="メイリオ" panose="020B0604030504040204" pitchFamily="50" charset="-128"/>
+                <a:latin typeface="BIZ UDPゴシック" panose="020B0400000000000000" pitchFamily="50" charset="-128"/>
+                <a:ea typeface="BIZ UDPゴシック" panose="020B0400000000000000" pitchFamily="50" charset="-128"/>
               </a:rPr>
               <a:t>ロードマップ</a:t>
             </a:r>
             <a:endParaRPr kumimoji="1" lang="en-US" altLang="ja-JP" sz="1400" dirty="0">
-              <a:latin typeface="メイリオ" panose="020B0604030504040204" pitchFamily="50" charset="-128"/>
-              <a:ea typeface="メイリオ" panose="020B0604030504040204" pitchFamily="50" charset="-128"/>
+              <a:latin typeface="BIZ UDPゴシック" panose="020B0400000000000000" pitchFamily="50" charset="-128"/>
+              <a:ea typeface="BIZ UDPゴシック" panose="020B0400000000000000" pitchFamily="50" charset="-128"/>
             </a:endParaRPr>
           </a:p>
           <a:p>
@@ -7939,14 +7883,14 @@
             </a:pPr>
             <a:r>
               <a:rPr lang="ja-JP" altLang="en-US" sz="1400" dirty="0">
-                <a:latin typeface="メイリオ" panose="020B0604030504040204" pitchFamily="50" charset="-128"/>
-                <a:ea typeface="メイリオ" panose="020B0604030504040204" pitchFamily="50" charset="-128"/>
+                <a:latin typeface="BIZ UDPゴシック" panose="020B0400000000000000" pitchFamily="50" charset="-128"/>
+                <a:ea typeface="BIZ UDPゴシック" panose="020B0400000000000000" pitchFamily="50" charset="-128"/>
               </a:rPr>
               <a:t>施策の方向性</a:t>
             </a:r>
             <a:endParaRPr lang="en-US" altLang="ja-JP" sz="1400" dirty="0">
-              <a:latin typeface="メイリオ" panose="020B0604030504040204" pitchFamily="50" charset="-128"/>
-              <a:ea typeface="メイリオ" panose="020B0604030504040204" pitchFamily="50" charset="-128"/>
+              <a:latin typeface="BIZ UDPゴシック" panose="020B0400000000000000" pitchFamily="50" charset="-128"/>
+              <a:ea typeface="BIZ UDPゴシック" panose="020B0400000000000000" pitchFamily="50" charset="-128"/>
             </a:endParaRPr>
           </a:p>
           <a:p>
@@ -7956,21 +7900,21 @@
             </a:pPr>
             <a:r>
               <a:rPr kumimoji="1" lang="en-US" altLang="ja-JP" sz="1400" dirty="0">
-                <a:latin typeface="メイリオ" panose="020B0604030504040204" pitchFamily="50" charset="-128"/>
-                <a:ea typeface="メイリオ" panose="020B0604030504040204" pitchFamily="50" charset="-128"/>
+                <a:latin typeface="BIZ UDPゴシック" panose="020B0400000000000000" pitchFamily="50" charset="-128"/>
+                <a:ea typeface="BIZ UDPゴシック" panose="020B0400000000000000" pitchFamily="50" charset="-128"/>
               </a:rPr>
               <a:t>KGI/KPI</a:t>
             </a:r>
             <a:r>
               <a:rPr kumimoji="1" lang="ja-JP" altLang="en-US" sz="1400" dirty="0">
-                <a:latin typeface="メイリオ" panose="020B0604030504040204" pitchFamily="50" charset="-128"/>
-                <a:ea typeface="メイリオ" panose="020B0604030504040204" pitchFamily="50" charset="-128"/>
+                <a:latin typeface="BIZ UDPゴシック" panose="020B0400000000000000" pitchFamily="50" charset="-128"/>
+                <a:ea typeface="BIZ UDPゴシック" panose="020B0400000000000000" pitchFamily="50" charset="-128"/>
               </a:rPr>
               <a:t>の設計・評価指標</a:t>
             </a:r>
             <a:endParaRPr kumimoji="1" lang="en-US" altLang="ja-JP" sz="1400" dirty="0">
-              <a:latin typeface="メイリオ" panose="020B0604030504040204" pitchFamily="50" charset="-128"/>
-              <a:ea typeface="メイリオ" panose="020B0604030504040204" pitchFamily="50" charset="-128"/>
+              <a:latin typeface="BIZ UDPゴシック" panose="020B0400000000000000" pitchFamily="50" charset="-128"/>
+              <a:ea typeface="BIZ UDPゴシック" panose="020B0400000000000000" pitchFamily="50" charset="-128"/>
             </a:endParaRPr>
           </a:p>
           <a:p>
@@ -7980,14 +7924,14 @@
             </a:pPr>
             <a:r>
               <a:rPr lang="ja-JP" altLang="en-US" sz="1400" dirty="0">
-                <a:latin typeface="メイリオ" panose="020B0604030504040204" pitchFamily="50" charset="-128"/>
-                <a:ea typeface="メイリオ" panose="020B0604030504040204" pitchFamily="50" charset="-128"/>
+                <a:latin typeface="BIZ UDPゴシック" panose="020B0400000000000000" pitchFamily="50" charset="-128"/>
+                <a:ea typeface="BIZ UDPゴシック" panose="020B0400000000000000" pitchFamily="50" charset="-128"/>
               </a:rPr>
               <a:t>検証項目の決定と実行</a:t>
             </a:r>
             <a:endParaRPr kumimoji="1" lang="ja-JP" altLang="en-US" sz="1400" dirty="0">
-              <a:latin typeface="メイリオ" panose="020B0604030504040204" pitchFamily="50" charset="-128"/>
-              <a:ea typeface="メイリオ" panose="020B0604030504040204" pitchFamily="50" charset="-128"/>
+              <a:latin typeface="BIZ UDPゴシック" panose="020B0400000000000000" pitchFamily="50" charset="-128"/>
+              <a:ea typeface="BIZ UDPゴシック" panose="020B0400000000000000" pitchFamily="50" charset="-128"/>
             </a:endParaRPr>
           </a:p>
         </p:txBody>
@@ -8050,8 +7994,8 @@
                     <a:lumOff val="25000"/>
                   </a:schemeClr>
                 </a:solidFill>
-                <a:latin typeface="メイリオ" panose="020B0604030504040204" pitchFamily="50" charset="-128"/>
-                <a:ea typeface="メイリオ" panose="020B0604030504040204" pitchFamily="50" charset="-128"/>
+                <a:latin typeface="BIZ UDPゴシック" panose="020B0400000000000000" pitchFamily="50" charset="-128"/>
+                <a:ea typeface="BIZ UDPゴシック" panose="020B0400000000000000" pitchFamily="50" charset="-128"/>
               </a:rPr>
               <a:t>フェーズ</a:t>
             </a:r>
@@ -8063,8 +8007,8 @@
                     <a:lumOff val="25000"/>
                   </a:schemeClr>
                 </a:solidFill>
-                <a:latin typeface="メイリオ" panose="020B0604030504040204" pitchFamily="50" charset="-128"/>
-                <a:ea typeface="メイリオ" panose="020B0604030504040204" pitchFamily="50" charset="-128"/>
+                <a:latin typeface="BIZ UDPゴシック" panose="020B0400000000000000" pitchFamily="50" charset="-128"/>
+                <a:ea typeface="BIZ UDPゴシック" panose="020B0400000000000000" pitchFamily="50" charset="-128"/>
               </a:rPr>
               <a:t> 2</a:t>
             </a:r>
@@ -8079,8 +8023,8 @@
                     <a:lumOff val="25000"/>
                   </a:schemeClr>
                 </a:solidFill>
-                <a:latin typeface="メイリオ" panose="020B0604030504040204" pitchFamily="50" charset="-128"/>
-                <a:ea typeface="メイリオ" panose="020B0604030504040204" pitchFamily="50" charset="-128"/>
+                <a:latin typeface="BIZ UDPゴシック" panose="020B0400000000000000" pitchFamily="50" charset="-128"/>
+                <a:ea typeface="BIZ UDPゴシック" panose="020B0400000000000000" pitchFamily="50" charset="-128"/>
               </a:rPr>
               <a:t>2026/04 – 2026/06</a:t>
             </a:r>
@@ -8091,8 +8035,8 @@
                   <a:lumOff val="25000"/>
                 </a:schemeClr>
               </a:solidFill>
-              <a:latin typeface="メイリオ" panose="020B0604030504040204" pitchFamily="50" charset="-128"/>
-              <a:ea typeface="メイリオ" panose="020B0604030504040204" pitchFamily="50" charset="-128"/>
+              <a:latin typeface="BIZ UDPゴシック" panose="020B0400000000000000" pitchFamily="50" charset="-128"/>
+              <a:ea typeface="BIZ UDPゴシック" panose="020B0400000000000000" pitchFamily="50" charset="-128"/>
             </a:endParaRPr>
           </a:p>
         </p:txBody>
@@ -8151,8 +8095,8 @@
                     <a:lumOff val="25000"/>
                   </a:schemeClr>
                 </a:solidFill>
-                <a:latin typeface="メイリオ" panose="020B0604030504040204" pitchFamily="50" charset="-128"/>
-                <a:ea typeface="メイリオ" panose="020B0604030504040204" pitchFamily="50" charset="-128"/>
+                <a:latin typeface="BIZ UDPゴシック" panose="020B0400000000000000" pitchFamily="50" charset="-128"/>
+                <a:ea typeface="BIZ UDPゴシック" panose="020B0400000000000000" pitchFamily="50" charset="-128"/>
               </a:rPr>
               <a:t>3</a:t>
             </a:r>
@@ -8164,8 +8108,8 @@
                     <a:lumOff val="25000"/>
                   </a:schemeClr>
                 </a:solidFill>
-                <a:latin typeface="メイリオ" panose="020B0604030504040204" pitchFamily="50" charset="-128"/>
-                <a:ea typeface="メイリオ" panose="020B0604030504040204" pitchFamily="50" charset="-128"/>
+                <a:latin typeface="BIZ UDPゴシック" panose="020B0400000000000000" pitchFamily="50" charset="-128"/>
+                <a:ea typeface="BIZ UDPゴシック" panose="020B0400000000000000" pitchFamily="50" charset="-128"/>
               </a:rPr>
               <a:t>か月</a:t>
             </a:r>
@@ -8230,8 +8174,8 @@
                     <a:lumOff val="25000"/>
                   </a:schemeClr>
                 </a:solidFill>
-                <a:latin typeface="メイリオ" panose="020B0604030504040204" pitchFamily="50" charset="-128"/>
-                <a:ea typeface="メイリオ" panose="020B0604030504040204" pitchFamily="50" charset="-128"/>
+                <a:latin typeface="BIZ UDPゴシック" panose="020B0400000000000000" pitchFamily="50" charset="-128"/>
+                <a:ea typeface="BIZ UDPゴシック" panose="020B0400000000000000" pitchFamily="50" charset="-128"/>
               </a:rPr>
               <a:t>マーケティング戦略・戦術</a:t>
             </a:r>
@@ -8242,8 +8186,8 @@
                   <a:lumOff val="25000"/>
                 </a:schemeClr>
               </a:solidFill>
-              <a:latin typeface="メイリオ" panose="020B0604030504040204" pitchFamily="50" charset="-128"/>
-              <a:ea typeface="メイリオ" panose="020B0604030504040204" pitchFamily="50" charset="-128"/>
+              <a:latin typeface="BIZ UDPゴシック" panose="020B0400000000000000" pitchFamily="50" charset="-128"/>
+              <a:ea typeface="BIZ UDPゴシック" panose="020B0400000000000000" pitchFamily="50" charset="-128"/>
             </a:endParaRPr>
           </a:p>
           <a:p>
@@ -8256,8 +8200,8 @@
                     <a:lumOff val="25000"/>
                   </a:schemeClr>
                 </a:solidFill>
-                <a:latin typeface="メイリオ" panose="020B0604030504040204" pitchFamily="50" charset="-128"/>
-                <a:ea typeface="メイリオ" panose="020B0604030504040204" pitchFamily="50" charset="-128"/>
+                <a:latin typeface="BIZ UDPゴシック" panose="020B0400000000000000" pitchFamily="50" charset="-128"/>
+                <a:ea typeface="BIZ UDPゴシック" panose="020B0400000000000000" pitchFamily="50" charset="-128"/>
               </a:rPr>
               <a:t>KGI</a:t>
             </a:r>
@@ -8269,8 +8213,8 @@
                     <a:lumOff val="25000"/>
                   </a:schemeClr>
                 </a:solidFill>
-                <a:latin typeface="メイリオ" panose="020B0604030504040204" pitchFamily="50" charset="-128"/>
-                <a:ea typeface="メイリオ" panose="020B0604030504040204" pitchFamily="50" charset="-128"/>
+                <a:latin typeface="BIZ UDPゴシック" panose="020B0400000000000000" pitchFamily="50" charset="-128"/>
+                <a:ea typeface="BIZ UDPゴシック" panose="020B0400000000000000" pitchFamily="50" charset="-128"/>
               </a:rPr>
               <a:t>・</a:t>
             </a:r>
@@ -8282,8 +8226,8 @@
                     <a:lumOff val="25000"/>
                   </a:schemeClr>
                 </a:solidFill>
-                <a:latin typeface="メイリオ" panose="020B0604030504040204" pitchFamily="50" charset="-128"/>
-                <a:ea typeface="メイリオ" panose="020B0604030504040204" pitchFamily="50" charset="-128"/>
+                <a:latin typeface="BIZ UDPゴシック" panose="020B0400000000000000" pitchFamily="50" charset="-128"/>
+                <a:ea typeface="BIZ UDPゴシック" panose="020B0400000000000000" pitchFamily="50" charset="-128"/>
               </a:rPr>
               <a:t>KPI</a:t>
             </a:r>
@@ -8295,8 +8239,8 @@
                     <a:lumOff val="25000"/>
                   </a:schemeClr>
                 </a:solidFill>
-                <a:latin typeface="メイリオ" panose="020B0604030504040204" pitchFamily="50" charset="-128"/>
-                <a:ea typeface="メイリオ" panose="020B0604030504040204" pitchFamily="50" charset="-128"/>
+                <a:latin typeface="BIZ UDPゴシック" panose="020B0400000000000000" pitchFamily="50" charset="-128"/>
+                <a:ea typeface="BIZ UDPゴシック" panose="020B0400000000000000" pitchFamily="50" charset="-128"/>
               </a:rPr>
               <a:t>設計</a:t>
             </a:r>
@@ -8308,8 +8252,8 @@
                     <a:lumOff val="25000"/>
                   </a:schemeClr>
                 </a:solidFill>
-                <a:latin typeface="メイリオ" panose="020B0604030504040204" pitchFamily="50" charset="-128"/>
-                <a:ea typeface="メイリオ" panose="020B0604030504040204" pitchFamily="50" charset="-128"/>
+                <a:latin typeface="BIZ UDPゴシック" panose="020B0400000000000000" pitchFamily="50" charset="-128"/>
+                <a:ea typeface="BIZ UDPゴシック" panose="020B0400000000000000" pitchFamily="50" charset="-128"/>
               </a:rPr>
               <a:t>/</a:t>
             </a:r>
@@ -8321,8 +8265,8 @@
                     <a:lumOff val="25000"/>
                   </a:schemeClr>
                 </a:solidFill>
-                <a:latin typeface="メイリオ" panose="020B0604030504040204" pitchFamily="50" charset="-128"/>
-                <a:ea typeface="メイリオ" panose="020B0604030504040204" pitchFamily="50" charset="-128"/>
+                <a:latin typeface="BIZ UDPゴシック" panose="020B0400000000000000" pitchFamily="50" charset="-128"/>
+                <a:ea typeface="BIZ UDPゴシック" panose="020B0400000000000000" pitchFamily="50" charset="-128"/>
               </a:rPr>
               <a:t>企画設計</a:t>
             </a:r>
@@ -8334,8 +8278,8 @@
                     <a:lumOff val="25000"/>
                   </a:schemeClr>
                 </a:solidFill>
-                <a:latin typeface="メイリオ" panose="020B0604030504040204" pitchFamily="50" charset="-128"/>
-                <a:ea typeface="メイリオ" panose="020B0604030504040204" pitchFamily="50" charset="-128"/>
+                <a:latin typeface="BIZ UDPゴシック" panose="020B0400000000000000" pitchFamily="50" charset="-128"/>
+                <a:ea typeface="BIZ UDPゴシック" panose="020B0400000000000000" pitchFamily="50" charset="-128"/>
               </a:rPr>
               <a:t>/</a:t>
             </a:r>
@@ -8347,8 +8291,8 @@
                     <a:lumOff val="25000"/>
                   </a:schemeClr>
                 </a:solidFill>
-                <a:latin typeface="メイリオ" panose="020B0604030504040204" pitchFamily="50" charset="-128"/>
-                <a:ea typeface="メイリオ" panose="020B0604030504040204" pitchFamily="50" charset="-128"/>
+                <a:latin typeface="BIZ UDPゴシック" panose="020B0400000000000000" pitchFamily="50" charset="-128"/>
+                <a:ea typeface="BIZ UDPゴシック" panose="020B0400000000000000" pitchFamily="50" charset="-128"/>
               </a:rPr>
               <a:t>検証</a:t>
             </a:r>
@@ -8359,8 +8303,8 @@
                   <a:lumOff val="25000"/>
                 </a:schemeClr>
               </a:solidFill>
-              <a:latin typeface="メイリオ" panose="020B0604030504040204" pitchFamily="50" charset="-128"/>
-              <a:ea typeface="メイリオ" panose="020B0604030504040204" pitchFamily="50" charset="-128"/>
+              <a:latin typeface="BIZ UDPゴシック" panose="020B0400000000000000" pitchFamily="50" charset="-128"/>
+              <a:ea typeface="BIZ UDPゴシック" panose="020B0400000000000000" pitchFamily="50" charset="-128"/>
             </a:endParaRPr>
           </a:p>
         </p:txBody>
@@ -8399,14 +8343,14 @@
             </a:pPr>
             <a:r>
               <a:rPr kumimoji="1" lang="ja-JP" altLang="en-US" sz="1400" dirty="0">
-                <a:latin typeface="メイリオ" panose="020B0604030504040204" pitchFamily="50" charset="-128"/>
-                <a:ea typeface="メイリオ" panose="020B0604030504040204" pitchFamily="50" charset="-128"/>
+                <a:latin typeface="BIZ UDPゴシック" panose="020B0400000000000000" pitchFamily="50" charset="-128"/>
+                <a:ea typeface="BIZ UDPゴシック" panose="020B0400000000000000" pitchFamily="50" charset="-128"/>
               </a:rPr>
               <a:t>ロードマップ</a:t>
             </a:r>
             <a:endParaRPr kumimoji="1" lang="en-US" altLang="ja-JP" sz="1400" dirty="0">
-              <a:latin typeface="メイリオ" panose="020B0604030504040204" pitchFamily="50" charset="-128"/>
-              <a:ea typeface="メイリオ" panose="020B0604030504040204" pitchFamily="50" charset="-128"/>
+              <a:latin typeface="BIZ UDPゴシック" panose="020B0400000000000000" pitchFamily="50" charset="-128"/>
+              <a:ea typeface="BIZ UDPゴシック" panose="020B0400000000000000" pitchFamily="50" charset="-128"/>
             </a:endParaRPr>
           </a:p>
           <a:p>
@@ -8416,14 +8360,14 @@
             </a:pPr>
             <a:r>
               <a:rPr lang="ja-JP" altLang="en-US" sz="1400" dirty="0">
-                <a:latin typeface="メイリオ" panose="020B0604030504040204" pitchFamily="50" charset="-128"/>
-                <a:ea typeface="メイリオ" panose="020B0604030504040204" pitchFamily="50" charset="-128"/>
+                <a:latin typeface="BIZ UDPゴシック" panose="020B0400000000000000" pitchFamily="50" charset="-128"/>
+                <a:ea typeface="BIZ UDPゴシック" panose="020B0400000000000000" pitchFamily="50" charset="-128"/>
               </a:rPr>
               <a:t>施策の方向性</a:t>
             </a:r>
             <a:endParaRPr lang="en-US" altLang="ja-JP" sz="1400" dirty="0">
-              <a:latin typeface="メイリオ" panose="020B0604030504040204" pitchFamily="50" charset="-128"/>
-              <a:ea typeface="メイリオ" panose="020B0604030504040204" pitchFamily="50" charset="-128"/>
+              <a:latin typeface="BIZ UDPゴシック" panose="020B0400000000000000" pitchFamily="50" charset="-128"/>
+              <a:ea typeface="BIZ UDPゴシック" panose="020B0400000000000000" pitchFamily="50" charset="-128"/>
             </a:endParaRPr>
           </a:p>
           <a:p>
@@ -8433,21 +8377,21 @@
             </a:pPr>
             <a:r>
               <a:rPr kumimoji="1" lang="en-US" altLang="ja-JP" sz="1400" dirty="0">
-                <a:latin typeface="メイリオ" panose="020B0604030504040204" pitchFamily="50" charset="-128"/>
-                <a:ea typeface="メイリオ" panose="020B0604030504040204" pitchFamily="50" charset="-128"/>
+                <a:latin typeface="BIZ UDPゴシック" panose="020B0400000000000000" pitchFamily="50" charset="-128"/>
+                <a:ea typeface="BIZ UDPゴシック" panose="020B0400000000000000" pitchFamily="50" charset="-128"/>
               </a:rPr>
               <a:t>KGI/KPI</a:t>
             </a:r>
             <a:r>
               <a:rPr kumimoji="1" lang="ja-JP" altLang="en-US" sz="1400" dirty="0">
-                <a:latin typeface="メイリオ" panose="020B0604030504040204" pitchFamily="50" charset="-128"/>
-                <a:ea typeface="メイリオ" panose="020B0604030504040204" pitchFamily="50" charset="-128"/>
+                <a:latin typeface="BIZ UDPゴシック" panose="020B0400000000000000" pitchFamily="50" charset="-128"/>
+                <a:ea typeface="BIZ UDPゴシック" panose="020B0400000000000000" pitchFamily="50" charset="-128"/>
               </a:rPr>
               <a:t>の設計・評価指標</a:t>
             </a:r>
             <a:endParaRPr kumimoji="1" lang="en-US" altLang="ja-JP" sz="1400" dirty="0">
-              <a:latin typeface="メイリオ" panose="020B0604030504040204" pitchFamily="50" charset="-128"/>
-              <a:ea typeface="メイリオ" panose="020B0604030504040204" pitchFamily="50" charset="-128"/>
+              <a:latin typeface="BIZ UDPゴシック" panose="020B0400000000000000" pitchFamily="50" charset="-128"/>
+              <a:ea typeface="BIZ UDPゴシック" panose="020B0400000000000000" pitchFamily="50" charset="-128"/>
             </a:endParaRPr>
           </a:p>
           <a:p>
@@ -8457,14 +8401,14 @@
             </a:pPr>
             <a:r>
               <a:rPr lang="ja-JP" altLang="en-US" sz="1400" dirty="0">
-                <a:latin typeface="メイリオ" panose="020B0604030504040204" pitchFamily="50" charset="-128"/>
-                <a:ea typeface="メイリオ" panose="020B0604030504040204" pitchFamily="50" charset="-128"/>
+                <a:latin typeface="BIZ UDPゴシック" panose="020B0400000000000000" pitchFamily="50" charset="-128"/>
+                <a:ea typeface="BIZ UDPゴシック" panose="020B0400000000000000" pitchFamily="50" charset="-128"/>
               </a:rPr>
               <a:t>検証項目の決定と実行</a:t>
             </a:r>
             <a:endParaRPr kumimoji="1" lang="ja-JP" altLang="en-US" sz="1400" dirty="0">
-              <a:latin typeface="メイリオ" panose="020B0604030504040204" pitchFamily="50" charset="-128"/>
-              <a:ea typeface="メイリオ" panose="020B0604030504040204" pitchFamily="50" charset="-128"/>
+              <a:latin typeface="BIZ UDPゴシック" panose="020B0400000000000000" pitchFamily="50" charset="-128"/>
+              <a:ea typeface="BIZ UDPゴシック" panose="020B0400000000000000" pitchFamily="50" charset="-128"/>
             </a:endParaRPr>
           </a:p>
         </p:txBody>
@@ -8503,14 +8447,14 @@
             </a:pPr>
             <a:r>
               <a:rPr kumimoji="1" lang="ja-JP" altLang="en-US" sz="1400" dirty="0">
-                <a:latin typeface="メイリオ" panose="020B0604030504040204" pitchFamily="50" charset="-128"/>
-                <a:ea typeface="メイリオ" panose="020B0604030504040204" pitchFamily="50" charset="-128"/>
+                <a:latin typeface="BIZ UDPゴシック" panose="020B0400000000000000" pitchFamily="50" charset="-128"/>
+                <a:ea typeface="BIZ UDPゴシック" panose="020B0400000000000000" pitchFamily="50" charset="-128"/>
               </a:rPr>
               <a:t>ロードマップ</a:t>
             </a:r>
             <a:endParaRPr kumimoji="1" lang="en-US" altLang="ja-JP" sz="1400" dirty="0">
-              <a:latin typeface="メイリオ" panose="020B0604030504040204" pitchFamily="50" charset="-128"/>
-              <a:ea typeface="メイリオ" panose="020B0604030504040204" pitchFamily="50" charset="-128"/>
+              <a:latin typeface="BIZ UDPゴシック" panose="020B0400000000000000" pitchFamily="50" charset="-128"/>
+              <a:ea typeface="BIZ UDPゴシック" panose="020B0400000000000000" pitchFamily="50" charset="-128"/>
             </a:endParaRPr>
           </a:p>
           <a:p>
@@ -8520,14 +8464,14 @@
             </a:pPr>
             <a:r>
               <a:rPr lang="ja-JP" altLang="en-US" sz="1400" dirty="0">
-                <a:latin typeface="メイリオ" panose="020B0604030504040204" pitchFamily="50" charset="-128"/>
-                <a:ea typeface="メイリオ" panose="020B0604030504040204" pitchFamily="50" charset="-128"/>
+                <a:latin typeface="BIZ UDPゴシック" panose="020B0400000000000000" pitchFamily="50" charset="-128"/>
+                <a:ea typeface="BIZ UDPゴシック" panose="020B0400000000000000" pitchFamily="50" charset="-128"/>
               </a:rPr>
               <a:t>施策の方向性</a:t>
             </a:r>
             <a:endParaRPr lang="en-US" altLang="ja-JP" sz="1400" dirty="0">
-              <a:latin typeface="メイリオ" panose="020B0604030504040204" pitchFamily="50" charset="-128"/>
-              <a:ea typeface="メイリオ" panose="020B0604030504040204" pitchFamily="50" charset="-128"/>
+              <a:latin typeface="BIZ UDPゴシック" panose="020B0400000000000000" pitchFamily="50" charset="-128"/>
+              <a:ea typeface="BIZ UDPゴシック" panose="020B0400000000000000" pitchFamily="50" charset="-128"/>
             </a:endParaRPr>
           </a:p>
           <a:p>
@@ -8537,21 +8481,21 @@
             </a:pPr>
             <a:r>
               <a:rPr kumimoji="1" lang="en-US" altLang="ja-JP" sz="1400" dirty="0">
-                <a:latin typeface="メイリオ" panose="020B0604030504040204" pitchFamily="50" charset="-128"/>
-                <a:ea typeface="メイリオ" panose="020B0604030504040204" pitchFamily="50" charset="-128"/>
+                <a:latin typeface="BIZ UDPゴシック" panose="020B0400000000000000" pitchFamily="50" charset="-128"/>
+                <a:ea typeface="BIZ UDPゴシック" panose="020B0400000000000000" pitchFamily="50" charset="-128"/>
               </a:rPr>
               <a:t>KGI/KPI</a:t>
             </a:r>
             <a:r>
               <a:rPr kumimoji="1" lang="ja-JP" altLang="en-US" sz="1400" dirty="0">
-                <a:latin typeface="メイリオ" panose="020B0604030504040204" pitchFamily="50" charset="-128"/>
-                <a:ea typeface="メイリオ" panose="020B0604030504040204" pitchFamily="50" charset="-128"/>
+                <a:latin typeface="BIZ UDPゴシック" panose="020B0400000000000000" pitchFamily="50" charset="-128"/>
+                <a:ea typeface="BIZ UDPゴシック" panose="020B0400000000000000" pitchFamily="50" charset="-128"/>
               </a:rPr>
               <a:t>の設計・評価指標</a:t>
             </a:r>
             <a:endParaRPr kumimoji="1" lang="en-US" altLang="ja-JP" sz="1400" dirty="0">
-              <a:latin typeface="メイリオ" panose="020B0604030504040204" pitchFamily="50" charset="-128"/>
-              <a:ea typeface="メイリオ" panose="020B0604030504040204" pitchFamily="50" charset="-128"/>
+              <a:latin typeface="BIZ UDPゴシック" panose="020B0400000000000000" pitchFamily="50" charset="-128"/>
+              <a:ea typeface="BIZ UDPゴシック" panose="020B0400000000000000" pitchFamily="50" charset="-128"/>
             </a:endParaRPr>
           </a:p>
           <a:p>
@@ -8561,14 +8505,14 @@
             </a:pPr>
             <a:r>
               <a:rPr lang="ja-JP" altLang="en-US" sz="1400" dirty="0">
-                <a:latin typeface="メイリオ" panose="020B0604030504040204" pitchFamily="50" charset="-128"/>
-                <a:ea typeface="メイリオ" panose="020B0604030504040204" pitchFamily="50" charset="-128"/>
+                <a:latin typeface="BIZ UDPゴシック" panose="020B0400000000000000" pitchFamily="50" charset="-128"/>
+                <a:ea typeface="BIZ UDPゴシック" panose="020B0400000000000000" pitchFamily="50" charset="-128"/>
               </a:rPr>
               <a:t>検証項目の決定と実行</a:t>
             </a:r>
             <a:endParaRPr kumimoji="1" lang="ja-JP" altLang="en-US" sz="1400" dirty="0">
-              <a:latin typeface="メイリオ" panose="020B0604030504040204" pitchFamily="50" charset="-128"/>
-              <a:ea typeface="メイリオ" panose="020B0604030504040204" pitchFamily="50" charset="-128"/>
+              <a:latin typeface="BIZ UDPゴシック" panose="020B0400000000000000" pitchFamily="50" charset="-128"/>
+              <a:ea typeface="BIZ UDPゴシック" panose="020B0400000000000000" pitchFamily="50" charset="-128"/>
             </a:endParaRPr>
           </a:p>
         </p:txBody>
@@ -8607,14 +8551,14 @@
             </a:pPr>
             <a:r>
               <a:rPr kumimoji="1" lang="ja-JP" altLang="en-US" sz="1400" dirty="0">
-                <a:latin typeface="メイリオ" panose="020B0604030504040204" pitchFamily="50" charset="-128"/>
-                <a:ea typeface="メイリオ" panose="020B0604030504040204" pitchFamily="50" charset="-128"/>
+                <a:latin typeface="BIZ UDPゴシック" panose="020B0400000000000000" pitchFamily="50" charset="-128"/>
+                <a:ea typeface="BIZ UDPゴシック" panose="020B0400000000000000" pitchFamily="50" charset="-128"/>
               </a:rPr>
               <a:t>ロードマップ</a:t>
             </a:r>
             <a:endParaRPr kumimoji="1" lang="en-US" altLang="ja-JP" sz="1400" dirty="0">
-              <a:latin typeface="メイリオ" panose="020B0604030504040204" pitchFamily="50" charset="-128"/>
-              <a:ea typeface="メイリオ" panose="020B0604030504040204" pitchFamily="50" charset="-128"/>
+              <a:latin typeface="BIZ UDPゴシック" panose="020B0400000000000000" pitchFamily="50" charset="-128"/>
+              <a:ea typeface="BIZ UDPゴシック" panose="020B0400000000000000" pitchFamily="50" charset="-128"/>
             </a:endParaRPr>
           </a:p>
           <a:p>
@@ -8624,14 +8568,14 @@
             </a:pPr>
             <a:r>
               <a:rPr lang="ja-JP" altLang="en-US" sz="1400" dirty="0">
-                <a:latin typeface="メイリオ" panose="020B0604030504040204" pitchFamily="50" charset="-128"/>
-                <a:ea typeface="メイリオ" panose="020B0604030504040204" pitchFamily="50" charset="-128"/>
+                <a:latin typeface="BIZ UDPゴシック" panose="020B0400000000000000" pitchFamily="50" charset="-128"/>
+                <a:ea typeface="BIZ UDPゴシック" panose="020B0400000000000000" pitchFamily="50" charset="-128"/>
               </a:rPr>
               <a:t>施策の方向性</a:t>
             </a:r>
             <a:endParaRPr lang="en-US" altLang="ja-JP" sz="1400" dirty="0">
-              <a:latin typeface="メイリオ" panose="020B0604030504040204" pitchFamily="50" charset="-128"/>
-              <a:ea typeface="メイリオ" panose="020B0604030504040204" pitchFamily="50" charset="-128"/>
+              <a:latin typeface="BIZ UDPゴシック" panose="020B0400000000000000" pitchFamily="50" charset="-128"/>
+              <a:ea typeface="BIZ UDPゴシック" panose="020B0400000000000000" pitchFamily="50" charset="-128"/>
             </a:endParaRPr>
           </a:p>
           <a:p>
@@ -8641,21 +8585,21 @@
             </a:pPr>
             <a:r>
               <a:rPr kumimoji="1" lang="en-US" altLang="ja-JP" sz="1400" dirty="0">
-                <a:latin typeface="メイリオ" panose="020B0604030504040204" pitchFamily="50" charset="-128"/>
-                <a:ea typeface="メイリオ" panose="020B0604030504040204" pitchFamily="50" charset="-128"/>
+                <a:latin typeface="BIZ UDPゴシック" panose="020B0400000000000000" pitchFamily="50" charset="-128"/>
+                <a:ea typeface="BIZ UDPゴシック" panose="020B0400000000000000" pitchFamily="50" charset="-128"/>
               </a:rPr>
               <a:t>KGI/KPI</a:t>
             </a:r>
             <a:r>
               <a:rPr kumimoji="1" lang="ja-JP" altLang="en-US" sz="1400" dirty="0">
-                <a:latin typeface="メイリオ" panose="020B0604030504040204" pitchFamily="50" charset="-128"/>
-                <a:ea typeface="メイリオ" panose="020B0604030504040204" pitchFamily="50" charset="-128"/>
+                <a:latin typeface="BIZ UDPゴシック" panose="020B0400000000000000" pitchFamily="50" charset="-128"/>
+                <a:ea typeface="BIZ UDPゴシック" panose="020B0400000000000000" pitchFamily="50" charset="-128"/>
               </a:rPr>
               <a:t>の設計・評価指標</a:t>
             </a:r>
             <a:endParaRPr kumimoji="1" lang="en-US" altLang="ja-JP" sz="1400" dirty="0">
-              <a:latin typeface="メイリオ" panose="020B0604030504040204" pitchFamily="50" charset="-128"/>
-              <a:ea typeface="メイリオ" panose="020B0604030504040204" pitchFamily="50" charset="-128"/>
+              <a:latin typeface="BIZ UDPゴシック" panose="020B0400000000000000" pitchFamily="50" charset="-128"/>
+              <a:ea typeface="BIZ UDPゴシック" panose="020B0400000000000000" pitchFamily="50" charset="-128"/>
             </a:endParaRPr>
           </a:p>
           <a:p>
@@ -8665,14 +8609,14 @@
             </a:pPr>
             <a:r>
               <a:rPr lang="ja-JP" altLang="en-US" sz="1400" dirty="0">
-                <a:latin typeface="メイリオ" panose="020B0604030504040204" pitchFamily="50" charset="-128"/>
-                <a:ea typeface="メイリオ" panose="020B0604030504040204" pitchFamily="50" charset="-128"/>
+                <a:latin typeface="BIZ UDPゴシック" panose="020B0400000000000000" pitchFamily="50" charset="-128"/>
+                <a:ea typeface="BIZ UDPゴシック" panose="020B0400000000000000" pitchFamily="50" charset="-128"/>
               </a:rPr>
               <a:t>検証項目の決定と実行</a:t>
             </a:r>
             <a:endParaRPr kumimoji="1" lang="ja-JP" altLang="en-US" sz="1400" dirty="0">
-              <a:latin typeface="メイリオ" panose="020B0604030504040204" pitchFamily="50" charset="-128"/>
-              <a:ea typeface="メイリオ" panose="020B0604030504040204" pitchFamily="50" charset="-128"/>
+              <a:latin typeface="BIZ UDPゴシック" panose="020B0400000000000000" pitchFamily="50" charset="-128"/>
+              <a:ea typeface="BIZ UDPゴシック" panose="020B0400000000000000" pitchFamily="50" charset="-128"/>
             </a:endParaRPr>
           </a:p>
         </p:txBody>
@@ -8735,8 +8679,8 @@
                     <a:lumOff val="25000"/>
                   </a:schemeClr>
                 </a:solidFill>
-                <a:latin typeface="メイリオ" panose="020B0604030504040204" pitchFamily="50" charset="-128"/>
-                <a:ea typeface="メイリオ" panose="020B0604030504040204" pitchFamily="50" charset="-128"/>
+                <a:latin typeface="BIZ UDPゴシック" panose="020B0400000000000000" pitchFamily="50" charset="-128"/>
+                <a:ea typeface="BIZ UDPゴシック" panose="020B0400000000000000" pitchFamily="50" charset="-128"/>
               </a:rPr>
               <a:t>フェーズ</a:t>
             </a:r>
@@ -8748,8 +8692,8 @@
                     <a:lumOff val="25000"/>
                   </a:schemeClr>
                 </a:solidFill>
-                <a:latin typeface="メイリオ" panose="020B0604030504040204" pitchFamily="50" charset="-128"/>
-                <a:ea typeface="メイリオ" panose="020B0604030504040204" pitchFamily="50" charset="-128"/>
+                <a:latin typeface="BIZ UDPゴシック" panose="020B0400000000000000" pitchFamily="50" charset="-128"/>
+                <a:ea typeface="BIZ UDPゴシック" panose="020B0400000000000000" pitchFamily="50" charset="-128"/>
               </a:rPr>
               <a:t> 3</a:t>
             </a:r>
@@ -8764,8 +8708,8 @@
                     <a:lumOff val="25000"/>
                   </a:schemeClr>
                 </a:solidFill>
-                <a:latin typeface="メイリオ" panose="020B0604030504040204" pitchFamily="50" charset="-128"/>
-                <a:ea typeface="メイリオ" panose="020B0604030504040204" pitchFamily="50" charset="-128"/>
+                <a:latin typeface="BIZ UDPゴシック" panose="020B0400000000000000" pitchFamily="50" charset="-128"/>
+                <a:ea typeface="BIZ UDPゴシック" panose="020B0400000000000000" pitchFamily="50" charset="-128"/>
               </a:rPr>
               <a:t>2026/07 – 2026/09</a:t>
             </a:r>
@@ -8776,8 +8720,8 @@
                   <a:lumOff val="25000"/>
                 </a:schemeClr>
               </a:solidFill>
-              <a:latin typeface="メイリオ" panose="020B0604030504040204" pitchFamily="50" charset="-128"/>
-              <a:ea typeface="メイリオ" panose="020B0604030504040204" pitchFamily="50" charset="-128"/>
+              <a:latin typeface="BIZ UDPゴシック" panose="020B0400000000000000" pitchFamily="50" charset="-128"/>
+              <a:ea typeface="BIZ UDPゴシック" panose="020B0400000000000000" pitchFamily="50" charset="-128"/>
             </a:endParaRPr>
           </a:p>
         </p:txBody>
@@ -8836,8 +8780,8 @@
                     <a:lumOff val="25000"/>
                   </a:schemeClr>
                 </a:solidFill>
-                <a:latin typeface="メイリオ" panose="020B0604030504040204" pitchFamily="50" charset="-128"/>
-                <a:ea typeface="メイリオ" panose="020B0604030504040204" pitchFamily="50" charset="-128"/>
+                <a:latin typeface="BIZ UDPゴシック" panose="020B0400000000000000" pitchFamily="50" charset="-128"/>
+                <a:ea typeface="BIZ UDPゴシック" panose="020B0400000000000000" pitchFamily="50" charset="-128"/>
               </a:rPr>
               <a:t>3</a:t>
             </a:r>
@@ -8849,8 +8793,8 @@
                     <a:lumOff val="25000"/>
                   </a:schemeClr>
                 </a:solidFill>
-                <a:latin typeface="メイリオ" panose="020B0604030504040204" pitchFamily="50" charset="-128"/>
-                <a:ea typeface="メイリオ" panose="020B0604030504040204" pitchFamily="50" charset="-128"/>
+                <a:latin typeface="BIZ UDPゴシック" panose="020B0400000000000000" pitchFamily="50" charset="-128"/>
+                <a:ea typeface="BIZ UDPゴシック" panose="020B0400000000000000" pitchFamily="50" charset="-128"/>
               </a:rPr>
               <a:t>か月</a:t>
             </a:r>
@@ -8915,8 +8859,8 @@
                     <a:lumOff val="25000"/>
                   </a:schemeClr>
                 </a:solidFill>
-                <a:latin typeface="メイリオ" panose="020B0604030504040204" pitchFamily="50" charset="-128"/>
-                <a:ea typeface="メイリオ" panose="020B0604030504040204" pitchFamily="50" charset="-128"/>
+                <a:latin typeface="BIZ UDPゴシック" panose="020B0400000000000000" pitchFamily="50" charset="-128"/>
+                <a:ea typeface="BIZ UDPゴシック" panose="020B0400000000000000" pitchFamily="50" charset="-128"/>
               </a:rPr>
               <a:t>マーケティング戦略</a:t>
             </a:r>
@@ -8928,8 +8872,8 @@
                     <a:lumOff val="25000"/>
                   </a:schemeClr>
                 </a:solidFill>
-                <a:latin typeface="メイリオ" panose="020B0604030504040204" pitchFamily="50" charset="-128"/>
-                <a:ea typeface="メイリオ" panose="020B0604030504040204" pitchFamily="50" charset="-128"/>
+                <a:latin typeface="BIZ UDPゴシック" panose="020B0400000000000000" pitchFamily="50" charset="-128"/>
+                <a:ea typeface="BIZ UDPゴシック" panose="020B0400000000000000" pitchFamily="50" charset="-128"/>
               </a:rPr>
               <a:t>・戦術</a:t>
             </a:r>
@@ -8940,8 +8884,8 @@
                   <a:lumOff val="25000"/>
                 </a:schemeClr>
               </a:solidFill>
-              <a:latin typeface="メイリオ" panose="020B0604030504040204" pitchFamily="50" charset="-128"/>
-              <a:ea typeface="メイリオ" panose="020B0604030504040204" pitchFamily="50" charset="-128"/>
+              <a:latin typeface="BIZ UDPゴシック" panose="020B0400000000000000" pitchFamily="50" charset="-128"/>
+              <a:ea typeface="BIZ UDPゴシック" panose="020B0400000000000000" pitchFamily="50" charset="-128"/>
             </a:endParaRPr>
           </a:p>
           <a:p>
@@ -8954,8 +8898,8 @@
                     <a:lumOff val="25000"/>
                   </a:schemeClr>
                 </a:solidFill>
-                <a:latin typeface="メイリオ" panose="020B0604030504040204" pitchFamily="50" charset="-128"/>
-                <a:ea typeface="メイリオ" panose="020B0604030504040204" pitchFamily="50" charset="-128"/>
+                <a:latin typeface="BIZ UDPゴシック" panose="020B0400000000000000" pitchFamily="50" charset="-128"/>
+                <a:ea typeface="BIZ UDPゴシック" panose="020B0400000000000000" pitchFamily="50" charset="-128"/>
               </a:rPr>
               <a:t>KGI</a:t>
             </a:r>
@@ -8967,8 +8911,8 @@
                     <a:lumOff val="25000"/>
                   </a:schemeClr>
                 </a:solidFill>
-                <a:latin typeface="メイリオ" panose="020B0604030504040204" pitchFamily="50" charset="-128"/>
-                <a:ea typeface="メイリオ" panose="020B0604030504040204" pitchFamily="50" charset="-128"/>
+                <a:latin typeface="BIZ UDPゴシック" panose="020B0400000000000000" pitchFamily="50" charset="-128"/>
+                <a:ea typeface="BIZ UDPゴシック" panose="020B0400000000000000" pitchFamily="50" charset="-128"/>
               </a:rPr>
               <a:t>・</a:t>
             </a:r>
@@ -8980,8 +8924,8 @@
                     <a:lumOff val="25000"/>
                   </a:schemeClr>
                 </a:solidFill>
-                <a:latin typeface="メイリオ" panose="020B0604030504040204" pitchFamily="50" charset="-128"/>
-                <a:ea typeface="メイリオ" panose="020B0604030504040204" pitchFamily="50" charset="-128"/>
+                <a:latin typeface="BIZ UDPゴシック" panose="020B0400000000000000" pitchFamily="50" charset="-128"/>
+                <a:ea typeface="BIZ UDPゴシック" panose="020B0400000000000000" pitchFamily="50" charset="-128"/>
               </a:rPr>
               <a:t>KPI</a:t>
             </a:r>
@@ -8993,8 +8937,8 @@
                     <a:lumOff val="25000"/>
                   </a:schemeClr>
                 </a:solidFill>
-                <a:latin typeface="メイリオ" panose="020B0604030504040204" pitchFamily="50" charset="-128"/>
-                <a:ea typeface="メイリオ" panose="020B0604030504040204" pitchFamily="50" charset="-128"/>
+                <a:latin typeface="BIZ UDPゴシック" panose="020B0400000000000000" pitchFamily="50" charset="-128"/>
+                <a:ea typeface="BIZ UDPゴシック" panose="020B0400000000000000" pitchFamily="50" charset="-128"/>
               </a:rPr>
               <a:t>設計</a:t>
             </a:r>
@@ -9006,8 +8950,8 @@
                     <a:lumOff val="25000"/>
                   </a:schemeClr>
                 </a:solidFill>
-                <a:latin typeface="メイリオ" panose="020B0604030504040204" pitchFamily="50" charset="-128"/>
-                <a:ea typeface="メイリオ" panose="020B0604030504040204" pitchFamily="50" charset="-128"/>
+                <a:latin typeface="BIZ UDPゴシック" panose="020B0400000000000000" pitchFamily="50" charset="-128"/>
+                <a:ea typeface="BIZ UDPゴシック" panose="020B0400000000000000" pitchFamily="50" charset="-128"/>
               </a:rPr>
               <a:t>/</a:t>
             </a:r>
@@ -9019,8 +8963,8 @@
                     <a:lumOff val="25000"/>
                   </a:schemeClr>
                 </a:solidFill>
-                <a:latin typeface="メイリオ" panose="020B0604030504040204" pitchFamily="50" charset="-128"/>
-                <a:ea typeface="メイリオ" panose="020B0604030504040204" pitchFamily="50" charset="-128"/>
+                <a:latin typeface="BIZ UDPゴシック" panose="020B0400000000000000" pitchFamily="50" charset="-128"/>
+                <a:ea typeface="BIZ UDPゴシック" panose="020B0400000000000000" pitchFamily="50" charset="-128"/>
               </a:rPr>
               <a:t>企画設計</a:t>
             </a:r>
@@ -9032,8 +8976,8 @@
                     <a:lumOff val="25000"/>
                   </a:schemeClr>
                 </a:solidFill>
-                <a:latin typeface="メイリオ" panose="020B0604030504040204" pitchFamily="50" charset="-128"/>
-                <a:ea typeface="メイリオ" panose="020B0604030504040204" pitchFamily="50" charset="-128"/>
+                <a:latin typeface="BIZ UDPゴシック" panose="020B0400000000000000" pitchFamily="50" charset="-128"/>
+                <a:ea typeface="BIZ UDPゴシック" panose="020B0400000000000000" pitchFamily="50" charset="-128"/>
               </a:rPr>
               <a:t>/</a:t>
             </a:r>
@@ -9045,8 +8989,8 @@
                     <a:lumOff val="25000"/>
                   </a:schemeClr>
                 </a:solidFill>
-                <a:latin typeface="メイリオ" panose="020B0604030504040204" pitchFamily="50" charset="-128"/>
-                <a:ea typeface="メイリオ" panose="020B0604030504040204" pitchFamily="50" charset="-128"/>
+                <a:latin typeface="BIZ UDPゴシック" panose="020B0400000000000000" pitchFamily="50" charset="-128"/>
+                <a:ea typeface="BIZ UDPゴシック" panose="020B0400000000000000" pitchFamily="50" charset="-128"/>
               </a:rPr>
               <a:t>検証</a:t>
             </a:r>
@@ -9057,8 +9001,8 @@
                   <a:lumOff val="25000"/>
                 </a:schemeClr>
               </a:solidFill>
-              <a:latin typeface="メイリオ" panose="020B0604030504040204" pitchFamily="50" charset="-128"/>
-              <a:ea typeface="メイリオ" panose="020B0604030504040204" pitchFamily="50" charset="-128"/>
+              <a:latin typeface="BIZ UDPゴシック" panose="020B0400000000000000" pitchFamily="50" charset="-128"/>
+              <a:ea typeface="BIZ UDPゴシック" panose="020B0400000000000000" pitchFamily="50" charset="-128"/>
             </a:endParaRPr>
           </a:p>
         </p:txBody>
@@ -9097,14 +9041,14 @@
             </a:pPr>
             <a:r>
               <a:rPr kumimoji="1" lang="ja-JP" altLang="en-US" sz="1400" dirty="0">
-                <a:latin typeface="メイリオ" panose="020B0604030504040204" pitchFamily="50" charset="-128"/>
-                <a:ea typeface="メイリオ" panose="020B0604030504040204" pitchFamily="50" charset="-128"/>
+                <a:latin typeface="BIZ UDPゴシック" panose="020B0400000000000000" pitchFamily="50" charset="-128"/>
+                <a:ea typeface="BIZ UDPゴシック" panose="020B0400000000000000" pitchFamily="50" charset="-128"/>
               </a:rPr>
               <a:t>ロードマップ</a:t>
             </a:r>
             <a:endParaRPr kumimoji="1" lang="en-US" altLang="ja-JP" sz="1400" dirty="0">
-              <a:latin typeface="メイリオ" panose="020B0604030504040204" pitchFamily="50" charset="-128"/>
-              <a:ea typeface="メイリオ" panose="020B0604030504040204" pitchFamily="50" charset="-128"/>
+              <a:latin typeface="BIZ UDPゴシック" panose="020B0400000000000000" pitchFamily="50" charset="-128"/>
+              <a:ea typeface="BIZ UDPゴシック" panose="020B0400000000000000" pitchFamily="50" charset="-128"/>
             </a:endParaRPr>
           </a:p>
           <a:p>
@@ -9114,14 +9058,14 @@
             </a:pPr>
             <a:r>
               <a:rPr lang="ja-JP" altLang="en-US" sz="1400" dirty="0">
-                <a:latin typeface="メイリオ" panose="020B0604030504040204" pitchFamily="50" charset="-128"/>
-                <a:ea typeface="メイリオ" panose="020B0604030504040204" pitchFamily="50" charset="-128"/>
+                <a:latin typeface="BIZ UDPゴシック" panose="020B0400000000000000" pitchFamily="50" charset="-128"/>
+                <a:ea typeface="BIZ UDPゴシック" panose="020B0400000000000000" pitchFamily="50" charset="-128"/>
               </a:rPr>
               <a:t>施策の方向性</a:t>
             </a:r>
             <a:endParaRPr lang="en-US" altLang="ja-JP" sz="1400" dirty="0">
-              <a:latin typeface="メイリオ" panose="020B0604030504040204" pitchFamily="50" charset="-128"/>
-              <a:ea typeface="メイリオ" panose="020B0604030504040204" pitchFamily="50" charset="-128"/>
+              <a:latin typeface="BIZ UDPゴシック" panose="020B0400000000000000" pitchFamily="50" charset="-128"/>
+              <a:ea typeface="BIZ UDPゴシック" panose="020B0400000000000000" pitchFamily="50" charset="-128"/>
             </a:endParaRPr>
           </a:p>
           <a:p>
@@ -9131,21 +9075,21 @@
             </a:pPr>
             <a:r>
               <a:rPr kumimoji="1" lang="en-US" altLang="ja-JP" sz="1400" dirty="0">
-                <a:latin typeface="メイリオ" panose="020B0604030504040204" pitchFamily="50" charset="-128"/>
-                <a:ea typeface="メイリオ" panose="020B0604030504040204" pitchFamily="50" charset="-128"/>
+                <a:latin typeface="BIZ UDPゴシック" panose="020B0400000000000000" pitchFamily="50" charset="-128"/>
+                <a:ea typeface="BIZ UDPゴシック" panose="020B0400000000000000" pitchFamily="50" charset="-128"/>
               </a:rPr>
               <a:t>KGI/KPI</a:t>
             </a:r>
             <a:r>
               <a:rPr kumimoji="1" lang="ja-JP" altLang="en-US" sz="1400" dirty="0">
-                <a:latin typeface="メイリオ" panose="020B0604030504040204" pitchFamily="50" charset="-128"/>
-                <a:ea typeface="メイリオ" panose="020B0604030504040204" pitchFamily="50" charset="-128"/>
+                <a:latin typeface="BIZ UDPゴシック" panose="020B0400000000000000" pitchFamily="50" charset="-128"/>
+                <a:ea typeface="BIZ UDPゴシック" panose="020B0400000000000000" pitchFamily="50" charset="-128"/>
               </a:rPr>
               <a:t>の設計・評価指標</a:t>
             </a:r>
             <a:endParaRPr kumimoji="1" lang="en-US" altLang="ja-JP" sz="1400" dirty="0">
-              <a:latin typeface="メイリオ" panose="020B0604030504040204" pitchFamily="50" charset="-128"/>
-              <a:ea typeface="メイリオ" panose="020B0604030504040204" pitchFamily="50" charset="-128"/>
+              <a:latin typeface="BIZ UDPゴシック" panose="020B0400000000000000" pitchFamily="50" charset="-128"/>
+              <a:ea typeface="BIZ UDPゴシック" panose="020B0400000000000000" pitchFamily="50" charset="-128"/>
             </a:endParaRPr>
           </a:p>
           <a:p>
@@ -9155,14 +9099,14 @@
             </a:pPr>
             <a:r>
               <a:rPr lang="ja-JP" altLang="en-US" sz="1400" dirty="0">
-                <a:latin typeface="メイリオ" panose="020B0604030504040204" pitchFamily="50" charset="-128"/>
-                <a:ea typeface="メイリオ" panose="020B0604030504040204" pitchFamily="50" charset="-128"/>
+                <a:latin typeface="BIZ UDPゴシック" panose="020B0400000000000000" pitchFamily="50" charset="-128"/>
+                <a:ea typeface="BIZ UDPゴシック" panose="020B0400000000000000" pitchFamily="50" charset="-128"/>
               </a:rPr>
               <a:t>検証項目の決定と実行</a:t>
             </a:r>
             <a:endParaRPr kumimoji="1" lang="ja-JP" altLang="en-US" sz="1400" dirty="0">
-              <a:latin typeface="メイリオ" panose="020B0604030504040204" pitchFamily="50" charset="-128"/>
-              <a:ea typeface="メイリオ" panose="020B0604030504040204" pitchFamily="50" charset="-128"/>
+              <a:latin typeface="BIZ UDPゴシック" panose="020B0400000000000000" pitchFamily="50" charset="-128"/>
+              <a:ea typeface="BIZ UDPゴシック" panose="020B0400000000000000" pitchFamily="50" charset="-128"/>
             </a:endParaRPr>
           </a:p>
         </p:txBody>
@@ -9201,14 +9145,14 @@
             </a:pPr>
             <a:r>
               <a:rPr kumimoji="1" lang="ja-JP" altLang="en-US" sz="1400" dirty="0">
-                <a:latin typeface="メイリオ" panose="020B0604030504040204" pitchFamily="50" charset="-128"/>
-                <a:ea typeface="メイリオ" panose="020B0604030504040204" pitchFamily="50" charset="-128"/>
+                <a:latin typeface="BIZ UDPゴシック" panose="020B0400000000000000" pitchFamily="50" charset="-128"/>
+                <a:ea typeface="BIZ UDPゴシック" panose="020B0400000000000000" pitchFamily="50" charset="-128"/>
               </a:rPr>
               <a:t>ロードマップ</a:t>
             </a:r>
             <a:endParaRPr kumimoji="1" lang="en-US" altLang="ja-JP" sz="1400" dirty="0">
-              <a:latin typeface="メイリオ" panose="020B0604030504040204" pitchFamily="50" charset="-128"/>
-              <a:ea typeface="メイリオ" panose="020B0604030504040204" pitchFamily="50" charset="-128"/>
+              <a:latin typeface="BIZ UDPゴシック" panose="020B0400000000000000" pitchFamily="50" charset="-128"/>
+              <a:ea typeface="BIZ UDPゴシック" panose="020B0400000000000000" pitchFamily="50" charset="-128"/>
             </a:endParaRPr>
           </a:p>
           <a:p>
@@ -9218,14 +9162,14 @@
             </a:pPr>
             <a:r>
               <a:rPr lang="ja-JP" altLang="en-US" sz="1400" dirty="0">
-                <a:latin typeface="メイリオ" panose="020B0604030504040204" pitchFamily="50" charset="-128"/>
-                <a:ea typeface="メイリオ" panose="020B0604030504040204" pitchFamily="50" charset="-128"/>
+                <a:latin typeface="BIZ UDPゴシック" panose="020B0400000000000000" pitchFamily="50" charset="-128"/>
+                <a:ea typeface="BIZ UDPゴシック" panose="020B0400000000000000" pitchFamily="50" charset="-128"/>
               </a:rPr>
               <a:t>施策の方向性</a:t>
             </a:r>
             <a:endParaRPr lang="en-US" altLang="ja-JP" sz="1400" dirty="0">
-              <a:latin typeface="メイリオ" panose="020B0604030504040204" pitchFamily="50" charset="-128"/>
-              <a:ea typeface="メイリオ" panose="020B0604030504040204" pitchFamily="50" charset="-128"/>
+              <a:latin typeface="BIZ UDPゴシック" panose="020B0400000000000000" pitchFamily="50" charset="-128"/>
+              <a:ea typeface="BIZ UDPゴシック" panose="020B0400000000000000" pitchFamily="50" charset="-128"/>
             </a:endParaRPr>
           </a:p>
           <a:p>
@@ -9235,21 +9179,21 @@
             </a:pPr>
             <a:r>
               <a:rPr kumimoji="1" lang="en-US" altLang="ja-JP" sz="1400" dirty="0">
-                <a:latin typeface="メイリオ" panose="020B0604030504040204" pitchFamily="50" charset="-128"/>
-                <a:ea typeface="メイリオ" panose="020B0604030504040204" pitchFamily="50" charset="-128"/>
+                <a:latin typeface="BIZ UDPゴシック" panose="020B0400000000000000" pitchFamily="50" charset="-128"/>
+                <a:ea typeface="BIZ UDPゴシック" panose="020B0400000000000000" pitchFamily="50" charset="-128"/>
               </a:rPr>
               <a:t>KGI/KPI</a:t>
             </a:r>
             <a:r>
               <a:rPr kumimoji="1" lang="ja-JP" altLang="en-US" sz="1400" dirty="0">
-                <a:latin typeface="メイリオ" panose="020B0604030504040204" pitchFamily="50" charset="-128"/>
-                <a:ea typeface="メイリオ" panose="020B0604030504040204" pitchFamily="50" charset="-128"/>
+                <a:latin typeface="BIZ UDPゴシック" panose="020B0400000000000000" pitchFamily="50" charset="-128"/>
+                <a:ea typeface="BIZ UDPゴシック" panose="020B0400000000000000" pitchFamily="50" charset="-128"/>
               </a:rPr>
               <a:t>の設計・評価指標</a:t>
             </a:r>
             <a:endParaRPr kumimoji="1" lang="en-US" altLang="ja-JP" sz="1400" dirty="0">
-              <a:latin typeface="メイリオ" panose="020B0604030504040204" pitchFamily="50" charset="-128"/>
-              <a:ea typeface="メイリオ" panose="020B0604030504040204" pitchFamily="50" charset="-128"/>
+              <a:latin typeface="BIZ UDPゴシック" panose="020B0400000000000000" pitchFamily="50" charset="-128"/>
+              <a:ea typeface="BIZ UDPゴシック" panose="020B0400000000000000" pitchFamily="50" charset="-128"/>
             </a:endParaRPr>
           </a:p>
           <a:p>
@@ -9259,14 +9203,14 @@
             </a:pPr>
             <a:r>
               <a:rPr lang="ja-JP" altLang="en-US" sz="1400" dirty="0">
-                <a:latin typeface="メイリオ" panose="020B0604030504040204" pitchFamily="50" charset="-128"/>
-                <a:ea typeface="メイリオ" panose="020B0604030504040204" pitchFamily="50" charset="-128"/>
+                <a:latin typeface="BIZ UDPゴシック" panose="020B0400000000000000" pitchFamily="50" charset="-128"/>
+                <a:ea typeface="BIZ UDPゴシック" panose="020B0400000000000000" pitchFamily="50" charset="-128"/>
               </a:rPr>
               <a:t>検証項目の決定と実行</a:t>
             </a:r>
             <a:endParaRPr kumimoji="1" lang="ja-JP" altLang="en-US" sz="1400" dirty="0">
-              <a:latin typeface="メイリオ" panose="020B0604030504040204" pitchFamily="50" charset="-128"/>
-              <a:ea typeface="メイリオ" panose="020B0604030504040204" pitchFamily="50" charset="-128"/>
+              <a:latin typeface="BIZ UDPゴシック" panose="020B0400000000000000" pitchFamily="50" charset="-128"/>
+              <a:ea typeface="BIZ UDPゴシック" panose="020B0400000000000000" pitchFamily="50" charset="-128"/>
             </a:endParaRPr>
           </a:p>
         </p:txBody>
@@ -9305,14 +9249,14 @@
             </a:pPr>
             <a:r>
               <a:rPr kumimoji="1" lang="ja-JP" altLang="en-US" sz="1400" dirty="0">
-                <a:latin typeface="メイリオ" panose="020B0604030504040204" pitchFamily="50" charset="-128"/>
-                <a:ea typeface="メイリオ" panose="020B0604030504040204" pitchFamily="50" charset="-128"/>
+                <a:latin typeface="BIZ UDPゴシック" panose="020B0400000000000000" pitchFamily="50" charset="-128"/>
+                <a:ea typeface="BIZ UDPゴシック" panose="020B0400000000000000" pitchFamily="50" charset="-128"/>
               </a:rPr>
               <a:t>ロードマップ</a:t>
             </a:r>
             <a:endParaRPr kumimoji="1" lang="en-US" altLang="ja-JP" sz="1400" dirty="0">
-              <a:latin typeface="メイリオ" panose="020B0604030504040204" pitchFamily="50" charset="-128"/>
-              <a:ea typeface="メイリオ" panose="020B0604030504040204" pitchFamily="50" charset="-128"/>
+              <a:latin typeface="BIZ UDPゴシック" panose="020B0400000000000000" pitchFamily="50" charset="-128"/>
+              <a:ea typeface="BIZ UDPゴシック" panose="020B0400000000000000" pitchFamily="50" charset="-128"/>
             </a:endParaRPr>
           </a:p>
           <a:p>
@@ -9322,14 +9266,14 @@
             </a:pPr>
             <a:r>
               <a:rPr lang="ja-JP" altLang="en-US" sz="1400" dirty="0">
-                <a:latin typeface="メイリオ" panose="020B0604030504040204" pitchFamily="50" charset="-128"/>
-                <a:ea typeface="メイリオ" panose="020B0604030504040204" pitchFamily="50" charset="-128"/>
+                <a:latin typeface="BIZ UDPゴシック" panose="020B0400000000000000" pitchFamily="50" charset="-128"/>
+                <a:ea typeface="BIZ UDPゴシック" panose="020B0400000000000000" pitchFamily="50" charset="-128"/>
               </a:rPr>
               <a:t>施策の方向性</a:t>
             </a:r>
             <a:endParaRPr lang="en-US" altLang="ja-JP" sz="1400" dirty="0">
-              <a:latin typeface="メイリオ" panose="020B0604030504040204" pitchFamily="50" charset="-128"/>
-              <a:ea typeface="メイリオ" panose="020B0604030504040204" pitchFamily="50" charset="-128"/>
+              <a:latin typeface="BIZ UDPゴシック" panose="020B0400000000000000" pitchFamily="50" charset="-128"/>
+              <a:ea typeface="BIZ UDPゴシック" panose="020B0400000000000000" pitchFamily="50" charset="-128"/>
             </a:endParaRPr>
           </a:p>
           <a:p>
@@ -9339,21 +9283,21 @@
             </a:pPr>
             <a:r>
               <a:rPr kumimoji="1" lang="en-US" altLang="ja-JP" sz="1400" dirty="0">
-                <a:latin typeface="メイリオ" panose="020B0604030504040204" pitchFamily="50" charset="-128"/>
-                <a:ea typeface="メイリオ" panose="020B0604030504040204" pitchFamily="50" charset="-128"/>
+                <a:latin typeface="BIZ UDPゴシック" panose="020B0400000000000000" pitchFamily="50" charset="-128"/>
+                <a:ea typeface="BIZ UDPゴシック" panose="020B0400000000000000" pitchFamily="50" charset="-128"/>
               </a:rPr>
               <a:t>KGI/KPI</a:t>
             </a:r>
             <a:r>
               <a:rPr kumimoji="1" lang="ja-JP" altLang="en-US" sz="1400" dirty="0">
-                <a:latin typeface="メイリオ" panose="020B0604030504040204" pitchFamily="50" charset="-128"/>
-                <a:ea typeface="メイリオ" panose="020B0604030504040204" pitchFamily="50" charset="-128"/>
+                <a:latin typeface="BIZ UDPゴシック" panose="020B0400000000000000" pitchFamily="50" charset="-128"/>
+                <a:ea typeface="BIZ UDPゴシック" panose="020B0400000000000000" pitchFamily="50" charset="-128"/>
               </a:rPr>
               <a:t>の設計・評価指標</a:t>
             </a:r>
             <a:endParaRPr kumimoji="1" lang="en-US" altLang="ja-JP" sz="1400" dirty="0">
-              <a:latin typeface="メイリオ" panose="020B0604030504040204" pitchFamily="50" charset="-128"/>
-              <a:ea typeface="メイリオ" panose="020B0604030504040204" pitchFamily="50" charset="-128"/>
+              <a:latin typeface="BIZ UDPゴシック" panose="020B0400000000000000" pitchFamily="50" charset="-128"/>
+              <a:ea typeface="BIZ UDPゴシック" panose="020B0400000000000000" pitchFamily="50" charset="-128"/>
             </a:endParaRPr>
           </a:p>
           <a:p>
@@ -9363,14 +9307,14 @@
             </a:pPr>
             <a:r>
               <a:rPr lang="ja-JP" altLang="en-US" sz="1400" dirty="0">
-                <a:latin typeface="メイリオ" panose="020B0604030504040204" pitchFamily="50" charset="-128"/>
-                <a:ea typeface="メイリオ" panose="020B0604030504040204" pitchFamily="50" charset="-128"/>
+                <a:latin typeface="BIZ UDPゴシック" panose="020B0400000000000000" pitchFamily="50" charset="-128"/>
+                <a:ea typeface="BIZ UDPゴシック" panose="020B0400000000000000" pitchFamily="50" charset="-128"/>
               </a:rPr>
               <a:t>検証項目の決定と実行</a:t>
             </a:r>
             <a:endParaRPr kumimoji="1" lang="ja-JP" altLang="en-US" sz="1400" dirty="0">
-              <a:latin typeface="メイリオ" panose="020B0604030504040204" pitchFamily="50" charset="-128"/>
-              <a:ea typeface="メイリオ" panose="020B0604030504040204" pitchFamily="50" charset="-128"/>
+              <a:latin typeface="BIZ UDPゴシック" panose="020B0400000000000000" pitchFamily="50" charset="-128"/>
+              <a:ea typeface="BIZ UDPゴシック" panose="020B0400000000000000" pitchFamily="50" charset="-128"/>
             </a:endParaRPr>
           </a:p>
         </p:txBody>
